--- a/モデリング/仲御徒町/プレゼンテーション1.pptx
+++ b/モデリング/仲御徒町/プレゼンテーション1.pptx
@@ -5,7 +5,7 @@
     <p:sldMasterId id="2147483648" r:id="rId1"/>
   </p:sldMasterIdLst>
   <p:notesMasterIdLst>
-    <p:notesMasterId r:id="rId18"/>
+    <p:notesMasterId r:id="rId20"/>
   </p:notesMasterIdLst>
   <p:sldIdLst>
     <p:sldId id="256" r:id="rId2"/>
@@ -17,13 +17,15 @@
     <p:sldId id="264" r:id="rId8"/>
     <p:sldId id="266" r:id="rId9"/>
     <p:sldId id="267" r:id="rId10"/>
-    <p:sldId id="268" r:id="rId11"/>
-    <p:sldId id="269" r:id="rId12"/>
-    <p:sldId id="270" r:id="rId13"/>
-    <p:sldId id="271" r:id="rId14"/>
-    <p:sldId id="272" r:id="rId15"/>
-    <p:sldId id="273" r:id="rId16"/>
-    <p:sldId id="265" r:id="rId17"/>
+    <p:sldId id="275" r:id="rId11"/>
+    <p:sldId id="268" r:id="rId12"/>
+    <p:sldId id="269" r:id="rId13"/>
+    <p:sldId id="274" r:id="rId14"/>
+    <p:sldId id="270" r:id="rId15"/>
+    <p:sldId id="271" r:id="rId16"/>
+    <p:sldId id="272" r:id="rId17"/>
+    <p:sldId id="273" r:id="rId18"/>
+    <p:sldId id="265" r:id="rId19"/>
   </p:sldIdLst>
   <p:sldSz cx="12192000" cy="6858000"/>
   <p:notesSz cx="6858000" cy="9144000"/>
@@ -212,7 +214,7 @@
           <a:p>
             <a:fld id="{1A2C2D1C-A15F-4124-9B2D-037315A70BDE}" type="datetimeFigureOut">
               <a:rPr kumimoji="1" lang="ja-JP" altLang="en-US" smtClean="0"/>
-              <a:t>2024/2/2</a:t>
+              <a:t>2025/11/14</a:t>
             </a:fld>
             <a:endParaRPr kumimoji="1" lang="ja-JP" altLang="en-US"/>
           </a:p>
@@ -576,7 +578,7 @@
           <a:p>
             <a:fld id="{216DBA95-13F1-4EA0-8478-D96549E42BBF}" type="slidenum">
               <a:rPr kumimoji="1" lang="ja-JP" altLang="en-US" smtClean="0"/>
-              <a:t>11</a:t>
+              <a:t>12</a:t>
             </a:fld>
             <a:endParaRPr kumimoji="1" lang="ja-JP" altLang="en-US"/>
           </a:p>
@@ -596,6 +598,114 @@
 </file>
 
 <file path=ppt/notesSlides/notesSlide2.xml><?xml version="1.0" encoding="utf-8"?>
+<p:notes xmlns:a="http://schemas.openxmlformats.org/drawingml/2006/main" xmlns:r="http://schemas.openxmlformats.org/officeDocument/2006/relationships" xmlns:p="http://schemas.openxmlformats.org/presentationml/2006/main">
+  <p:cSld>
+    <p:spTree>
+      <p:nvGrpSpPr>
+        <p:cNvPr id="1" name="">
+          <a:extLst>
+            <a:ext uri="{FF2B5EF4-FFF2-40B4-BE49-F238E27FC236}">
+              <a16:creationId xmlns:a16="http://schemas.microsoft.com/office/drawing/2014/main" id="{63F11DF5-5508-610D-4269-8023DEF89A36}"/>
+            </a:ext>
+          </a:extLst>
+        </p:cNvPr>
+        <p:cNvGrpSpPr/>
+        <p:nvPr/>
+      </p:nvGrpSpPr>
+      <p:grpSpPr>
+        <a:xfrm>
+          <a:off x="0" y="0"/>
+          <a:ext cx="0" cy="0"/>
+          <a:chOff x="0" y="0"/>
+          <a:chExt cx="0" cy="0"/>
+        </a:xfrm>
+      </p:grpSpPr>
+      <p:sp>
+        <p:nvSpPr>
+          <p:cNvPr id="2" name="スライド イメージ プレースホルダー 1">
+            <a:extLst>
+              <a:ext uri="{FF2B5EF4-FFF2-40B4-BE49-F238E27FC236}">
+                <a16:creationId xmlns:a16="http://schemas.microsoft.com/office/drawing/2014/main" id="{13C86404-7515-806A-4C08-5FC4B1C36916}"/>
+              </a:ext>
+            </a:extLst>
+          </p:cNvPr>
+          <p:cNvSpPr>
+            <a:spLocks noGrp="1" noRot="1" noChangeAspect="1"/>
+          </p:cNvSpPr>
+          <p:nvPr>
+            <p:ph type="sldImg"/>
+          </p:nvPr>
+        </p:nvSpPr>
+        <p:spPr/>
+      </p:sp>
+      <p:sp>
+        <p:nvSpPr>
+          <p:cNvPr id="3" name="ノート プレースホルダー 2">
+            <a:extLst>
+              <a:ext uri="{FF2B5EF4-FFF2-40B4-BE49-F238E27FC236}">
+                <a16:creationId xmlns:a16="http://schemas.microsoft.com/office/drawing/2014/main" id="{3F6B5BC6-F722-596E-5441-2FA778C4CFFD}"/>
+              </a:ext>
+            </a:extLst>
+          </p:cNvPr>
+          <p:cNvSpPr>
+            <a:spLocks noGrp="1"/>
+          </p:cNvSpPr>
+          <p:nvPr>
+            <p:ph type="body" idx="1"/>
+          </p:nvPr>
+        </p:nvSpPr>
+        <p:spPr/>
+        <p:txBody>
+          <a:bodyPr/>
+          <a:lstStyle/>
+          <a:p>
+            <a:endParaRPr kumimoji="1" lang="ja-JP" altLang="en-US" dirty="0"/>
+          </a:p>
+        </p:txBody>
+      </p:sp>
+      <p:sp>
+        <p:nvSpPr>
+          <p:cNvPr id="4" name="スライド番号プレースホルダー 3">
+            <a:extLst>
+              <a:ext uri="{FF2B5EF4-FFF2-40B4-BE49-F238E27FC236}">
+                <a16:creationId xmlns:a16="http://schemas.microsoft.com/office/drawing/2014/main" id="{698EB6F1-35D4-C16B-C610-A97DE3F67C4C}"/>
+              </a:ext>
+            </a:extLst>
+          </p:cNvPr>
+          <p:cNvSpPr>
+            <a:spLocks noGrp="1"/>
+          </p:cNvSpPr>
+          <p:nvPr>
+            <p:ph type="sldNum" sz="quarter" idx="5"/>
+          </p:nvPr>
+        </p:nvSpPr>
+        <p:spPr/>
+        <p:txBody>
+          <a:bodyPr/>
+          <a:lstStyle/>
+          <a:p>
+            <a:fld id="{216DBA95-13F1-4EA0-8478-D96549E42BBF}" type="slidenum">
+              <a:rPr kumimoji="1" lang="ja-JP" altLang="en-US" smtClean="0"/>
+              <a:t>13</a:t>
+            </a:fld>
+            <a:endParaRPr kumimoji="1" lang="ja-JP" altLang="en-US"/>
+          </a:p>
+        </p:txBody>
+      </p:sp>
+    </p:spTree>
+    <p:extLst>
+      <p:ext uri="{BB962C8B-B14F-4D97-AF65-F5344CB8AC3E}">
+        <p14:creationId xmlns:p14="http://schemas.microsoft.com/office/powerpoint/2010/main" val="2221160844"/>
+      </p:ext>
+    </p:extLst>
+  </p:cSld>
+  <p:clrMapOvr>
+    <a:masterClrMapping/>
+  </p:clrMapOvr>
+</p:notes>
+</file>
+
+<file path=ppt/notesSlides/notesSlide3.xml><?xml version="1.0" encoding="utf-8"?>
 <p:notes xmlns:a="http://schemas.openxmlformats.org/drawingml/2006/main" xmlns:r="http://schemas.openxmlformats.org/officeDocument/2006/relationships" xmlns:p="http://schemas.openxmlformats.org/presentationml/2006/main">
   <p:cSld>
     <p:spTree>
@@ -660,7 +770,7 @@
           <a:p>
             <a:fld id="{216DBA95-13F1-4EA0-8478-D96549E42BBF}" type="slidenum">
               <a:rPr kumimoji="1" lang="ja-JP" altLang="en-US" smtClean="0"/>
-              <a:t>15</a:t>
+              <a:t>17</a:t>
             </a:fld>
             <a:endParaRPr kumimoji="1" lang="ja-JP" altLang="en-US"/>
           </a:p>
@@ -826,7 +936,7 @@
           <a:p>
             <a:fld id="{0C9B67E9-9B6F-45C6-8324-1A71AE1B48B3}" type="datetimeFigureOut">
               <a:rPr kumimoji="1" lang="ja-JP" altLang="en-US" smtClean="0"/>
-              <a:t>2024/2/2</a:t>
+              <a:t>2025/11/14</a:t>
             </a:fld>
             <a:endParaRPr kumimoji="1" lang="ja-JP" altLang="en-US"/>
           </a:p>
@@ -1056,7 +1166,7 @@
           <a:p>
             <a:fld id="{0C9B67E9-9B6F-45C6-8324-1A71AE1B48B3}" type="datetimeFigureOut">
               <a:rPr kumimoji="1" lang="ja-JP" altLang="en-US" smtClean="0"/>
-              <a:t>2024/2/2</a:t>
+              <a:t>2025/11/14</a:t>
             </a:fld>
             <a:endParaRPr kumimoji="1" lang="ja-JP" altLang="en-US"/>
           </a:p>
@@ -1296,7 +1406,7 @@
           <a:p>
             <a:fld id="{0C9B67E9-9B6F-45C6-8324-1A71AE1B48B3}" type="datetimeFigureOut">
               <a:rPr kumimoji="1" lang="ja-JP" altLang="en-US" smtClean="0"/>
-              <a:t>2024/2/2</a:t>
+              <a:t>2025/11/14</a:t>
             </a:fld>
             <a:endParaRPr kumimoji="1" lang="ja-JP" altLang="en-US"/>
           </a:p>
@@ -1526,7 +1636,7 @@
           <a:p>
             <a:fld id="{0C9B67E9-9B6F-45C6-8324-1A71AE1B48B3}" type="datetimeFigureOut">
               <a:rPr kumimoji="1" lang="ja-JP" altLang="en-US" smtClean="0"/>
-              <a:t>2024/2/2</a:t>
+              <a:t>2025/11/14</a:t>
             </a:fld>
             <a:endParaRPr kumimoji="1" lang="ja-JP" altLang="en-US"/>
           </a:p>
@@ -1801,7 +1911,7 @@
           <a:p>
             <a:fld id="{0C9B67E9-9B6F-45C6-8324-1A71AE1B48B3}" type="datetimeFigureOut">
               <a:rPr kumimoji="1" lang="ja-JP" altLang="en-US" smtClean="0"/>
-              <a:t>2024/2/2</a:t>
+              <a:t>2025/11/14</a:t>
             </a:fld>
             <a:endParaRPr kumimoji="1" lang="ja-JP" altLang="en-US"/>
           </a:p>
@@ -2130,7 +2240,7 @@
           <a:p>
             <a:fld id="{0C9B67E9-9B6F-45C6-8324-1A71AE1B48B3}" type="datetimeFigureOut">
               <a:rPr kumimoji="1" lang="ja-JP" altLang="en-US" smtClean="0"/>
-              <a:t>2024/2/2</a:t>
+              <a:t>2025/11/14</a:t>
             </a:fld>
             <a:endParaRPr kumimoji="1" lang="ja-JP" altLang="en-US"/>
           </a:p>
@@ -2606,7 +2716,7 @@
           <a:p>
             <a:fld id="{0C9B67E9-9B6F-45C6-8324-1A71AE1B48B3}" type="datetimeFigureOut">
               <a:rPr kumimoji="1" lang="ja-JP" altLang="en-US" smtClean="0"/>
-              <a:t>2024/2/2</a:t>
+              <a:t>2025/11/14</a:t>
             </a:fld>
             <a:endParaRPr kumimoji="1" lang="ja-JP" altLang="en-US"/>
           </a:p>
@@ -2747,7 +2857,7 @@
           <a:p>
             <a:fld id="{0C9B67E9-9B6F-45C6-8324-1A71AE1B48B3}" type="datetimeFigureOut">
               <a:rPr kumimoji="1" lang="ja-JP" altLang="en-US" smtClean="0"/>
-              <a:t>2024/2/2</a:t>
+              <a:t>2025/11/14</a:t>
             </a:fld>
             <a:endParaRPr kumimoji="1" lang="ja-JP" altLang="en-US"/>
           </a:p>
@@ -2860,7 +2970,7 @@
           <a:p>
             <a:fld id="{0C9B67E9-9B6F-45C6-8324-1A71AE1B48B3}" type="datetimeFigureOut">
               <a:rPr kumimoji="1" lang="ja-JP" altLang="en-US" smtClean="0"/>
-              <a:t>2024/2/2</a:t>
+              <a:t>2025/11/14</a:t>
             </a:fld>
             <a:endParaRPr kumimoji="1" lang="ja-JP" altLang="en-US"/>
           </a:p>
@@ -3203,7 +3313,7 @@
           <a:p>
             <a:fld id="{0C9B67E9-9B6F-45C6-8324-1A71AE1B48B3}" type="datetimeFigureOut">
               <a:rPr kumimoji="1" lang="ja-JP" altLang="en-US" smtClean="0"/>
-              <a:t>2024/2/2</a:t>
+              <a:t>2025/11/14</a:t>
             </a:fld>
             <a:endParaRPr kumimoji="1" lang="ja-JP" altLang="en-US"/>
           </a:p>
@@ -3491,7 +3601,7 @@
           <a:p>
             <a:fld id="{0C9B67E9-9B6F-45C6-8324-1A71AE1B48B3}" type="datetimeFigureOut">
               <a:rPr kumimoji="1" lang="ja-JP" altLang="en-US" smtClean="0"/>
-              <a:t>2024/2/2</a:t>
+              <a:t>2025/11/14</a:t>
             </a:fld>
             <a:endParaRPr kumimoji="1" lang="ja-JP" altLang="en-US"/>
           </a:p>
@@ -3764,7 +3874,7 @@
           <a:p>
             <a:fld id="{0C9B67E9-9B6F-45C6-8324-1A71AE1B48B3}" type="datetimeFigureOut">
               <a:rPr kumimoji="1" lang="ja-JP" altLang="en-US" smtClean="0"/>
-              <a:t>2024/2/2</a:t>
+              <a:t>2025/11/14</a:t>
             </a:fld>
             <a:endParaRPr kumimoji="1" lang="ja-JP" altLang="en-US"/>
           </a:p>
@@ -4499,6 +4609,1031 @@
   <p:cSld>
     <p:spTree>
       <p:nvGrpSpPr>
+        <p:cNvPr id="1" name="">
+          <a:extLst>
+            <a:ext uri="{FF2B5EF4-FFF2-40B4-BE49-F238E27FC236}">
+              <a16:creationId xmlns:a16="http://schemas.microsoft.com/office/drawing/2014/main" id="{338A0362-A8B0-CEC1-9A14-58F46BC37677}"/>
+            </a:ext>
+          </a:extLst>
+        </p:cNvPr>
+        <p:cNvGrpSpPr/>
+        <p:nvPr/>
+      </p:nvGrpSpPr>
+      <p:grpSpPr>
+        <a:xfrm>
+          <a:off x="0" y="0"/>
+          <a:ext cx="0" cy="0"/>
+          <a:chOff x="0" y="0"/>
+          <a:chExt cx="0" cy="0"/>
+        </a:xfrm>
+      </p:grpSpPr>
+      <p:sp>
+        <p:nvSpPr>
+          <p:cNvPr id="4" name="正方形/長方形 3">
+            <a:extLst>
+              <a:ext uri="{FF2B5EF4-FFF2-40B4-BE49-F238E27FC236}">
+                <a16:creationId xmlns:a16="http://schemas.microsoft.com/office/drawing/2014/main" id="{71EBA0F3-2E6E-8E0F-590E-5158474BE2DE}"/>
+              </a:ext>
+            </a:extLst>
+          </p:cNvPr>
+          <p:cNvSpPr/>
+          <p:nvPr/>
+        </p:nvSpPr>
+        <p:spPr>
+          <a:xfrm>
+            <a:off x="2498006" y="546755"/>
+            <a:ext cx="8691610" cy="5081047"/>
+          </a:xfrm>
+          <a:prstGeom prst="rect">
+            <a:avLst/>
+          </a:prstGeom>
+          <a:gradFill>
+            <a:gsLst>
+              <a:gs pos="0">
+                <a:srgbClr val="C7C7C7"/>
+              </a:gs>
+              <a:gs pos="73000">
+                <a:srgbClr val="E1E1E1"/>
+              </a:gs>
+              <a:gs pos="50000">
+                <a:srgbClr val="E4E4E4"/>
+              </a:gs>
+              <a:gs pos="20000">
+                <a:srgbClr val="D5D5D5"/>
+              </a:gs>
+              <a:gs pos="100000">
+                <a:srgbClr val="CFCFCF"/>
+              </a:gs>
+            </a:gsLst>
+            <a:lin ang="5400000" scaled="1"/>
+          </a:gradFill>
+          <a:ln>
+            <a:noFill/>
+          </a:ln>
+        </p:spPr>
+        <p:style>
+          <a:lnRef idx="2">
+            <a:schemeClr val="accent1">
+              <a:shade val="15000"/>
+            </a:schemeClr>
+          </a:lnRef>
+          <a:fillRef idx="1">
+            <a:schemeClr val="accent1"/>
+          </a:fillRef>
+          <a:effectRef idx="0">
+            <a:schemeClr val="accent1"/>
+          </a:effectRef>
+          <a:fontRef idx="minor">
+            <a:schemeClr val="lt1"/>
+          </a:fontRef>
+        </p:style>
+        <p:txBody>
+          <a:bodyPr rtlCol="0" anchor="ctr"/>
+          <a:lstStyle/>
+          <a:p>
+            <a:pPr algn="ctr"/>
+            <a:endParaRPr kumimoji="1" lang="ja-JP" altLang="en-US"/>
+          </a:p>
+        </p:txBody>
+      </p:sp>
+      <p:cxnSp>
+        <p:nvCxnSpPr>
+          <p:cNvPr id="8" name="直線コネクタ 7">
+            <a:extLst>
+              <a:ext uri="{FF2B5EF4-FFF2-40B4-BE49-F238E27FC236}">
+                <a16:creationId xmlns:a16="http://schemas.microsoft.com/office/drawing/2014/main" id="{8F055E2F-5F35-7957-C406-F7D87C76B6BA}"/>
+              </a:ext>
+            </a:extLst>
+          </p:cNvPr>
+          <p:cNvCxnSpPr>
+            <a:cxnSpLocks/>
+          </p:cNvCxnSpPr>
+          <p:nvPr/>
+        </p:nvCxnSpPr>
+        <p:spPr>
+          <a:xfrm>
+            <a:off x="2309174" y="2321309"/>
+            <a:ext cx="2319975" cy="0"/>
+          </a:xfrm>
+          <a:prstGeom prst="line">
+            <a:avLst/>
+          </a:prstGeom>
+          <a:ln w="15240">
+            <a:solidFill>
+              <a:schemeClr val="tx1"/>
+            </a:solidFill>
+          </a:ln>
+        </p:spPr>
+        <p:style>
+          <a:lnRef idx="1">
+            <a:schemeClr val="accent1"/>
+          </a:lnRef>
+          <a:fillRef idx="0">
+            <a:schemeClr val="accent1"/>
+          </a:fillRef>
+          <a:effectRef idx="0">
+            <a:schemeClr val="accent1"/>
+          </a:effectRef>
+          <a:fontRef idx="minor">
+            <a:schemeClr val="tx1"/>
+          </a:fontRef>
+        </p:style>
+      </p:cxnSp>
+      <p:cxnSp>
+        <p:nvCxnSpPr>
+          <p:cNvPr id="11" name="直線コネクタ 10">
+            <a:extLst>
+              <a:ext uri="{FF2B5EF4-FFF2-40B4-BE49-F238E27FC236}">
+                <a16:creationId xmlns:a16="http://schemas.microsoft.com/office/drawing/2014/main" id="{3AC12D19-E173-9C2D-16D8-01ECE45BBECC}"/>
+              </a:ext>
+            </a:extLst>
+          </p:cNvPr>
+          <p:cNvCxnSpPr>
+            <a:cxnSpLocks/>
+          </p:cNvCxnSpPr>
+          <p:nvPr/>
+        </p:nvCxnSpPr>
+        <p:spPr>
+          <a:xfrm>
+            <a:off x="2110327" y="6073276"/>
+            <a:ext cx="6930076" cy="0"/>
+          </a:xfrm>
+          <a:prstGeom prst="line">
+            <a:avLst/>
+          </a:prstGeom>
+          <a:ln w="15240">
+            <a:solidFill>
+              <a:schemeClr val="tx1"/>
+            </a:solidFill>
+          </a:ln>
+        </p:spPr>
+        <p:style>
+          <a:lnRef idx="1">
+            <a:schemeClr val="accent1"/>
+          </a:lnRef>
+          <a:fillRef idx="0">
+            <a:schemeClr val="accent1"/>
+          </a:fillRef>
+          <a:effectRef idx="0">
+            <a:schemeClr val="accent1"/>
+          </a:effectRef>
+          <a:fontRef idx="minor">
+            <a:schemeClr val="tx1"/>
+          </a:fontRef>
+        </p:style>
+      </p:cxnSp>
+      <p:cxnSp>
+        <p:nvCxnSpPr>
+          <p:cNvPr id="12" name="直線コネクタ 11">
+            <a:extLst>
+              <a:ext uri="{FF2B5EF4-FFF2-40B4-BE49-F238E27FC236}">
+                <a16:creationId xmlns:a16="http://schemas.microsoft.com/office/drawing/2014/main" id="{6C74D2DB-ACB5-02A9-6218-B98AA207A0BB}"/>
+              </a:ext>
+            </a:extLst>
+          </p:cNvPr>
+          <p:cNvCxnSpPr>
+            <a:cxnSpLocks/>
+          </p:cNvCxnSpPr>
+          <p:nvPr/>
+        </p:nvCxnSpPr>
+        <p:spPr>
+          <a:xfrm>
+            <a:off x="3937949" y="409575"/>
+            <a:ext cx="0" cy="5353050"/>
+          </a:xfrm>
+          <a:prstGeom prst="line">
+            <a:avLst/>
+          </a:prstGeom>
+          <a:ln w="15240">
+            <a:solidFill>
+              <a:schemeClr val="tx1"/>
+            </a:solidFill>
+          </a:ln>
+        </p:spPr>
+        <p:style>
+          <a:lnRef idx="1">
+            <a:schemeClr val="accent1"/>
+          </a:lnRef>
+          <a:fillRef idx="0">
+            <a:schemeClr val="accent1"/>
+          </a:fillRef>
+          <a:effectRef idx="0">
+            <a:schemeClr val="accent1"/>
+          </a:effectRef>
+          <a:fontRef idx="minor">
+            <a:schemeClr val="tx1"/>
+          </a:fontRef>
+        </p:style>
+      </p:cxnSp>
+      <p:cxnSp>
+        <p:nvCxnSpPr>
+          <p:cNvPr id="14" name="直線コネクタ 13">
+            <a:extLst>
+              <a:ext uri="{FF2B5EF4-FFF2-40B4-BE49-F238E27FC236}">
+                <a16:creationId xmlns:a16="http://schemas.microsoft.com/office/drawing/2014/main" id="{53C4F1BB-14D1-60C7-8D59-B4C3CAFC2C50}"/>
+              </a:ext>
+            </a:extLst>
+          </p:cNvPr>
+          <p:cNvCxnSpPr>
+            <a:cxnSpLocks/>
+          </p:cNvCxnSpPr>
+          <p:nvPr/>
+        </p:nvCxnSpPr>
+        <p:spPr>
+          <a:xfrm>
+            <a:off x="6814499" y="409575"/>
+            <a:ext cx="0" cy="5353050"/>
+          </a:xfrm>
+          <a:prstGeom prst="line">
+            <a:avLst/>
+          </a:prstGeom>
+          <a:ln w="15240">
+            <a:solidFill>
+              <a:schemeClr val="tx1"/>
+            </a:solidFill>
+          </a:ln>
+        </p:spPr>
+        <p:style>
+          <a:lnRef idx="1">
+            <a:schemeClr val="accent1"/>
+          </a:lnRef>
+          <a:fillRef idx="0">
+            <a:schemeClr val="accent1"/>
+          </a:fillRef>
+          <a:effectRef idx="0">
+            <a:schemeClr val="accent1"/>
+          </a:effectRef>
+          <a:fontRef idx="minor">
+            <a:schemeClr val="tx1"/>
+          </a:fontRef>
+        </p:style>
+      </p:cxnSp>
+      <p:pic>
+        <p:nvPicPr>
+          <p:cNvPr id="1026" name="Picture 2" descr="東京メトロ日比谷線仲御徒町駅】アクセス・営業時間・料金情報 - じゃらんnet">
+            <a:extLst>
+              <a:ext uri="{FF2B5EF4-FFF2-40B4-BE49-F238E27FC236}">
+                <a16:creationId xmlns:a16="http://schemas.microsoft.com/office/drawing/2014/main" id="{9B532603-D0D7-59A6-F2D2-D88681F34C9D}"/>
+              </a:ext>
+            </a:extLst>
+          </p:cNvPr>
+          <p:cNvPicPr>
+            <a:picLocks noChangeAspect="1" noChangeArrowheads="1"/>
+          </p:cNvPicPr>
+          <p:nvPr/>
+        </p:nvPicPr>
+        <p:blipFill rotWithShape="1">
+          <a:blip r:embed="rId2">
+            <a:extLst>
+              <a:ext uri="{28A0092B-C50C-407E-A947-70E740481C1C}">
+                <a14:useLocalDpi xmlns:a14="http://schemas.microsoft.com/office/drawing/2010/main" val="0"/>
+              </a:ext>
+            </a:extLst>
+          </a:blip>
+          <a:srcRect l="10040" t="416" r="10000"/>
+          <a:stretch/>
+        </p:blipFill>
+        <p:spPr bwMode="auto">
+          <a:xfrm rot="21430118">
+            <a:off x="223558" y="1171673"/>
+            <a:ext cx="1435600" cy="1340942"/>
+          </a:xfrm>
+          <a:prstGeom prst="rect">
+            <a:avLst/>
+          </a:prstGeom>
+          <a:noFill/>
+          <a:extLst>
+            <a:ext uri="{909E8E84-426E-40DD-AFC4-6F175D3DCCD1}">
+              <a14:hiddenFill xmlns:a14="http://schemas.microsoft.com/office/drawing/2010/main">
+                <a:solidFill>
+                  <a:srgbClr val="FFFFFF"/>
+                </a:solidFill>
+              </a14:hiddenFill>
+            </a:ext>
+          </a:extLst>
+        </p:spPr>
+      </p:pic>
+      <p:sp>
+        <p:nvSpPr>
+          <p:cNvPr id="16" name="正方形/長方形 15">
+            <a:extLst>
+              <a:ext uri="{FF2B5EF4-FFF2-40B4-BE49-F238E27FC236}">
+                <a16:creationId xmlns:a16="http://schemas.microsoft.com/office/drawing/2014/main" id="{F5482E75-6BB5-E266-0373-70409A62344B}"/>
+              </a:ext>
+            </a:extLst>
+          </p:cNvPr>
+          <p:cNvSpPr/>
+          <p:nvPr/>
+        </p:nvSpPr>
+        <p:spPr>
+          <a:xfrm>
+            <a:off x="3628466" y="2109831"/>
+            <a:ext cx="623670" cy="553533"/>
+          </a:xfrm>
+          <a:prstGeom prst="rect">
+            <a:avLst/>
+          </a:prstGeom>
+          <a:solidFill>
+            <a:srgbClr val="C8C5B6"/>
+          </a:solidFill>
+          <a:ln>
+            <a:noFill/>
+          </a:ln>
+        </p:spPr>
+        <p:style>
+          <a:lnRef idx="2">
+            <a:schemeClr val="accent1">
+              <a:shade val="15000"/>
+            </a:schemeClr>
+          </a:lnRef>
+          <a:fillRef idx="1">
+            <a:schemeClr val="accent1"/>
+          </a:fillRef>
+          <a:effectRef idx="0">
+            <a:schemeClr val="accent1"/>
+          </a:effectRef>
+          <a:fontRef idx="minor">
+            <a:schemeClr val="lt1"/>
+          </a:fontRef>
+        </p:style>
+        <p:txBody>
+          <a:bodyPr rtlCol="0" anchor="ctr"/>
+          <a:lstStyle/>
+          <a:p>
+            <a:pPr algn="ctr"/>
+            <a:endParaRPr kumimoji="1" lang="ja-JP" altLang="en-US"/>
+          </a:p>
+        </p:txBody>
+      </p:sp>
+      <p:pic>
+        <p:nvPicPr>
+          <p:cNvPr id="15" name="Picture 2" descr="東京メトロ日比谷線仲御徒町駅】アクセス・営業時間・料金情報 - じゃらんnet">
+            <a:extLst>
+              <a:ext uri="{FF2B5EF4-FFF2-40B4-BE49-F238E27FC236}">
+                <a16:creationId xmlns:a16="http://schemas.microsoft.com/office/drawing/2014/main" id="{19146CE3-8C1D-F585-F5FB-3E0DB728A8CC}"/>
+              </a:ext>
+            </a:extLst>
+          </p:cNvPr>
+          <p:cNvPicPr>
+            <a:picLocks noChangeAspect="1" noChangeArrowheads="1"/>
+          </p:cNvPicPr>
+          <p:nvPr/>
+        </p:nvPicPr>
+        <p:blipFill rotWithShape="1">
+          <a:blip r:embed="rId3">
+            <a:extLst>
+              <a:ext uri="{BEBA8EAE-BF5A-486C-A8C5-ECC9F3942E4B}">
+                <a14:imgProps xmlns:a14="http://schemas.microsoft.com/office/drawing/2010/main">
+                  <a14:imgLayer r:embed="rId4">
+                    <a14:imgEffect>
+                      <a14:backgroundRemoval t="14167" b="60625" l="20469" r="83906">
+                        <a14:foregroundMark x1="23281" y1="16875" x2="20469" y2="23542"/>
+                        <a14:foregroundMark x1="25313" y1="20625" x2="25313" y2="21458"/>
+                        <a14:foregroundMark x1="37969" y1="16875" x2="37656" y2="17083"/>
+                        <a14:foregroundMark x1="46094" y1="17292" x2="46406" y2="19167"/>
+                        <a14:foregroundMark x1="46094" y1="28750" x2="46250" y2="30625"/>
+                        <a14:foregroundMark x1="45625" y1="31250" x2="45781" y2="33542"/>
+                        <a14:foregroundMark x1="53906" y1="18750" x2="52969" y2="19375"/>
+                        <a14:foregroundMark x1="54063" y1="22917" x2="52188" y2="26042"/>
+                        <a14:foregroundMark x1="57188" y1="19375" x2="57656" y2="19375"/>
+                        <a14:foregroundMark x1="57344" y1="28125" x2="57188" y2="29583"/>
+                        <a14:foregroundMark x1="57813" y1="28958" x2="65156" y2="32500"/>
+                        <a14:foregroundMark x1="67969" y1="18958" x2="69844" y2="18125"/>
+                        <a14:foregroundMark x1="76719" y1="19792" x2="77344" y2="33542"/>
+                        <a14:foregroundMark x1="23750" y1="39167" x2="25156" y2="38958"/>
+                        <a14:foregroundMark x1="22969" y1="38750" x2="28281" y2="38958"/>
+                        <a14:foregroundMark x1="32656" y1="38750" x2="76250" y2="43333"/>
+                        <a14:foregroundMark x1="15469" y1="51875" x2="62187" y2="52500"/>
+                        <a14:foregroundMark x1="62187" y1="52500" x2="25313" y2="60625"/>
+                        <a14:foregroundMark x1="25313" y1="60625" x2="80000" y2="53542"/>
+                        <a14:foregroundMark x1="78125" y1="57917" x2="83906" y2="54167"/>
+                        <a14:backgroundMark x1="34219" y1="32917" x2="33750" y2="34583"/>
+                        <a14:backgroundMark x1="68585" y1="46401" x2="70938" y2="49792"/>
+                        <a14:backgroundMark x1="60444" y1="34671" x2="62785" y2="38044"/>
+                        <a14:backgroundMark x1="56872" y1="29524" x2="57187" y2="29979"/>
+                        <a14:backgroundMark x1="55513" y1="27566" x2="55683" y2="27811"/>
+                        <a14:backgroundMark x1="70938" y1="49792" x2="63074" y2="50656"/>
+                        <a14:backgroundMark x1="58388" y1="37582" x2="61084" y2="34980"/>
+                        <a14:backgroundMark x1="47030" y1="48544" x2="51150" y2="44568"/>
+                        <a14:backgroundMark x1="45517" y1="30733" x2="45587" y2="31255"/>
+                        <a14:backgroundMark x1="44219" y1="21042" x2="45267" y2="28872"/>
+                      </a14:backgroundRemoval>
+                    </a14:imgEffect>
+                  </a14:imgLayer>
+                </a14:imgProps>
+              </a:ext>
+              <a:ext uri="{28A0092B-C50C-407E-A947-70E740481C1C}">
+                <a14:useLocalDpi xmlns:a14="http://schemas.microsoft.com/office/drawing/2010/main" val="0"/>
+              </a:ext>
+            </a:extLst>
+          </a:blip>
+          <a:srcRect l="15016" t="8529" r="10000" b="34943"/>
+          <a:stretch/>
+        </p:blipFill>
+        <p:spPr bwMode="auto">
+          <a:xfrm rot="-60000">
+            <a:off x="3656528" y="2125927"/>
+            <a:ext cx="562843" cy="318231"/>
+          </a:xfrm>
+          <a:prstGeom prst="rect">
+            <a:avLst/>
+          </a:prstGeom>
+          <a:noFill/>
+          <a:extLst>
+            <a:ext uri="{909E8E84-426E-40DD-AFC4-6F175D3DCCD1}">
+              <a14:hiddenFill xmlns:a14="http://schemas.microsoft.com/office/drawing/2010/main">
+                <a:solidFill>
+                  <a:srgbClr val="FFFFFF"/>
+                </a:solidFill>
+              </a14:hiddenFill>
+            </a:ext>
+          </a:extLst>
+        </p:spPr>
+      </p:pic>
+      <p:sp>
+        <p:nvSpPr>
+          <p:cNvPr id="17" name="正方形/長方形 16">
+            <a:extLst>
+              <a:ext uri="{FF2B5EF4-FFF2-40B4-BE49-F238E27FC236}">
+                <a16:creationId xmlns:a16="http://schemas.microsoft.com/office/drawing/2014/main" id="{21FB6EA4-785C-1C6F-2FA6-3334B2DDA798}"/>
+              </a:ext>
+            </a:extLst>
+          </p:cNvPr>
+          <p:cNvSpPr/>
+          <p:nvPr/>
+        </p:nvSpPr>
+        <p:spPr>
+          <a:xfrm>
+            <a:off x="3650164" y="2445431"/>
+            <a:ext cx="568312" cy="193906"/>
+          </a:xfrm>
+          <a:prstGeom prst="rect">
+            <a:avLst/>
+          </a:prstGeom>
+          <a:solidFill>
+            <a:srgbClr val="817867"/>
+          </a:solidFill>
+          <a:ln>
+            <a:noFill/>
+          </a:ln>
+        </p:spPr>
+        <p:style>
+          <a:lnRef idx="2">
+            <a:schemeClr val="accent1">
+              <a:shade val="15000"/>
+            </a:schemeClr>
+          </a:lnRef>
+          <a:fillRef idx="1">
+            <a:schemeClr val="accent1"/>
+          </a:fillRef>
+          <a:effectRef idx="0">
+            <a:schemeClr val="accent1"/>
+          </a:effectRef>
+          <a:fontRef idx="minor">
+            <a:schemeClr val="lt1"/>
+          </a:fontRef>
+        </p:style>
+        <p:txBody>
+          <a:bodyPr rtlCol="0" anchor="ctr"/>
+          <a:lstStyle/>
+          <a:p>
+            <a:pPr algn="ctr"/>
+            <a:endParaRPr kumimoji="1" lang="ja-JP" altLang="en-US"/>
+          </a:p>
+        </p:txBody>
+      </p:sp>
+      <p:pic>
+        <p:nvPicPr>
+          <p:cNvPr id="18" name="Picture 2" descr="東京メトロ日比谷線仲御徒町駅】アクセス・営業時間・料金情報 - じゃらんnet">
+            <a:extLst>
+              <a:ext uri="{FF2B5EF4-FFF2-40B4-BE49-F238E27FC236}">
+                <a16:creationId xmlns:a16="http://schemas.microsoft.com/office/drawing/2014/main" id="{021271B9-F07C-AA4F-8A87-0F1BC0C9DE6F}"/>
+              </a:ext>
+            </a:extLst>
+          </p:cNvPr>
+          <p:cNvPicPr>
+            <a:picLocks noChangeAspect="1" noChangeArrowheads="1"/>
+          </p:cNvPicPr>
+          <p:nvPr/>
+        </p:nvPicPr>
+        <p:blipFill rotWithShape="1">
+          <a:blip r:embed="rId5">
+            <a:extLst>
+              <a:ext uri="{BEBA8EAE-BF5A-486C-A8C5-ECC9F3942E4B}">
+                <a14:imgProps xmlns:a14="http://schemas.microsoft.com/office/drawing/2010/main">
+                  <a14:imgLayer r:embed="rId4">
+                    <a14:imgEffect>
+                      <a14:backgroundRemoval t="66250" b="97292" l="37344" r="61719">
+                        <a14:foregroundMark x1="48438" y1="67500" x2="49375" y2="71458"/>
+                        <a14:foregroundMark x1="47813" y1="66458" x2="39844" y2="76875"/>
+                        <a14:foregroundMark x1="44063" y1="68958" x2="56094" y2="95833"/>
+                        <a14:foregroundMark x1="44375" y1="68958" x2="55156" y2="95833"/>
+                        <a14:foregroundMark x1="53750" y1="96667" x2="46719" y2="66458"/>
+                        <a14:foregroundMark x1="42188" y1="67917" x2="53438" y2="96250"/>
+                        <a14:foregroundMark x1="53750" y1="96458" x2="50156" y2="97083"/>
+                        <a14:foregroundMark x1="52812" y1="97292" x2="43281" y2="93750"/>
+                        <a14:foregroundMark x1="46719" y1="96042" x2="40156" y2="90000"/>
+                        <a14:foregroundMark x1="40781" y1="91042" x2="38594" y2="80417"/>
+                        <a14:foregroundMark x1="48438" y1="67292" x2="59375" y2="76458"/>
+                        <a14:foregroundMark x1="48906" y1="67292" x2="53906" y2="69167"/>
+                        <a14:foregroundMark x1="59219" y1="76875" x2="59844" y2="83750"/>
+                        <a14:foregroundMark x1="50156" y1="67500" x2="61719" y2="85833"/>
+                        <a14:foregroundMark x1="61250" y1="83958" x2="60156" y2="88958"/>
+                      </a14:backgroundRemoval>
+                    </a14:imgEffect>
+                  </a14:imgLayer>
+                </a14:imgProps>
+              </a:ext>
+              <a:ext uri="{28A0092B-C50C-407E-A947-70E740481C1C}">
+                <a14:useLocalDpi xmlns:a14="http://schemas.microsoft.com/office/drawing/2010/main" val="0"/>
+              </a:ext>
+            </a:extLst>
+          </a:blip>
+          <a:srcRect l="34568" t="65530" r="36321" b="188"/>
+          <a:stretch/>
+        </p:blipFill>
+        <p:spPr bwMode="auto">
+          <a:xfrm rot="21427859">
+            <a:off x="3836156" y="2457490"/>
+            <a:ext cx="196327" cy="173404"/>
+          </a:xfrm>
+          <a:prstGeom prst="rect">
+            <a:avLst/>
+          </a:prstGeom>
+          <a:noFill/>
+          <a:extLst>
+            <a:ext uri="{909E8E84-426E-40DD-AFC4-6F175D3DCCD1}">
+              <a14:hiddenFill xmlns:a14="http://schemas.microsoft.com/office/drawing/2010/main">
+                <a:solidFill>
+                  <a:srgbClr val="FFFFFF"/>
+                </a:solidFill>
+              </a14:hiddenFill>
+            </a:ext>
+          </a:extLst>
+        </p:spPr>
+      </p:pic>
+      <p:cxnSp>
+        <p:nvCxnSpPr>
+          <p:cNvPr id="2" name="直線コネクタ 1">
+            <a:extLst>
+              <a:ext uri="{FF2B5EF4-FFF2-40B4-BE49-F238E27FC236}">
+                <a16:creationId xmlns:a16="http://schemas.microsoft.com/office/drawing/2014/main" id="{2ECC4621-F135-D395-7C7C-B948FC498A75}"/>
+              </a:ext>
+            </a:extLst>
+          </p:cNvPr>
+          <p:cNvCxnSpPr>
+            <a:cxnSpLocks/>
+          </p:cNvCxnSpPr>
+          <p:nvPr/>
+        </p:nvCxnSpPr>
+        <p:spPr>
+          <a:xfrm>
+            <a:off x="4629149" y="409575"/>
+            <a:ext cx="0" cy="5353050"/>
+          </a:xfrm>
+          <a:prstGeom prst="line">
+            <a:avLst/>
+          </a:prstGeom>
+          <a:ln w="15240">
+            <a:solidFill>
+              <a:schemeClr val="tx1"/>
+            </a:solidFill>
+          </a:ln>
+        </p:spPr>
+        <p:style>
+          <a:lnRef idx="1">
+            <a:schemeClr val="accent1"/>
+          </a:lnRef>
+          <a:fillRef idx="0">
+            <a:schemeClr val="accent1"/>
+          </a:fillRef>
+          <a:effectRef idx="0">
+            <a:schemeClr val="accent1"/>
+          </a:effectRef>
+          <a:fontRef idx="minor">
+            <a:schemeClr val="tx1"/>
+          </a:fontRef>
+        </p:style>
+      </p:cxnSp>
+      <p:cxnSp>
+        <p:nvCxnSpPr>
+          <p:cNvPr id="5" name="直線コネクタ 4">
+            <a:extLst>
+              <a:ext uri="{FF2B5EF4-FFF2-40B4-BE49-F238E27FC236}">
+                <a16:creationId xmlns:a16="http://schemas.microsoft.com/office/drawing/2014/main" id="{58FCE717-220C-9181-2171-9DC7AAC107E1}"/>
+              </a:ext>
+            </a:extLst>
+          </p:cNvPr>
+          <p:cNvCxnSpPr>
+            <a:cxnSpLocks/>
+          </p:cNvCxnSpPr>
+          <p:nvPr/>
+        </p:nvCxnSpPr>
+        <p:spPr>
+          <a:xfrm>
+            <a:off x="6089614" y="2321309"/>
+            <a:ext cx="5778732" cy="0"/>
+          </a:xfrm>
+          <a:prstGeom prst="line">
+            <a:avLst/>
+          </a:prstGeom>
+          <a:ln w="15240">
+            <a:solidFill>
+              <a:schemeClr val="tx1"/>
+            </a:solidFill>
+          </a:ln>
+        </p:spPr>
+        <p:style>
+          <a:lnRef idx="1">
+            <a:schemeClr val="accent1"/>
+          </a:lnRef>
+          <a:fillRef idx="0">
+            <a:schemeClr val="accent1"/>
+          </a:fillRef>
+          <a:effectRef idx="0">
+            <a:schemeClr val="accent1"/>
+          </a:effectRef>
+          <a:fontRef idx="minor">
+            <a:schemeClr val="tx1"/>
+          </a:fontRef>
+        </p:style>
+      </p:cxnSp>
+      <p:cxnSp>
+        <p:nvCxnSpPr>
+          <p:cNvPr id="6" name="直線コネクタ 5">
+            <a:extLst>
+              <a:ext uri="{FF2B5EF4-FFF2-40B4-BE49-F238E27FC236}">
+                <a16:creationId xmlns:a16="http://schemas.microsoft.com/office/drawing/2014/main" id="{2933297C-5D7A-719A-72E7-283259184809}"/>
+              </a:ext>
+            </a:extLst>
+          </p:cNvPr>
+          <p:cNvCxnSpPr>
+            <a:cxnSpLocks/>
+          </p:cNvCxnSpPr>
+          <p:nvPr/>
+        </p:nvCxnSpPr>
+        <p:spPr>
+          <a:xfrm>
+            <a:off x="6099629" y="392289"/>
+            <a:ext cx="0" cy="5353050"/>
+          </a:xfrm>
+          <a:prstGeom prst="line">
+            <a:avLst/>
+          </a:prstGeom>
+          <a:ln w="15240">
+            <a:solidFill>
+              <a:schemeClr val="tx1"/>
+            </a:solidFill>
+          </a:ln>
+        </p:spPr>
+        <p:style>
+          <a:lnRef idx="1">
+            <a:schemeClr val="accent1"/>
+          </a:lnRef>
+          <a:fillRef idx="0">
+            <a:schemeClr val="accent1"/>
+          </a:fillRef>
+          <a:effectRef idx="0">
+            <a:schemeClr val="accent1"/>
+          </a:effectRef>
+          <a:fontRef idx="minor">
+            <a:schemeClr val="tx1"/>
+          </a:fontRef>
+        </p:style>
+      </p:cxnSp>
+      <p:cxnSp>
+        <p:nvCxnSpPr>
+          <p:cNvPr id="9" name="直線コネクタ 8">
+            <a:extLst>
+              <a:ext uri="{FF2B5EF4-FFF2-40B4-BE49-F238E27FC236}">
+                <a16:creationId xmlns:a16="http://schemas.microsoft.com/office/drawing/2014/main" id="{9390B449-85FA-41DB-BA23-9AB18A3E8BFA}"/>
+              </a:ext>
+            </a:extLst>
+          </p:cNvPr>
+          <p:cNvCxnSpPr>
+            <a:cxnSpLocks/>
+          </p:cNvCxnSpPr>
+          <p:nvPr/>
+        </p:nvCxnSpPr>
+        <p:spPr>
+          <a:xfrm>
+            <a:off x="2320169" y="4151685"/>
+            <a:ext cx="2319975" cy="0"/>
+          </a:xfrm>
+          <a:prstGeom prst="line">
+            <a:avLst/>
+          </a:prstGeom>
+          <a:ln w="15240">
+            <a:solidFill>
+              <a:schemeClr val="tx1"/>
+            </a:solidFill>
+          </a:ln>
+        </p:spPr>
+        <p:style>
+          <a:lnRef idx="1">
+            <a:schemeClr val="accent1"/>
+          </a:lnRef>
+          <a:fillRef idx="0">
+            <a:schemeClr val="accent1"/>
+          </a:fillRef>
+          <a:effectRef idx="0">
+            <a:schemeClr val="accent1"/>
+          </a:effectRef>
+          <a:fontRef idx="minor">
+            <a:schemeClr val="tx1"/>
+          </a:fontRef>
+        </p:style>
+      </p:cxnSp>
+      <p:cxnSp>
+        <p:nvCxnSpPr>
+          <p:cNvPr id="10" name="直線コネクタ 9">
+            <a:extLst>
+              <a:ext uri="{FF2B5EF4-FFF2-40B4-BE49-F238E27FC236}">
+                <a16:creationId xmlns:a16="http://schemas.microsoft.com/office/drawing/2014/main" id="{77693887-C28A-B3FD-A221-6C474BDEA22C}"/>
+              </a:ext>
+            </a:extLst>
+          </p:cNvPr>
+          <p:cNvCxnSpPr>
+            <a:cxnSpLocks/>
+          </p:cNvCxnSpPr>
+          <p:nvPr/>
+        </p:nvCxnSpPr>
+        <p:spPr>
+          <a:xfrm>
+            <a:off x="6100610" y="4132827"/>
+            <a:ext cx="5767736" cy="0"/>
+          </a:xfrm>
+          <a:prstGeom prst="line">
+            <a:avLst/>
+          </a:prstGeom>
+          <a:ln w="15240">
+            <a:solidFill>
+              <a:schemeClr val="tx1"/>
+            </a:solidFill>
+          </a:ln>
+        </p:spPr>
+        <p:style>
+          <a:lnRef idx="1">
+            <a:schemeClr val="accent1"/>
+          </a:lnRef>
+          <a:fillRef idx="0">
+            <a:schemeClr val="accent1"/>
+          </a:fillRef>
+          <a:effectRef idx="0">
+            <a:schemeClr val="accent1"/>
+          </a:effectRef>
+          <a:fontRef idx="minor">
+            <a:schemeClr val="tx1"/>
+          </a:fontRef>
+        </p:style>
+      </p:cxnSp>
+      <p:cxnSp>
+        <p:nvCxnSpPr>
+          <p:cNvPr id="13" name="直線コネクタ 12">
+            <a:extLst>
+              <a:ext uri="{FF2B5EF4-FFF2-40B4-BE49-F238E27FC236}">
+                <a16:creationId xmlns:a16="http://schemas.microsoft.com/office/drawing/2014/main" id="{033C9803-A8D5-1C37-4E54-FE251A5EC852}"/>
+              </a:ext>
+            </a:extLst>
+          </p:cNvPr>
+          <p:cNvCxnSpPr>
+            <a:cxnSpLocks/>
+          </p:cNvCxnSpPr>
+          <p:nvPr/>
+        </p:nvCxnSpPr>
+        <p:spPr>
+          <a:xfrm>
+            <a:off x="4630032" y="2718804"/>
+            <a:ext cx="1469009" cy="1535"/>
+          </a:xfrm>
+          <a:prstGeom prst="line">
+            <a:avLst/>
+          </a:prstGeom>
+          <a:ln w="15240">
+            <a:solidFill>
+              <a:schemeClr val="tx1"/>
+            </a:solidFill>
+          </a:ln>
+        </p:spPr>
+        <p:style>
+          <a:lnRef idx="1">
+            <a:schemeClr val="accent1"/>
+          </a:lnRef>
+          <a:fillRef idx="0">
+            <a:schemeClr val="accent1"/>
+          </a:fillRef>
+          <a:effectRef idx="0">
+            <a:schemeClr val="accent1"/>
+          </a:effectRef>
+          <a:fontRef idx="minor">
+            <a:schemeClr val="tx1"/>
+          </a:fontRef>
+        </p:style>
+      </p:cxnSp>
+      <p:cxnSp>
+        <p:nvCxnSpPr>
+          <p:cNvPr id="20" name="直線コネクタ 19">
+            <a:extLst>
+              <a:ext uri="{FF2B5EF4-FFF2-40B4-BE49-F238E27FC236}">
+                <a16:creationId xmlns:a16="http://schemas.microsoft.com/office/drawing/2014/main" id="{13B64A44-F77A-D914-972B-4BB72B989738}"/>
+              </a:ext>
+            </a:extLst>
+          </p:cNvPr>
+          <p:cNvCxnSpPr>
+            <a:cxnSpLocks/>
+          </p:cNvCxnSpPr>
+          <p:nvPr/>
+        </p:nvCxnSpPr>
+        <p:spPr>
+          <a:xfrm>
+            <a:off x="4631601" y="4011847"/>
+            <a:ext cx="1469009" cy="1535"/>
+          </a:xfrm>
+          <a:prstGeom prst="line">
+            <a:avLst/>
+          </a:prstGeom>
+          <a:ln w="15240">
+            <a:solidFill>
+              <a:schemeClr val="tx1"/>
+            </a:solidFill>
+          </a:ln>
+        </p:spPr>
+        <p:style>
+          <a:lnRef idx="1">
+            <a:schemeClr val="accent1"/>
+          </a:lnRef>
+          <a:fillRef idx="0">
+            <a:schemeClr val="accent1"/>
+          </a:fillRef>
+          <a:effectRef idx="0">
+            <a:schemeClr val="accent1"/>
+          </a:effectRef>
+          <a:fontRef idx="minor">
+            <a:schemeClr val="tx1"/>
+          </a:fontRef>
+        </p:style>
+      </p:cxnSp>
+      <p:cxnSp>
+        <p:nvCxnSpPr>
+          <p:cNvPr id="21" name="直線コネクタ 20">
+            <a:extLst>
+              <a:ext uri="{FF2B5EF4-FFF2-40B4-BE49-F238E27FC236}">
+                <a16:creationId xmlns:a16="http://schemas.microsoft.com/office/drawing/2014/main" id="{5189435B-9E86-81C0-4E0F-63E3F4699738}"/>
+              </a:ext>
+            </a:extLst>
+          </p:cNvPr>
+          <p:cNvCxnSpPr>
+            <a:cxnSpLocks/>
+          </p:cNvCxnSpPr>
+          <p:nvPr/>
+        </p:nvCxnSpPr>
+        <p:spPr>
+          <a:xfrm>
+            <a:off x="4631603" y="1636292"/>
+            <a:ext cx="1469009" cy="1535"/>
+          </a:xfrm>
+          <a:prstGeom prst="line">
+            <a:avLst/>
+          </a:prstGeom>
+          <a:ln w="15240">
+            <a:solidFill>
+              <a:schemeClr val="tx1"/>
+            </a:solidFill>
+          </a:ln>
+        </p:spPr>
+        <p:style>
+          <a:lnRef idx="1">
+            <a:schemeClr val="accent1"/>
+          </a:lnRef>
+          <a:fillRef idx="0">
+            <a:schemeClr val="accent1"/>
+          </a:fillRef>
+          <a:effectRef idx="0">
+            <a:schemeClr val="accent1"/>
+          </a:effectRef>
+          <a:fontRef idx="minor">
+            <a:schemeClr val="tx1"/>
+          </a:fontRef>
+        </p:style>
+      </p:cxnSp>
+      <p:sp>
+        <p:nvSpPr>
+          <p:cNvPr id="7" name="二等辺三角形 6">
+            <a:extLst>
+              <a:ext uri="{FF2B5EF4-FFF2-40B4-BE49-F238E27FC236}">
+                <a16:creationId xmlns:a16="http://schemas.microsoft.com/office/drawing/2014/main" id="{B6F4FE14-A0B4-AACF-85B6-CD00243B49F6}"/>
+              </a:ext>
+            </a:extLst>
+          </p:cNvPr>
+          <p:cNvSpPr/>
+          <p:nvPr/>
+        </p:nvSpPr>
+        <p:spPr>
+          <a:xfrm rot="10800000">
+            <a:off x="4629150" y="542925"/>
+            <a:ext cx="1466850" cy="5086350"/>
+          </a:xfrm>
+          <a:prstGeom prst="triangle">
+            <a:avLst/>
+          </a:prstGeom>
+          <a:solidFill>
+            <a:srgbClr val="A40000"/>
+          </a:solidFill>
+          <a:ln w="22860">
+            <a:solidFill>
+              <a:schemeClr val="tx1">
+                <a:lumMod val="75000"/>
+                <a:lumOff val="25000"/>
+              </a:schemeClr>
+            </a:solidFill>
+          </a:ln>
+        </p:spPr>
+        <p:style>
+          <a:lnRef idx="2">
+            <a:schemeClr val="accent1">
+              <a:shade val="15000"/>
+            </a:schemeClr>
+          </a:lnRef>
+          <a:fillRef idx="1">
+            <a:schemeClr val="accent1"/>
+          </a:fillRef>
+          <a:effectRef idx="0">
+            <a:schemeClr val="accent1"/>
+          </a:effectRef>
+          <a:fontRef idx="minor">
+            <a:schemeClr val="lt1"/>
+          </a:fontRef>
+        </p:style>
+        <p:txBody>
+          <a:bodyPr rtlCol="0" anchor="ctr"/>
+          <a:lstStyle/>
+          <a:p>
+            <a:pPr algn="ctr"/>
+            <a:endParaRPr kumimoji="1" lang="ja-JP" altLang="en-US"/>
+          </a:p>
+        </p:txBody>
+      </p:sp>
+      <p:cxnSp>
+        <p:nvCxnSpPr>
+          <p:cNvPr id="22" name="直線コネクタ 21">
+            <a:extLst>
+              <a:ext uri="{FF2B5EF4-FFF2-40B4-BE49-F238E27FC236}">
+                <a16:creationId xmlns:a16="http://schemas.microsoft.com/office/drawing/2014/main" id="{DF4EAB1C-121E-8F65-1F01-B5B08C25AB11}"/>
+              </a:ext>
+            </a:extLst>
+          </p:cNvPr>
+          <p:cNvCxnSpPr>
+            <a:cxnSpLocks/>
+          </p:cNvCxnSpPr>
+          <p:nvPr/>
+        </p:nvCxnSpPr>
+        <p:spPr>
+          <a:xfrm>
+            <a:off x="8993760" y="392289"/>
+            <a:ext cx="0" cy="5353050"/>
+          </a:xfrm>
+          <a:prstGeom prst="line">
+            <a:avLst/>
+          </a:prstGeom>
+          <a:ln w="15240">
+            <a:solidFill>
+              <a:schemeClr val="tx1"/>
+            </a:solidFill>
+          </a:ln>
+        </p:spPr>
+        <p:style>
+          <a:lnRef idx="1">
+            <a:schemeClr val="accent1"/>
+          </a:lnRef>
+          <a:fillRef idx="0">
+            <a:schemeClr val="accent1"/>
+          </a:fillRef>
+          <a:effectRef idx="0">
+            <a:schemeClr val="accent1"/>
+          </a:effectRef>
+          <a:fontRef idx="minor">
+            <a:schemeClr val="tx1"/>
+          </a:fontRef>
+        </p:style>
+      </p:cxnSp>
+    </p:spTree>
+    <p:extLst>
+      <p:ext uri="{BB962C8B-B14F-4D97-AF65-F5344CB8AC3E}">
+        <p14:creationId xmlns:p14="http://schemas.microsoft.com/office/powerpoint/2010/main" val="2829237456"/>
+      </p:ext>
+    </p:extLst>
+  </p:cSld>
+  <p:clrMapOvr>
+    <a:masterClrMapping/>
+  </p:clrMapOvr>
+</p:sld>
+</file>
+
+<file path=ppt/slides/slide11.xml><?xml version="1.0" encoding="utf-8"?>
+<p:sld xmlns:a="http://schemas.openxmlformats.org/drawingml/2006/main" xmlns:r="http://schemas.openxmlformats.org/officeDocument/2006/relationships" xmlns:p="http://schemas.openxmlformats.org/presentationml/2006/main">
+  <p:cSld>
+    <p:spTree>
+      <p:nvGrpSpPr>
         <p:cNvPr id="1" name=""/>
         <p:cNvGrpSpPr/>
         <p:nvPr/>
@@ -4619,7 +5754,7 @@
 </p:sld>
 </file>
 
-<file path=ppt/slides/slide11.xml><?xml version="1.0" encoding="utf-8"?>
+<file path=ppt/slides/slide12.xml><?xml version="1.0" encoding="utf-8"?>
 <p:sld xmlns:a="http://schemas.openxmlformats.org/drawingml/2006/main" xmlns:r="http://schemas.openxmlformats.org/officeDocument/2006/relationships" xmlns:p="http://schemas.openxmlformats.org/presentationml/2006/main">
   <p:cSld>
     <p:spTree>
@@ -6060,12 +7195,18 @@
 </p:sld>
 </file>
 
-<file path=ppt/slides/slide12.xml><?xml version="1.0" encoding="utf-8"?>
+<file path=ppt/slides/slide13.xml><?xml version="1.0" encoding="utf-8"?>
 <p:sld xmlns:a="http://schemas.openxmlformats.org/drawingml/2006/main" xmlns:r="http://schemas.openxmlformats.org/officeDocument/2006/relationships" xmlns:p="http://schemas.openxmlformats.org/presentationml/2006/main">
   <p:cSld>
     <p:spTree>
       <p:nvGrpSpPr>
-        <p:cNvPr id="1" name=""/>
+        <p:cNvPr id="1" name="">
+          <a:extLst>
+            <a:ext uri="{FF2B5EF4-FFF2-40B4-BE49-F238E27FC236}">
+              <a16:creationId xmlns:a16="http://schemas.microsoft.com/office/drawing/2014/main" id="{39105BA1-68C3-1D9C-B786-96C1BA0D6425}"/>
+            </a:ext>
+          </a:extLst>
+        </p:cNvPr>
         <p:cNvGrpSpPr/>
         <p:nvPr/>
       </p:nvGrpSpPr>
@@ -6079,55 +7220,40 @@
       </p:grpSpPr>
       <p:pic>
         <p:nvPicPr>
-          <p:cNvPr id="1026" name="Picture 2">
-            <a:extLst>
-              <a:ext uri="{FF2B5EF4-FFF2-40B4-BE49-F238E27FC236}">
-                <a16:creationId xmlns:a16="http://schemas.microsoft.com/office/drawing/2014/main" id="{EC06FEAD-DBE2-0DA3-B00B-0EC0D18EB1AE}"/>
+          <p:cNvPr id="3" name="Picture 2">
+            <a:extLst>
+              <a:ext uri="{FF2B5EF4-FFF2-40B4-BE49-F238E27FC236}">
+                <a16:creationId xmlns:a16="http://schemas.microsoft.com/office/drawing/2014/main" id="{B75E67B1-5EB0-A9B6-C774-D36B0FB98221}"/>
               </a:ext>
             </a:extLst>
           </p:cNvPr>
           <p:cNvPicPr>
-            <a:picLocks noChangeAspect="1" noChangeArrowheads="1"/>
+            <a:picLocks noChangeAspect="1"/>
           </p:cNvPicPr>
           <p:nvPr/>
         </p:nvPicPr>
-        <p:blipFill rotWithShape="1">
-          <a:blip r:embed="rId2">
-            <a:extLst>
-              <a:ext uri="{28A0092B-C50C-407E-A947-70E740481C1C}">
-                <a14:useLocalDpi xmlns:a14="http://schemas.microsoft.com/office/drawing/2010/main" val="0"/>
-              </a:ext>
-            </a:extLst>
-          </a:blip>
-          <a:srcRect r="93200" b="82705"/>
-          <a:stretch/>
+        <p:blipFill>
+          <a:blip r:embed="rId3"/>
+          <a:stretch>
+            <a:fillRect/>
+          </a:stretch>
         </p:blipFill>
-        <p:spPr bwMode="auto">
-          <a:xfrm>
-            <a:off x="685800" y="337740"/>
-            <a:ext cx="5283156" cy="3023347"/>
-          </a:xfrm>
-          <a:prstGeom prst="rect">
-            <a:avLst/>
-          </a:prstGeom>
-          <a:noFill/>
-          <a:extLst>
-            <a:ext uri="{909E8E84-426E-40DD-AFC4-6F175D3DCCD1}">
-              <a14:hiddenFill xmlns:a14="http://schemas.microsoft.com/office/drawing/2010/main">
-                <a:solidFill>
-                  <a:srgbClr val="FFFFFF"/>
-                </a:solidFill>
-              </a14:hiddenFill>
-            </a:ext>
-          </a:extLst>
+        <p:spPr>
+          <a:xfrm>
+            <a:off x="536895" y="369815"/>
+            <a:ext cx="2281805" cy="2281805"/>
+          </a:xfrm>
+          <a:prstGeom prst="rect">
+            <a:avLst/>
+          </a:prstGeom>
         </p:spPr>
       </p:pic>
       <p:sp>
         <p:nvSpPr>
-          <p:cNvPr id="8" name="正方形/長方形 7">
-            <a:extLst>
-              <a:ext uri="{FF2B5EF4-FFF2-40B4-BE49-F238E27FC236}">
-                <a16:creationId xmlns:a16="http://schemas.microsoft.com/office/drawing/2014/main" id="{7C0FBB3A-872F-5FB9-C2DE-5DE93E840B09}"/>
+          <p:cNvPr id="34" name="Freeform: Shape 33">
+            <a:extLst>
+              <a:ext uri="{FF2B5EF4-FFF2-40B4-BE49-F238E27FC236}">
+                <a16:creationId xmlns:a16="http://schemas.microsoft.com/office/drawing/2014/main" id="{6F7A9EF4-4B30-6FBE-685E-E698DA720678}"/>
               </a:ext>
             </a:extLst>
           </p:cNvPr>
@@ -6136,19 +7262,265 @@
         </p:nvSpPr>
         <p:spPr>
           <a:xfrm>
-            <a:off x="1788252" y="4201160"/>
-            <a:ext cx="711015" cy="1493520"/>
-          </a:xfrm>
-          <a:prstGeom prst="rect">
-            <a:avLst/>
-          </a:prstGeom>
-          <a:solidFill>
-            <a:schemeClr val="tx1">
-              <a:lumMod val="85000"/>
-              <a:lumOff val="15000"/>
-            </a:schemeClr>
-          </a:solidFill>
-          <a:ln w="76200">
+            <a:off x="6123683" y="0"/>
+            <a:ext cx="6068317" cy="4185921"/>
+          </a:xfrm>
+          <a:custGeom>
+            <a:avLst/>
+            <a:gdLst>
+              <a:gd name="connsiteX0" fmla="*/ 5580090 w 6068317"/>
+              <a:gd name="connsiteY0" fmla="*/ 0 h 4185921"/>
+              <a:gd name="connsiteX1" fmla="*/ 6068317 w 6068317"/>
+              <a:gd name="connsiteY1" fmla="*/ 0 h 4185921"/>
+              <a:gd name="connsiteX2" fmla="*/ 6068317 w 6068317"/>
+              <a:gd name="connsiteY2" fmla="*/ 4185921 h 4185921"/>
+              <a:gd name="connsiteX3" fmla="*/ 5580090 w 6068317"/>
+              <a:gd name="connsiteY3" fmla="*/ 4185921 h 4185921"/>
+              <a:gd name="connsiteX4" fmla="*/ 8389 w 6068317"/>
+              <a:gd name="connsiteY4" fmla="*/ 0 h 4185921"/>
+              <a:gd name="connsiteX5" fmla="*/ 1603200 w 6068317"/>
+              <a:gd name="connsiteY5" fmla="*/ 0 h 4185921"/>
+              <a:gd name="connsiteX6" fmla="*/ 1610688 w 6068317"/>
+              <a:gd name="connsiteY6" fmla="*/ 2885813 h 4185921"/>
+              <a:gd name="connsiteX7" fmla="*/ 0 w 6068317"/>
+              <a:gd name="connsiteY7" fmla="*/ 1035625 h 4185921"/>
+              <a:gd name="connsiteX8" fmla="*/ 1610689 w 6068317"/>
+              <a:gd name="connsiteY8" fmla="*/ 0 h 4185921"/>
+              <a:gd name="connsiteX9" fmla="*/ 3976383 w 6068317"/>
+              <a:gd name="connsiteY9" fmla="*/ 0 h 4185921"/>
+              <a:gd name="connsiteX10" fmla="*/ 3976383 w 6068317"/>
+              <a:gd name="connsiteY10" fmla="*/ 2885813 h 4185921"/>
+              <a:gd name="connsiteX11" fmla="*/ 1610689 w 6068317"/>
+              <a:gd name="connsiteY11" fmla="*/ 2885813 h 4185921"/>
+              <a:gd name="connsiteX12" fmla="*/ 3984772 w 6068317"/>
+              <a:gd name="connsiteY12" fmla="*/ 0 h 4185921"/>
+              <a:gd name="connsiteX13" fmla="*/ 5579584 w 6068317"/>
+              <a:gd name="connsiteY13" fmla="*/ 0 h 4185921"/>
+              <a:gd name="connsiteX14" fmla="*/ 5576912 w 6068317"/>
+              <a:gd name="connsiteY14" fmla="*/ 4185921 h 4185921"/>
+              <a:gd name="connsiteX15" fmla="*/ 3980962 w 6068317"/>
+              <a:gd name="connsiteY15" fmla="*/ 2895792 h 4185921"/>
+              <a:gd name="connsiteX0" fmla="*/ 5580090 w 6068317"/>
+              <a:gd name="connsiteY0" fmla="*/ 3810 h 4189731"/>
+              <a:gd name="connsiteX1" fmla="*/ 6068317 w 6068317"/>
+              <a:gd name="connsiteY1" fmla="*/ 3810 h 4189731"/>
+              <a:gd name="connsiteX2" fmla="*/ 6068317 w 6068317"/>
+              <a:gd name="connsiteY2" fmla="*/ 4189731 h 4189731"/>
+              <a:gd name="connsiteX3" fmla="*/ 5580090 w 6068317"/>
+              <a:gd name="connsiteY3" fmla="*/ 4189731 h 4189731"/>
+              <a:gd name="connsiteX4" fmla="*/ 5580090 w 6068317"/>
+              <a:gd name="connsiteY4" fmla="*/ 3810 h 4189731"/>
+              <a:gd name="connsiteX5" fmla="*/ 8389 w 6068317"/>
+              <a:gd name="connsiteY5" fmla="*/ 3810 h 4189731"/>
+              <a:gd name="connsiteX6" fmla="*/ 1603200 w 6068317"/>
+              <a:gd name="connsiteY6" fmla="*/ 3810 h 4189731"/>
+              <a:gd name="connsiteX7" fmla="*/ 1610688 w 6068317"/>
+              <a:gd name="connsiteY7" fmla="*/ 2889623 h 4189731"/>
+              <a:gd name="connsiteX8" fmla="*/ 0 w 6068317"/>
+              <a:gd name="connsiteY8" fmla="*/ 1039435 h 4189731"/>
+              <a:gd name="connsiteX9" fmla="*/ 8389 w 6068317"/>
+              <a:gd name="connsiteY9" fmla="*/ 3810 h 4189731"/>
+              <a:gd name="connsiteX10" fmla="*/ 1580209 w 6068317"/>
+              <a:gd name="connsiteY10" fmla="*/ 0 h 4189731"/>
+              <a:gd name="connsiteX11" fmla="*/ 3976383 w 6068317"/>
+              <a:gd name="connsiteY11" fmla="*/ 3810 h 4189731"/>
+              <a:gd name="connsiteX12" fmla="*/ 3976383 w 6068317"/>
+              <a:gd name="connsiteY12" fmla="*/ 2889623 h 4189731"/>
+              <a:gd name="connsiteX13" fmla="*/ 1610689 w 6068317"/>
+              <a:gd name="connsiteY13" fmla="*/ 2889623 h 4189731"/>
+              <a:gd name="connsiteX14" fmla="*/ 1580209 w 6068317"/>
+              <a:gd name="connsiteY14" fmla="*/ 0 h 4189731"/>
+              <a:gd name="connsiteX15" fmla="*/ 3984772 w 6068317"/>
+              <a:gd name="connsiteY15" fmla="*/ 3810 h 4189731"/>
+              <a:gd name="connsiteX16" fmla="*/ 5579584 w 6068317"/>
+              <a:gd name="connsiteY16" fmla="*/ 3810 h 4189731"/>
+              <a:gd name="connsiteX17" fmla="*/ 5576912 w 6068317"/>
+              <a:gd name="connsiteY17" fmla="*/ 4189731 h 4189731"/>
+              <a:gd name="connsiteX18" fmla="*/ 3980962 w 6068317"/>
+              <a:gd name="connsiteY18" fmla="*/ 2899602 h 4189731"/>
+              <a:gd name="connsiteX19" fmla="*/ 3984772 w 6068317"/>
+              <a:gd name="connsiteY19" fmla="*/ 3810 h 4189731"/>
+              <a:gd name="connsiteX0" fmla="*/ 5580090 w 6068317"/>
+              <a:gd name="connsiteY0" fmla="*/ 0 h 4185921"/>
+              <a:gd name="connsiteX1" fmla="*/ 6068317 w 6068317"/>
+              <a:gd name="connsiteY1" fmla="*/ 0 h 4185921"/>
+              <a:gd name="connsiteX2" fmla="*/ 6068317 w 6068317"/>
+              <a:gd name="connsiteY2" fmla="*/ 4185921 h 4185921"/>
+              <a:gd name="connsiteX3" fmla="*/ 5580090 w 6068317"/>
+              <a:gd name="connsiteY3" fmla="*/ 4185921 h 4185921"/>
+              <a:gd name="connsiteX4" fmla="*/ 5580090 w 6068317"/>
+              <a:gd name="connsiteY4" fmla="*/ 0 h 4185921"/>
+              <a:gd name="connsiteX5" fmla="*/ 8389 w 6068317"/>
+              <a:gd name="connsiteY5" fmla="*/ 0 h 4185921"/>
+              <a:gd name="connsiteX6" fmla="*/ 1603200 w 6068317"/>
+              <a:gd name="connsiteY6" fmla="*/ 0 h 4185921"/>
+              <a:gd name="connsiteX7" fmla="*/ 1610688 w 6068317"/>
+              <a:gd name="connsiteY7" fmla="*/ 2885813 h 4185921"/>
+              <a:gd name="connsiteX8" fmla="*/ 0 w 6068317"/>
+              <a:gd name="connsiteY8" fmla="*/ 1035625 h 4185921"/>
+              <a:gd name="connsiteX9" fmla="*/ 8389 w 6068317"/>
+              <a:gd name="connsiteY9" fmla="*/ 0 h 4185921"/>
+              <a:gd name="connsiteX10" fmla="*/ 1618309 w 6068317"/>
+              <a:gd name="connsiteY10" fmla="*/ 0 h 4185921"/>
+              <a:gd name="connsiteX11" fmla="*/ 3976383 w 6068317"/>
+              <a:gd name="connsiteY11" fmla="*/ 0 h 4185921"/>
+              <a:gd name="connsiteX12" fmla="*/ 3976383 w 6068317"/>
+              <a:gd name="connsiteY12" fmla="*/ 2885813 h 4185921"/>
+              <a:gd name="connsiteX13" fmla="*/ 1610689 w 6068317"/>
+              <a:gd name="connsiteY13" fmla="*/ 2885813 h 4185921"/>
+              <a:gd name="connsiteX14" fmla="*/ 1618309 w 6068317"/>
+              <a:gd name="connsiteY14" fmla="*/ 0 h 4185921"/>
+              <a:gd name="connsiteX15" fmla="*/ 3984772 w 6068317"/>
+              <a:gd name="connsiteY15" fmla="*/ 0 h 4185921"/>
+              <a:gd name="connsiteX16" fmla="*/ 5579584 w 6068317"/>
+              <a:gd name="connsiteY16" fmla="*/ 0 h 4185921"/>
+              <a:gd name="connsiteX17" fmla="*/ 5576912 w 6068317"/>
+              <a:gd name="connsiteY17" fmla="*/ 4185921 h 4185921"/>
+              <a:gd name="connsiteX18" fmla="*/ 3980962 w 6068317"/>
+              <a:gd name="connsiteY18" fmla="*/ 2895792 h 4185921"/>
+              <a:gd name="connsiteX19" fmla="*/ 3984772 w 6068317"/>
+              <a:gd name="connsiteY19" fmla="*/ 0 h 4185921"/>
+            </a:gdLst>
+            <a:ahLst/>
+            <a:cxnLst>
+              <a:cxn ang="0">
+                <a:pos x="connsiteX0" y="connsiteY0"/>
+              </a:cxn>
+              <a:cxn ang="0">
+                <a:pos x="connsiteX1" y="connsiteY1"/>
+              </a:cxn>
+              <a:cxn ang="0">
+                <a:pos x="connsiteX2" y="connsiteY2"/>
+              </a:cxn>
+              <a:cxn ang="0">
+                <a:pos x="connsiteX3" y="connsiteY3"/>
+              </a:cxn>
+              <a:cxn ang="0">
+                <a:pos x="connsiteX4" y="connsiteY4"/>
+              </a:cxn>
+              <a:cxn ang="0">
+                <a:pos x="connsiteX5" y="connsiteY5"/>
+              </a:cxn>
+              <a:cxn ang="0">
+                <a:pos x="connsiteX6" y="connsiteY6"/>
+              </a:cxn>
+              <a:cxn ang="0">
+                <a:pos x="connsiteX7" y="connsiteY7"/>
+              </a:cxn>
+              <a:cxn ang="0">
+                <a:pos x="connsiteX8" y="connsiteY8"/>
+              </a:cxn>
+              <a:cxn ang="0">
+                <a:pos x="connsiteX9" y="connsiteY9"/>
+              </a:cxn>
+              <a:cxn ang="0">
+                <a:pos x="connsiteX10" y="connsiteY10"/>
+              </a:cxn>
+              <a:cxn ang="0">
+                <a:pos x="connsiteX11" y="connsiteY11"/>
+              </a:cxn>
+              <a:cxn ang="0">
+                <a:pos x="connsiteX12" y="connsiteY12"/>
+              </a:cxn>
+              <a:cxn ang="0">
+                <a:pos x="connsiteX13" y="connsiteY13"/>
+              </a:cxn>
+              <a:cxn ang="0">
+                <a:pos x="connsiteX14" y="connsiteY14"/>
+              </a:cxn>
+              <a:cxn ang="0">
+                <a:pos x="connsiteX15" y="connsiteY15"/>
+              </a:cxn>
+              <a:cxn ang="0">
+                <a:pos x="connsiteX16" y="connsiteY16"/>
+              </a:cxn>
+              <a:cxn ang="0">
+                <a:pos x="connsiteX17" y="connsiteY17"/>
+              </a:cxn>
+              <a:cxn ang="0">
+                <a:pos x="connsiteX18" y="connsiteY18"/>
+              </a:cxn>
+              <a:cxn ang="0">
+                <a:pos x="connsiteX19" y="connsiteY19"/>
+              </a:cxn>
+            </a:cxnLst>
+            <a:rect l="l" t="t" r="r" b="b"/>
+            <a:pathLst>
+              <a:path w="6068317" h="4185921">
+                <a:moveTo>
+                  <a:pt x="5580090" y="0"/>
+                </a:moveTo>
+                <a:lnTo>
+                  <a:pt x="6068317" y="0"/>
+                </a:lnTo>
+                <a:lnTo>
+                  <a:pt x="6068317" y="4185921"/>
+                </a:lnTo>
+                <a:lnTo>
+                  <a:pt x="5580090" y="4185921"/>
+                </a:lnTo>
+                <a:lnTo>
+                  <a:pt x="5580090" y="0"/>
+                </a:lnTo>
+                <a:close/>
+                <a:moveTo>
+                  <a:pt x="8389" y="0"/>
+                </a:moveTo>
+                <a:lnTo>
+                  <a:pt x="1603200" y="0"/>
+                </a:lnTo>
+                <a:lnTo>
+                  <a:pt x="1610688" y="2885813"/>
+                </a:lnTo>
+                <a:lnTo>
+                  <a:pt x="0" y="1035625"/>
+                </a:lnTo>
+                <a:cubicBezTo>
+                  <a:pt x="2796" y="690417"/>
+                  <a:pt x="5593" y="345208"/>
+                  <a:pt x="8389" y="0"/>
+                </a:cubicBezTo>
+                <a:close/>
+                <a:moveTo>
+                  <a:pt x="1618309" y="0"/>
+                </a:moveTo>
+                <a:lnTo>
+                  <a:pt x="3976383" y="0"/>
+                </a:lnTo>
+                <a:lnTo>
+                  <a:pt x="3976383" y="2885813"/>
+                </a:lnTo>
+                <a:lnTo>
+                  <a:pt x="1610689" y="2885813"/>
+                </a:lnTo>
+                <a:cubicBezTo>
+                  <a:pt x="1610689" y="1923875"/>
+                  <a:pt x="1618309" y="961938"/>
+                  <a:pt x="1618309" y="0"/>
+                </a:cubicBezTo>
+                <a:close/>
+                <a:moveTo>
+                  <a:pt x="3984772" y="0"/>
+                </a:moveTo>
+                <a:lnTo>
+                  <a:pt x="5579584" y="0"/>
+                </a:lnTo>
+                <a:cubicBezTo>
+                  <a:pt x="5582079" y="1574800"/>
+                  <a:pt x="5574416" y="2611121"/>
+                  <a:pt x="5576912" y="4185921"/>
+                </a:cubicBezTo>
+                <a:lnTo>
+                  <a:pt x="3980962" y="2895792"/>
+                </a:lnTo>
+                <a:lnTo>
+                  <a:pt x="3984772" y="0"/>
+                </a:lnTo>
+                <a:close/>
+              </a:path>
+            </a:pathLst>
+          </a:custGeom>
+          <a:ln>
             <a:noFill/>
           </a:ln>
         </p:spPr>
@@ -6169,964 +7541,9 @@
           </a:fontRef>
         </p:style>
         <p:txBody>
-          <a:bodyPr rtlCol="0" anchor="ctr"/>
-          <a:lstStyle/>
-          <a:p>
-            <a:pPr algn="ctr"/>
-            <a:endParaRPr kumimoji="1" lang="ja-JP" altLang="en-US"/>
-          </a:p>
-        </p:txBody>
-      </p:sp>
-      <p:sp>
-        <p:nvSpPr>
-          <p:cNvPr id="9" name="正方形/長方形 8">
-            <a:extLst>
-              <a:ext uri="{FF2B5EF4-FFF2-40B4-BE49-F238E27FC236}">
-                <a16:creationId xmlns:a16="http://schemas.microsoft.com/office/drawing/2014/main" id="{E1222F43-AEE1-59F3-72B8-5E4E453FC9BE}"/>
-              </a:ext>
-            </a:extLst>
-          </p:cNvPr>
-          <p:cNvSpPr/>
-          <p:nvPr/>
-        </p:nvSpPr>
-        <p:spPr>
-          <a:xfrm rot="19009696">
-            <a:off x="2484692" y="4209577"/>
-            <a:ext cx="563798" cy="1362832"/>
-          </a:xfrm>
-          <a:prstGeom prst="rect">
-            <a:avLst/>
-          </a:prstGeom>
-          <a:solidFill>
-            <a:schemeClr val="tx1">
-              <a:lumMod val="85000"/>
-              <a:lumOff val="15000"/>
-            </a:schemeClr>
-          </a:solidFill>
-          <a:ln w="76200">
-            <a:noFill/>
-          </a:ln>
-        </p:spPr>
-        <p:style>
-          <a:lnRef idx="2">
-            <a:schemeClr val="accent1">
-              <a:shade val="15000"/>
-            </a:schemeClr>
-          </a:lnRef>
-          <a:fillRef idx="1">
-            <a:schemeClr val="accent1"/>
-          </a:fillRef>
-          <a:effectRef idx="0">
-            <a:schemeClr val="accent1"/>
-          </a:effectRef>
-          <a:fontRef idx="minor">
-            <a:schemeClr val="lt1"/>
-          </a:fontRef>
-        </p:style>
-        <p:txBody>
-          <a:bodyPr rtlCol="0" anchor="ctr"/>
-          <a:lstStyle/>
-          <a:p>
-            <a:pPr algn="ctr"/>
-            <a:endParaRPr kumimoji="1" lang="ja-JP" altLang="en-US"/>
-          </a:p>
-        </p:txBody>
-      </p:sp>
-      <p:sp>
-        <p:nvSpPr>
-          <p:cNvPr id="10" name="正方形/長方形 9">
-            <a:extLst>
-              <a:ext uri="{FF2B5EF4-FFF2-40B4-BE49-F238E27FC236}">
-                <a16:creationId xmlns:a16="http://schemas.microsoft.com/office/drawing/2014/main" id="{85E48061-AEBF-35F0-80C2-75997441D1F0}"/>
-              </a:ext>
-            </a:extLst>
-          </p:cNvPr>
-          <p:cNvSpPr/>
-          <p:nvPr/>
-        </p:nvSpPr>
-        <p:spPr>
-          <a:xfrm rot="18963577">
-            <a:off x="2789931" y="5315221"/>
-            <a:ext cx="702373" cy="156555"/>
-          </a:xfrm>
-          <a:prstGeom prst="rect">
-            <a:avLst/>
-          </a:prstGeom>
-          <a:solidFill>
-            <a:schemeClr val="tx1">
-              <a:lumMod val="85000"/>
-              <a:lumOff val="15000"/>
-            </a:schemeClr>
-          </a:solidFill>
-          <a:ln w="76200">
-            <a:noFill/>
-          </a:ln>
-        </p:spPr>
-        <p:style>
-          <a:lnRef idx="2">
-            <a:schemeClr val="accent1">
-              <a:shade val="15000"/>
-            </a:schemeClr>
-          </a:lnRef>
-          <a:fillRef idx="1">
-            <a:schemeClr val="accent1"/>
-          </a:fillRef>
-          <a:effectRef idx="0">
-            <a:schemeClr val="accent1"/>
-          </a:effectRef>
-          <a:fontRef idx="minor">
-            <a:schemeClr val="lt1"/>
-          </a:fontRef>
-        </p:style>
-        <p:txBody>
-          <a:bodyPr rtlCol="0" anchor="ctr"/>
-          <a:lstStyle/>
-          <a:p>
-            <a:pPr algn="ctr"/>
-            <a:endParaRPr kumimoji="1" lang="ja-JP" altLang="en-US"/>
-          </a:p>
-        </p:txBody>
-      </p:sp>
-      <p:sp>
-        <p:nvSpPr>
-          <p:cNvPr id="11" name="正方形/長方形 10">
-            <a:extLst>
-              <a:ext uri="{FF2B5EF4-FFF2-40B4-BE49-F238E27FC236}">
-                <a16:creationId xmlns:a16="http://schemas.microsoft.com/office/drawing/2014/main" id="{FB066628-7339-1E89-BF12-98B32DB91DB6}"/>
-              </a:ext>
-            </a:extLst>
-          </p:cNvPr>
-          <p:cNvSpPr/>
-          <p:nvPr/>
-        </p:nvSpPr>
-        <p:spPr>
-          <a:xfrm rot="18963577">
-            <a:off x="4835211" y="5068607"/>
-            <a:ext cx="563798" cy="137102"/>
-          </a:xfrm>
-          <a:prstGeom prst="rect">
-            <a:avLst/>
-          </a:prstGeom>
-          <a:solidFill>
-            <a:schemeClr val="tx1">
-              <a:lumMod val="85000"/>
-              <a:lumOff val="15000"/>
-            </a:schemeClr>
-          </a:solidFill>
-          <a:ln w="76200">
-            <a:noFill/>
-          </a:ln>
-        </p:spPr>
-        <p:style>
-          <a:lnRef idx="2">
-            <a:schemeClr val="accent1">
-              <a:shade val="15000"/>
-            </a:schemeClr>
-          </a:lnRef>
-          <a:fillRef idx="1">
-            <a:schemeClr val="accent1"/>
-          </a:fillRef>
-          <a:effectRef idx="0">
-            <a:schemeClr val="accent1"/>
-          </a:effectRef>
-          <a:fontRef idx="minor">
-            <a:schemeClr val="lt1"/>
-          </a:fontRef>
-        </p:style>
-        <p:txBody>
-          <a:bodyPr rtlCol="0" anchor="ctr"/>
-          <a:lstStyle/>
-          <a:p>
-            <a:pPr algn="ctr"/>
-            <a:endParaRPr kumimoji="1" lang="ja-JP" altLang="en-US"/>
-          </a:p>
-        </p:txBody>
-      </p:sp>
-      <p:sp>
-        <p:nvSpPr>
-          <p:cNvPr id="12" name="正方形/長方形 11">
-            <a:extLst>
-              <a:ext uri="{FF2B5EF4-FFF2-40B4-BE49-F238E27FC236}">
-                <a16:creationId xmlns:a16="http://schemas.microsoft.com/office/drawing/2014/main" id="{4CDC590F-A564-9573-68AA-CEEB2696A67D}"/>
-              </a:ext>
-            </a:extLst>
-          </p:cNvPr>
-          <p:cNvSpPr/>
-          <p:nvPr/>
-        </p:nvSpPr>
-        <p:spPr>
-          <a:xfrm rot="19009696">
-            <a:off x="5133123" y="4962478"/>
-            <a:ext cx="563798" cy="1018267"/>
-          </a:xfrm>
-          <a:prstGeom prst="rect">
-            <a:avLst/>
-          </a:prstGeom>
-          <a:solidFill>
-            <a:schemeClr val="tx1">
-              <a:lumMod val="85000"/>
-              <a:lumOff val="15000"/>
-            </a:schemeClr>
-          </a:solidFill>
-          <a:ln w="76200">
-            <a:noFill/>
-          </a:ln>
-        </p:spPr>
-        <p:style>
-          <a:lnRef idx="2">
-            <a:schemeClr val="accent1">
-              <a:shade val="15000"/>
-            </a:schemeClr>
-          </a:lnRef>
-          <a:fillRef idx="1">
-            <a:schemeClr val="accent1"/>
-          </a:fillRef>
-          <a:effectRef idx="0">
-            <a:schemeClr val="accent1"/>
-          </a:effectRef>
-          <a:fontRef idx="minor">
-            <a:schemeClr val="lt1"/>
-          </a:fontRef>
-        </p:style>
-        <p:txBody>
-          <a:bodyPr rtlCol="0" anchor="ctr"/>
-          <a:lstStyle/>
-          <a:p>
-            <a:pPr algn="ctr"/>
-            <a:endParaRPr kumimoji="1" lang="ja-JP" altLang="en-US"/>
-          </a:p>
-        </p:txBody>
-      </p:sp>
-      <p:sp>
-        <p:nvSpPr>
-          <p:cNvPr id="13" name="正方形/長方形 12">
-            <a:extLst>
-              <a:ext uri="{FF2B5EF4-FFF2-40B4-BE49-F238E27FC236}">
-                <a16:creationId xmlns:a16="http://schemas.microsoft.com/office/drawing/2014/main" id="{2477B32E-8088-8865-1B60-BE3C450D1F88}"/>
-              </a:ext>
-            </a:extLst>
-          </p:cNvPr>
-          <p:cNvSpPr/>
-          <p:nvPr/>
-        </p:nvSpPr>
-        <p:spPr>
-          <a:xfrm>
-            <a:off x="2198484" y="4935220"/>
-            <a:ext cx="739140" cy="758335"/>
-          </a:xfrm>
-          <a:prstGeom prst="rect">
-            <a:avLst/>
-          </a:prstGeom>
-          <a:solidFill>
-            <a:schemeClr val="tx1">
-              <a:lumMod val="85000"/>
-              <a:lumOff val="15000"/>
-            </a:schemeClr>
-          </a:solidFill>
-          <a:ln w="76200">
-            <a:noFill/>
-          </a:ln>
-        </p:spPr>
-        <p:style>
-          <a:lnRef idx="2">
-            <a:schemeClr val="accent1">
-              <a:shade val="15000"/>
-            </a:schemeClr>
-          </a:lnRef>
-          <a:fillRef idx="1">
-            <a:schemeClr val="accent1"/>
-          </a:fillRef>
-          <a:effectRef idx="0">
-            <a:schemeClr val="accent1"/>
-          </a:effectRef>
-          <a:fontRef idx="minor">
-            <a:schemeClr val="lt1"/>
-          </a:fontRef>
-        </p:style>
-        <p:txBody>
-          <a:bodyPr rtlCol="0" anchor="ctr"/>
-          <a:lstStyle/>
-          <a:p>
-            <a:pPr algn="ctr"/>
-            <a:endParaRPr kumimoji="1" lang="ja-JP" altLang="en-US"/>
-          </a:p>
-        </p:txBody>
-      </p:sp>
-      <p:sp>
-        <p:nvSpPr>
-          <p:cNvPr id="14" name="正方形/長方形 13">
-            <a:extLst>
-              <a:ext uri="{FF2B5EF4-FFF2-40B4-BE49-F238E27FC236}">
-                <a16:creationId xmlns:a16="http://schemas.microsoft.com/office/drawing/2014/main" id="{C7FD822B-A26B-5AB5-D283-649E04506633}"/>
-              </a:ext>
-            </a:extLst>
-          </p:cNvPr>
-          <p:cNvSpPr/>
-          <p:nvPr/>
-        </p:nvSpPr>
-        <p:spPr>
-          <a:xfrm>
-            <a:off x="5553322" y="4892184"/>
-            <a:ext cx="1220858" cy="1141710"/>
-          </a:xfrm>
-          <a:prstGeom prst="rect">
-            <a:avLst/>
-          </a:prstGeom>
-          <a:solidFill>
-            <a:schemeClr val="tx1">
-              <a:lumMod val="85000"/>
-              <a:lumOff val="15000"/>
-            </a:schemeClr>
-          </a:solidFill>
-          <a:ln w="76200">
-            <a:noFill/>
-          </a:ln>
-        </p:spPr>
-        <p:style>
-          <a:lnRef idx="2">
-            <a:schemeClr val="accent1">
-              <a:shade val="15000"/>
-            </a:schemeClr>
-          </a:lnRef>
-          <a:fillRef idx="1">
-            <a:schemeClr val="accent1"/>
-          </a:fillRef>
-          <a:effectRef idx="0">
-            <a:schemeClr val="accent1"/>
-          </a:effectRef>
-          <a:fontRef idx="minor">
-            <a:schemeClr val="lt1"/>
-          </a:fontRef>
-        </p:style>
-        <p:txBody>
-          <a:bodyPr rtlCol="0" anchor="ctr"/>
-          <a:lstStyle/>
-          <a:p>
-            <a:pPr algn="ctr"/>
-            <a:endParaRPr kumimoji="1" lang="ja-JP" altLang="en-US"/>
-          </a:p>
-        </p:txBody>
-      </p:sp>
-      <p:sp>
-        <p:nvSpPr>
-          <p:cNvPr id="15" name="正方形/長方形 14">
-            <a:extLst>
-              <a:ext uri="{FF2B5EF4-FFF2-40B4-BE49-F238E27FC236}">
-                <a16:creationId xmlns:a16="http://schemas.microsoft.com/office/drawing/2014/main" id="{2477DA41-27BF-A757-9169-CF5B215CC353}"/>
-              </a:ext>
-            </a:extLst>
-          </p:cNvPr>
-          <p:cNvSpPr/>
-          <p:nvPr/>
-        </p:nvSpPr>
-        <p:spPr>
-          <a:xfrm>
-            <a:off x="5263700" y="4893417"/>
-            <a:ext cx="1107868" cy="400050"/>
-          </a:xfrm>
-          <a:prstGeom prst="rect">
-            <a:avLst/>
-          </a:prstGeom>
-          <a:solidFill>
-            <a:schemeClr val="tx1">
-              <a:lumMod val="85000"/>
-              <a:lumOff val="15000"/>
-            </a:schemeClr>
-          </a:solidFill>
-          <a:ln w="76200">
-            <a:noFill/>
-          </a:ln>
-        </p:spPr>
-        <p:style>
-          <a:lnRef idx="2">
-            <a:schemeClr val="accent1">
-              <a:shade val="15000"/>
-            </a:schemeClr>
-          </a:lnRef>
-          <a:fillRef idx="1">
-            <a:schemeClr val="accent1"/>
-          </a:fillRef>
-          <a:effectRef idx="0">
-            <a:schemeClr val="accent1"/>
-          </a:effectRef>
-          <a:fontRef idx="minor">
-            <a:schemeClr val="lt1"/>
-          </a:fontRef>
-        </p:style>
-        <p:txBody>
-          <a:bodyPr rtlCol="0" anchor="ctr"/>
-          <a:lstStyle/>
-          <a:p>
-            <a:pPr algn="ctr"/>
-            <a:endParaRPr kumimoji="1" lang="ja-JP" altLang="en-US"/>
-          </a:p>
-        </p:txBody>
-      </p:sp>
-      <p:sp>
-        <p:nvSpPr>
-          <p:cNvPr id="5" name="正方形/長方形 4">
-            <a:extLst>
-              <a:ext uri="{FF2B5EF4-FFF2-40B4-BE49-F238E27FC236}">
-                <a16:creationId xmlns:a16="http://schemas.microsoft.com/office/drawing/2014/main" id="{394DCDCC-7F17-F942-800A-DA8ED36DF939}"/>
-              </a:ext>
-            </a:extLst>
-          </p:cNvPr>
-          <p:cNvSpPr/>
-          <p:nvPr/>
-        </p:nvSpPr>
-        <p:spPr>
-          <a:xfrm>
-            <a:off x="1784591" y="4315911"/>
-            <a:ext cx="704762" cy="1264915"/>
-          </a:xfrm>
-          <a:prstGeom prst="rect">
-            <a:avLst/>
-          </a:prstGeom>
-          <a:solidFill>
-            <a:srgbClr val="FFFBEF"/>
-          </a:solidFill>
-          <a:ln w="76200">
-            <a:noFill/>
-          </a:ln>
-        </p:spPr>
-        <p:style>
-          <a:lnRef idx="2">
-            <a:schemeClr val="accent1">
-              <a:shade val="15000"/>
-            </a:schemeClr>
-          </a:lnRef>
-          <a:fillRef idx="1">
-            <a:schemeClr val="accent1"/>
-          </a:fillRef>
-          <a:effectRef idx="0">
-            <a:schemeClr val="accent1"/>
-          </a:effectRef>
-          <a:fontRef idx="minor">
-            <a:schemeClr val="lt1"/>
-          </a:fontRef>
-        </p:style>
-        <p:txBody>
-          <a:bodyPr rtlCol="0" anchor="ctr"/>
-          <a:lstStyle/>
-          <a:p>
-            <a:pPr algn="ctr"/>
-            <a:endParaRPr kumimoji="1" lang="ja-JP" altLang="en-US"/>
-          </a:p>
-        </p:txBody>
-      </p:sp>
-      <p:sp>
-        <p:nvSpPr>
-          <p:cNvPr id="16" name="正方形/長方形 15">
-            <a:extLst>
-              <a:ext uri="{FF2B5EF4-FFF2-40B4-BE49-F238E27FC236}">
-                <a16:creationId xmlns:a16="http://schemas.microsoft.com/office/drawing/2014/main" id="{7D625363-D17E-8D3C-70EF-E0E4BF841A81}"/>
-              </a:ext>
-            </a:extLst>
-          </p:cNvPr>
-          <p:cNvSpPr/>
-          <p:nvPr/>
-        </p:nvSpPr>
-        <p:spPr>
-          <a:xfrm rot="19040282">
-            <a:off x="2595154" y="4265759"/>
-            <a:ext cx="342872" cy="1218658"/>
-          </a:xfrm>
-          <a:prstGeom prst="rect">
-            <a:avLst/>
-          </a:prstGeom>
-          <a:solidFill>
-            <a:srgbClr val="FFFBEF"/>
-          </a:solidFill>
-          <a:ln w="76200">
-            <a:noFill/>
-          </a:ln>
-        </p:spPr>
-        <p:style>
-          <a:lnRef idx="2">
-            <a:schemeClr val="accent1">
-              <a:shade val="15000"/>
-            </a:schemeClr>
-          </a:lnRef>
-          <a:fillRef idx="1">
-            <a:schemeClr val="accent1"/>
-          </a:fillRef>
-          <a:effectRef idx="0">
-            <a:schemeClr val="accent1"/>
-          </a:effectRef>
-          <a:fontRef idx="minor">
-            <a:schemeClr val="lt1"/>
-          </a:fontRef>
-        </p:style>
-        <p:txBody>
-          <a:bodyPr rtlCol="0" anchor="ctr"/>
-          <a:lstStyle/>
-          <a:p>
-            <a:pPr algn="ctr"/>
-            <a:endParaRPr kumimoji="1" lang="ja-JP" altLang="en-US"/>
-          </a:p>
-        </p:txBody>
-      </p:sp>
-      <p:sp>
-        <p:nvSpPr>
-          <p:cNvPr id="17" name="正方形/長方形 16">
-            <a:extLst>
-              <a:ext uri="{FF2B5EF4-FFF2-40B4-BE49-F238E27FC236}">
-                <a16:creationId xmlns:a16="http://schemas.microsoft.com/office/drawing/2014/main" id="{E1F3FC0F-29FC-20C0-1395-6950FADCB691}"/>
-              </a:ext>
-            </a:extLst>
-          </p:cNvPr>
-          <p:cNvSpPr/>
-          <p:nvPr/>
-        </p:nvSpPr>
-        <p:spPr>
-          <a:xfrm rot="2672381">
-            <a:off x="2819611" y="5027349"/>
-            <a:ext cx="342872" cy="503317"/>
-          </a:xfrm>
-          <a:prstGeom prst="rect">
-            <a:avLst/>
-          </a:prstGeom>
-          <a:solidFill>
-            <a:srgbClr val="FFFBEF"/>
-          </a:solidFill>
-          <a:ln w="76200">
-            <a:noFill/>
-          </a:ln>
-        </p:spPr>
-        <p:style>
-          <a:lnRef idx="2">
-            <a:schemeClr val="accent1">
-              <a:shade val="15000"/>
-            </a:schemeClr>
-          </a:lnRef>
-          <a:fillRef idx="1">
-            <a:schemeClr val="accent1"/>
-          </a:fillRef>
-          <a:effectRef idx="0">
-            <a:schemeClr val="accent1"/>
-          </a:effectRef>
-          <a:fontRef idx="minor">
-            <a:schemeClr val="lt1"/>
-          </a:fontRef>
-        </p:style>
-        <p:txBody>
-          <a:bodyPr rtlCol="0" anchor="ctr"/>
-          <a:lstStyle/>
-          <a:p>
-            <a:pPr algn="ctr"/>
-            <a:endParaRPr kumimoji="1" lang="ja-JP" altLang="en-US"/>
-          </a:p>
-        </p:txBody>
-      </p:sp>
-      <p:sp>
-        <p:nvSpPr>
-          <p:cNvPr id="18" name="正方形/長方形 17">
-            <a:extLst>
-              <a:ext uri="{FF2B5EF4-FFF2-40B4-BE49-F238E27FC236}">
-                <a16:creationId xmlns:a16="http://schemas.microsoft.com/office/drawing/2014/main" id="{2FA911A8-DD6A-5FA7-A9F6-0518D8C9F1F6}"/>
-              </a:ext>
-            </a:extLst>
-          </p:cNvPr>
-          <p:cNvSpPr/>
-          <p:nvPr/>
-        </p:nvSpPr>
-        <p:spPr>
-          <a:xfrm>
-            <a:off x="2217683" y="5092317"/>
-            <a:ext cx="716280" cy="489072"/>
-          </a:xfrm>
-          <a:prstGeom prst="rect">
-            <a:avLst/>
-          </a:prstGeom>
-          <a:solidFill>
-            <a:srgbClr val="FFFBEF"/>
-          </a:solidFill>
-          <a:ln w="76200">
-            <a:noFill/>
-          </a:ln>
-        </p:spPr>
-        <p:style>
-          <a:lnRef idx="2">
-            <a:schemeClr val="accent1">
-              <a:shade val="15000"/>
-            </a:schemeClr>
-          </a:lnRef>
-          <a:fillRef idx="1">
-            <a:schemeClr val="accent1"/>
-          </a:fillRef>
-          <a:effectRef idx="0">
-            <a:schemeClr val="accent1"/>
-          </a:effectRef>
-          <a:fontRef idx="minor">
-            <a:schemeClr val="lt1"/>
-          </a:fontRef>
-        </p:style>
-        <p:txBody>
-          <a:bodyPr rtlCol="0" anchor="ctr"/>
-          <a:lstStyle/>
-          <a:p>
-            <a:pPr algn="ctr"/>
-            <a:endParaRPr lang="ja-JP" altLang="en-US"/>
-          </a:p>
-        </p:txBody>
-      </p:sp>
-      <p:sp>
-        <p:nvSpPr>
-          <p:cNvPr id="19" name="正方形/長方形 18">
-            <a:extLst>
-              <a:ext uri="{FF2B5EF4-FFF2-40B4-BE49-F238E27FC236}">
-                <a16:creationId xmlns:a16="http://schemas.microsoft.com/office/drawing/2014/main" id="{EB79EA34-ED8A-B15E-A8B8-B809E483F9CF}"/>
-              </a:ext>
-            </a:extLst>
-          </p:cNvPr>
-          <p:cNvSpPr/>
-          <p:nvPr/>
-        </p:nvSpPr>
-        <p:spPr>
-          <a:xfrm>
-            <a:off x="2390118" y="4807241"/>
-            <a:ext cx="360702" cy="328037"/>
-          </a:xfrm>
-          <a:prstGeom prst="rect">
-            <a:avLst/>
-          </a:prstGeom>
-          <a:solidFill>
-            <a:srgbClr val="FFFBEF"/>
-          </a:solidFill>
-          <a:ln w="76200">
-            <a:noFill/>
-          </a:ln>
-        </p:spPr>
-        <p:style>
-          <a:lnRef idx="2">
-            <a:schemeClr val="accent1">
-              <a:shade val="15000"/>
-            </a:schemeClr>
-          </a:lnRef>
-          <a:fillRef idx="1">
-            <a:schemeClr val="accent1"/>
-          </a:fillRef>
-          <a:effectRef idx="0">
-            <a:schemeClr val="accent1"/>
-          </a:effectRef>
-          <a:fontRef idx="minor">
-            <a:schemeClr val="lt1"/>
-          </a:fontRef>
-        </p:style>
-        <p:txBody>
-          <a:bodyPr rtlCol="0" anchor="ctr"/>
-          <a:lstStyle/>
-          <a:p>
-            <a:pPr algn="ctr"/>
-            <a:endParaRPr lang="ja-JP" altLang="en-US"/>
-          </a:p>
-        </p:txBody>
-      </p:sp>
-      <p:sp>
-        <p:nvSpPr>
-          <p:cNvPr id="21" name="正方形/長方形 20">
-            <a:extLst>
-              <a:ext uri="{FF2B5EF4-FFF2-40B4-BE49-F238E27FC236}">
-                <a16:creationId xmlns:a16="http://schemas.microsoft.com/office/drawing/2014/main" id="{84397B20-4D4A-D1A3-2294-4BA38D25FAB6}"/>
-              </a:ext>
-            </a:extLst>
-          </p:cNvPr>
-          <p:cNvSpPr/>
-          <p:nvPr/>
-        </p:nvSpPr>
-        <p:spPr>
-          <a:xfrm>
-            <a:off x="1774662" y="4388365"/>
-            <a:ext cx="703447" cy="1128514"/>
-          </a:xfrm>
-          <a:prstGeom prst="rect">
-            <a:avLst/>
-          </a:prstGeom>
-          <a:solidFill>
-            <a:srgbClr val="A2A2A2"/>
-          </a:solidFill>
-          <a:ln w="76200">
-            <a:noFill/>
-          </a:ln>
-        </p:spPr>
-        <p:style>
-          <a:lnRef idx="2">
-            <a:schemeClr val="accent1">
-              <a:shade val="15000"/>
-            </a:schemeClr>
-          </a:lnRef>
-          <a:fillRef idx="1">
-            <a:schemeClr val="accent1"/>
-          </a:fillRef>
-          <a:effectRef idx="0">
-            <a:schemeClr val="accent1"/>
-          </a:effectRef>
-          <a:fontRef idx="minor">
-            <a:schemeClr val="lt1"/>
-          </a:fontRef>
-        </p:style>
-        <p:txBody>
-          <a:bodyPr rtlCol="0" anchor="ctr"/>
-          <a:lstStyle/>
-          <a:p>
-            <a:pPr algn="ctr"/>
-            <a:endParaRPr kumimoji="1" lang="ja-JP" altLang="en-US"/>
-          </a:p>
-        </p:txBody>
-      </p:sp>
-      <p:sp>
-        <p:nvSpPr>
-          <p:cNvPr id="23" name="正方形/長方形 22">
-            <a:extLst>
-              <a:ext uri="{FF2B5EF4-FFF2-40B4-BE49-F238E27FC236}">
-                <a16:creationId xmlns:a16="http://schemas.microsoft.com/office/drawing/2014/main" id="{B0ADD0BF-E0B4-B1A3-D3C1-E6DD11B9EBE3}"/>
-              </a:ext>
-            </a:extLst>
-          </p:cNvPr>
-          <p:cNvSpPr/>
-          <p:nvPr/>
-        </p:nvSpPr>
-        <p:spPr>
-          <a:xfrm rot="19087804">
-            <a:off x="2650470" y="4321235"/>
-            <a:ext cx="205679" cy="1058323"/>
-          </a:xfrm>
-          <a:prstGeom prst="rect">
-            <a:avLst/>
-          </a:prstGeom>
-          <a:solidFill>
-            <a:srgbClr val="A2A2A2"/>
-          </a:solidFill>
-          <a:ln w="76200">
-            <a:noFill/>
-          </a:ln>
-        </p:spPr>
-        <p:style>
-          <a:lnRef idx="2">
-            <a:schemeClr val="accent1">
-              <a:shade val="15000"/>
-            </a:schemeClr>
-          </a:lnRef>
-          <a:fillRef idx="1">
-            <a:schemeClr val="accent1"/>
-          </a:fillRef>
-          <a:effectRef idx="0">
-            <a:schemeClr val="accent1"/>
-          </a:effectRef>
-          <a:fontRef idx="minor">
-            <a:schemeClr val="lt1"/>
-          </a:fontRef>
-        </p:style>
-        <p:txBody>
-          <a:bodyPr rtlCol="0" anchor="ctr"/>
-          <a:lstStyle/>
-          <a:p>
-            <a:pPr algn="ctr"/>
-            <a:endParaRPr kumimoji="1" lang="ja-JP" altLang="en-US"/>
-          </a:p>
-        </p:txBody>
-      </p:sp>
-      <p:sp>
-        <p:nvSpPr>
-          <p:cNvPr id="25" name="正方形/長方形 24">
-            <a:extLst>
-              <a:ext uri="{FF2B5EF4-FFF2-40B4-BE49-F238E27FC236}">
-                <a16:creationId xmlns:a16="http://schemas.microsoft.com/office/drawing/2014/main" id="{E8966569-4AEA-4932-92A4-2E6FB6CD7145}"/>
-              </a:ext>
-            </a:extLst>
-          </p:cNvPr>
-          <p:cNvSpPr/>
-          <p:nvPr/>
-        </p:nvSpPr>
-        <p:spPr>
-          <a:xfrm>
-            <a:off x="2248730" y="5042536"/>
-            <a:ext cx="584559" cy="471940"/>
-          </a:xfrm>
-          <a:prstGeom prst="rect">
-            <a:avLst/>
-          </a:prstGeom>
-          <a:solidFill>
-            <a:srgbClr val="A2A2A2"/>
-          </a:solidFill>
-          <a:ln w="76200">
-            <a:noFill/>
-          </a:ln>
-        </p:spPr>
-        <p:style>
-          <a:lnRef idx="2">
-            <a:schemeClr val="accent1">
-              <a:shade val="15000"/>
-            </a:schemeClr>
-          </a:lnRef>
-          <a:fillRef idx="1">
-            <a:schemeClr val="accent1"/>
-          </a:fillRef>
-          <a:effectRef idx="0">
-            <a:schemeClr val="accent1"/>
-          </a:effectRef>
-          <a:fontRef idx="minor">
-            <a:schemeClr val="lt1"/>
-          </a:fontRef>
-        </p:style>
-        <p:txBody>
-          <a:bodyPr rtlCol="0" anchor="ctr"/>
-          <a:lstStyle/>
-          <a:p>
-            <a:pPr algn="ctr"/>
-            <a:endParaRPr kumimoji="1" lang="ja-JP" altLang="en-US"/>
-          </a:p>
-        </p:txBody>
-      </p:sp>
-      <p:sp>
-        <p:nvSpPr>
-          <p:cNvPr id="26" name="正方形/長方形 25">
-            <a:extLst>
-              <a:ext uri="{FF2B5EF4-FFF2-40B4-BE49-F238E27FC236}">
-                <a16:creationId xmlns:a16="http://schemas.microsoft.com/office/drawing/2014/main" id="{8EE2648F-B79C-E883-9CB5-BC17CE62F660}"/>
-              </a:ext>
-            </a:extLst>
-          </p:cNvPr>
-          <p:cNvSpPr/>
-          <p:nvPr/>
-        </p:nvSpPr>
-        <p:spPr>
-          <a:xfrm rot="19709502">
-            <a:off x="2397061" y="4631119"/>
-            <a:ext cx="329843" cy="549460"/>
-          </a:xfrm>
-          <a:prstGeom prst="rect">
-            <a:avLst/>
-          </a:prstGeom>
-          <a:solidFill>
-            <a:srgbClr val="A2A2A2"/>
-          </a:solidFill>
-          <a:ln w="76200">
-            <a:noFill/>
-          </a:ln>
-        </p:spPr>
-        <p:style>
-          <a:lnRef idx="2">
-            <a:schemeClr val="accent1">
-              <a:shade val="15000"/>
-            </a:schemeClr>
-          </a:lnRef>
-          <a:fillRef idx="1">
-            <a:schemeClr val="accent1"/>
-          </a:fillRef>
-          <a:effectRef idx="0">
-            <a:schemeClr val="accent1"/>
-          </a:effectRef>
-          <a:fontRef idx="minor">
-            <a:schemeClr val="lt1"/>
-          </a:fontRef>
-        </p:style>
-        <p:txBody>
-          <a:bodyPr rtlCol="0" anchor="ctr"/>
-          <a:lstStyle/>
-          <a:p>
-            <a:pPr algn="ctr"/>
-            <a:endParaRPr kumimoji="1" lang="ja-JP" altLang="en-US"/>
-          </a:p>
-        </p:txBody>
-      </p:sp>
-      <p:sp>
-        <p:nvSpPr>
-          <p:cNvPr id="27" name="正方形/長方形 26">
-            <a:extLst>
-              <a:ext uri="{FF2B5EF4-FFF2-40B4-BE49-F238E27FC236}">
-                <a16:creationId xmlns:a16="http://schemas.microsoft.com/office/drawing/2014/main" id="{3350FAAF-757A-49D8-2FB9-1B7E6E14CAF7}"/>
-              </a:ext>
-            </a:extLst>
-          </p:cNvPr>
-          <p:cNvSpPr/>
-          <p:nvPr/>
-        </p:nvSpPr>
-        <p:spPr>
-          <a:xfrm rot="18963577">
-            <a:off x="2705818" y="5211212"/>
-            <a:ext cx="491034" cy="156555"/>
-          </a:xfrm>
-          <a:prstGeom prst="rect">
-            <a:avLst/>
-          </a:prstGeom>
-          <a:solidFill>
-            <a:srgbClr val="A2A2A2"/>
-          </a:solidFill>
-          <a:ln w="76200">
-            <a:noFill/>
-          </a:ln>
-        </p:spPr>
-        <p:style>
-          <a:lnRef idx="2">
-            <a:schemeClr val="accent1">
-              <a:shade val="15000"/>
-            </a:schemeClr>
-          </a:lnRef>
-          <a:fillRef idx="1">
-            <a:schemeClr val="accent1"/>
-          </a:fillRef>
-          <a:effectRef idx="0">
-            <a:schemeClr val="accent1"/>
-          </a:effectRef>
-          <a:fontRef idx="minor">
-            <a:schemeClr val="lt1"/>
-          </a:fontRef>
-        </p:style>
-        <p:txBody>
-          <a:bodyPr rtlCol="0" anchor="ctr"/>
-          <a:lstStyle/>
-          <a:p>
-            <a:pPr algn="ctr"/>
-            <a:endParaRPr kumimoji="1" lang="ja-JP" altLang="en-US"/>
-          </a:p>
-        </p:txBody>
-      </p:sp>
-      <p:sp>
-        <p:nvSpPr>
-          <p:cNvPr id="28" name="正方形/長方形 27">
-            <a:extLst>
-              <a:ext uri="{FF2B5EF4-FFF2-40B4-BE49-F238E27FC236}">
-                <a16:creationId xmlns:a16="http://schemas.microsoft.com/office/drawing/2014/main" id="{C8328951-CF45-654D-A297-5DFC5E22ACAF}"/>
-              </a:ext>
-            </a:extLst>
-          </p:cNvPr>
-          <p:cNvSpPr/>
-          <p:nvPr/>
-        </p:nvSpPr>
-        <p:spPr>
-          <a:xfrm rot="18963577">
-            <a:off x="2736140" y="5077777"/>
-            <a:ext cx="245579" cy="208318"/>
-          </a:xfrm>
-          <a:prstGeom prst="rect">
-            <a:avLst/>
-          </a:prstGeom>
-          <a:solidFill>
-            <a:srgbClr val="A2A2A2"/>
-          </a:solidFill>
-          <a:ln w="76200">
-            <a:noFill/>
-          </a:ln>
-        </p:spPr>
-        <p:style>
-          <a:lnRef idx="2">
-            <a:schemeClr val="accent1">
-              <a:shade val="15000"/>
-            </a:schemeClr>
-          </a:lnRef>
-          <a:fillRef idx="1">
-            <a:schemeClr val="accent1"/>
-          </a:fillRef>
-          <a:effectRef idx="0">
-            <a:schemeClr val="accent1"/>
-          </a:effectRef>
-          <a:fontRef idx="minor">
-            <a:schemeClr val="lt1"/>
-          </a:fontRef>
-        </p:style>
-        <p:txBody>
-          <a:bodyPr rtlCol="0" anchor="ctr"/>
+          <a:bodyPr wrap="square" rtlCol="0" anchor="ctr">
+            <a:noAutofit/>
+          </a:bodyPr>
           <a:lstStyle/>
           <a:p>
             <a:pPr algn="ctr"/>
@@ -7137,1714 +7554,7 @@
     </p:spTree>
     <p:extLst>
       <p:ext uri="{BB962C8B-B14F-4D97-AF65-F5344CB8AC3E}">
-        <p14:creationId xmlns:p14="http://schemas.microsoft.com/office/powerpoint/2010/main" val="407844166"/>
-      </p:ext>
-    </p:extLst>
-  </p:cSld>
-  <p:clrMapOvr>
-    <a:masterClrMapping/>
-  </p:clrMapOvr>
-</p:sld>
-</file>
-
-<file path=ppt/slides/slide13.xml><?xml version="1.0" encoding="utf-8"?>
-<p:sld xmlns:a="http://schemas.openxmlformats.org/drawingml/2006/main" xmlns:r="http://schemas.openxmlformats.org/officeDocument/2006/relationships" xmlns:p="http://schemas.openxmlformats.org/presentationml/2006/main">
-  <p:cSld>
-    <p:spTree>
-      <p:nvGrpSpPr>
-        <p:cNvPr id="1" name=""/>
-        <p:cNvGrpSpPr/>
-        <p:nvPr/>
-      </p:nvGrpSpPr>
-      <p:grpSpPr>
-        <a:xfrm>
-          <a:off x="0" y="0"/>
-          <a:ext cx="0" cy="0"/>
-          <a:chOff x="0" y="0"/>
-          <a:chExt cx="0" cy="0"/>
-        </a:xfrm>
-      </p:grpSpPr>
-      <p:pic>
-        <p:nvPicPr>
-          <p:cNvPr id="4" name="Picture 4" descr="東京メトロ03系｜RailFile.jp｜鉄道車両サイドビューの図鑑">
-            <a:extLst>
-              <a:ext uri="{FF2B5EF4-FFF2-40B4-BE49-F238E27FC236}">
-                <a16:creationId xmlns:a16="http://schemas.microsoft.com/office/drawing/2014/main" id="{F3D047AC-E479-3B7A-E2B9-4D4C7CA00C27}"/>
-              </a:ext>
-            </a:extLst>
-          </p:cNvPr>
-          <p:cNvPicPr>
-            <a:picLocks noChangeAspect="1" noChangeArrowheads="1"/>
-          </p:cNvPicPr>
-          <p:nvPr/>
-        </p:nvPicPr>
-        <p:blipFill rotWithShape="1">
-          <a:blip r:embed="rId2">
-            <a:extLst>
-              <a:ext uri="{28A0092B-C50C-407E-A947-70E740481C1C}">
-                <a14:useLocalDpi xmlns:a14="http://schemas.microsoft.com/office/drawing/2010/main" val="0"/>
-              </a:ext>
-            </a:extLst>
-          </a:blip>
-          <a:srcRect l="8021" t="60246" r="48216" b="26643"/>
-          <a:stretch/>
-        </p:blipFill>
-        <p:spPr bwMode="auto">
-          <a:xfrm>
-            <a:off x="780559" y="607767"/>
-            <a:ext cx="10446980" cy="3129788"/>
-          </a:xfrm>
-          <a:prstGeom prst="rect">
-            <a:avLst/>
-          </a:prstGeom>
-          <a:noFill/>
-          <a:extLst>
-            <a:ext uri="{909E8E84-426E-40DD-AFC4-6F175D3DCCD1}">
-              <a14:hiddenFill xmlns:a14="http://schemas.microsoft.com/office/drawing/2010/main">
-                <a:solidFill>
-                  <a:srgbClr val="FFFFFF"/>
-                </a:solidFill>
-              </a14:hiddenFill>
-            </a:ext>
-          </a:extLst>
-        </p:spPr>
-      </p:pic>
-      <p:sp>
-        <p:nvSpPr>
-          <p:cNvPr id="5" name="正方形/長方形 4">
-            <a:extLst>
-              <a:ext uri="{FF2B5EF4-FFF2-40B4-BE49-F238E27FC236}">
-                <a16:creationId xmlns:a16="http://schemas.microsoft.com/office/drawing/2014/main" id="{77AC9295-1B25-045D-2D77-E80FAD7F3764}"/>
-              </a:ext>
-            </a:extLst>
-          </p:cNvPr>
-          <p:cNvSpPr/>
-          <p:nvPr/>
-        </p:nvSpPr>
-        <p:spPr>
-          <a:xfrm rot="19087804">
-            <a:off x="2094456" y="4548702"/>
-            <a:ext cx="1450363" cy="1058323"/>
-          </a:xfrm>
-          <a:prstGeom prst="rect">
-            <a:avLst/>
-          </a:prstGeom>
-          <a:solidFill>
-            <a:srgbClr val="A2A2A2"/>
-          </a:solidFill>
-          <a:ln w="76200">
-            <a:noFill/>
-          </a:ln>
-        </p:spPr>
-        <p:style>
-          <a:lnRef idx="2">
-            <a:schemeClr val="accent1">
-              <a:shade val="15000"/>
-            </a:schemeClr>
-          </a:lnRef>
-          <a:fillRef idx="1">
-            <a:schemeClr val="accent1"/>
-          </a:fillRef>
-          <a:effectRef idx="0">
-            <a:schemeClr val="accent1"/>
-          </a:effectRef>
-          <a:fontRef idx="minor">
-            <a:schemeClr val="lt1"/>
-          </a:fontRef>
-        </p:style>
-        <p:txBody>
-          <a:bodyPr rtlCol="0" anchor="ctr"/>
-          <a:lstStyle/>
-          <a:p>
-            <a:pPr algn="ctr"/>
-            <a:endParaRPr kumimoji="1" lang="ja-JP" altLang="en-US" dirty="0"/>
-          </a:p>
-        </p:txBody>
-      </p:sp>
-      <p:sp>
-        <p:nvSpPr>
-          <p:cNvPr id="7" name="正方形/長方形 6">
-            <a:extLst>
-              <a:ext uri="{FF2B5EF4-FFF2-40B4-BE49-F238E27FC236}">
-                <a16:creationId xmlns:a16="http://schemas.microsoft.com/office/drawing/2014/main" id="{E48C7AA8-028E-7EA9-74FD-BB680ACA7F7F}"/>
-              </a:ext>
-            </a:extLst>
-          </p:cNvPr>
-          <p:cNvSpPr/>
-          <p:nvPr/>
-        </p:nvSpPr>
-        <p:spPr>
-          <a:xfrm rot="18901224">
-            <a:off x="6516295" y="5362296"/>
-            <a:ext cx="1355999" cy="301422"/>
-          </a:xfrm>
-          <a:prstGeom prst="rect">
-            <a:avLst/>
-          </a:prstGeom>
-          <a:solidFill>
-            <a:schemeClr val="tx1">
-              <a:lumMod val="85000"/>
-              <a:lumOff val="15000"/>
-            </a:schemeClr>
-          </a:solidFill>
-          <a:ln w="76200">
-            <a:noFill/>
-          </a:ln>
-        </p:spPr>
-        <p:style>
-          <a:lnRef idx="2">
-            <a:schemeClr val="accent1">
-              <a:shade val="15000"/>
-            </a:schemeClr>
-          </a:lnRef>
-          <a:fillRef idx="1">
-            <a:schemeClr val="accent1"/>
-          </a:fillRef>
-          <a:effectRef idx="0">
-            <a:schemeClr val="accent1"/>
-          </a:effectRef>
-          <a:fontRef idx="minor">
-            <a:schemeClr val="lt1"/>
-          </a:fontRef>
-        </p:style>
-        <p:txBody>
-          <a:bodyPr rtlCol="0" anchor="ctr"/>
-          <a:lstStyle/>
-          <a:p>
-            <a:pPr algn="ctr"/>
-            <a:endParaRPr kumimoji="1" lang="ja-JP" altLang="en-US"/>
-          </a:p>
-        </p:txBody>
-      </p:sp>
-      <p:sp>
-        <p:nvSpPr>
-          <p:cNvPr id="8" name="正方形/長方形 7">
-            <a:extLst>
-              <a:ext uri="{FF2B5EF4-FFF2-40B4-BE49-F238E27FC236}">
-                <a16:creationId xmlns:a16="http://schemas.microsoft.com/office/drawing/2014/main" id="{C6614C84-C9AF-4BCE-C4ED-E7B5F5773A5C}"/>
-              </a:ext>
-            </a:extLst>
-          </p:cNvPr>
-          <p:cNvSpPr/>
-          <p:nvPr/>
-        </p:nvSpPr>
-        <p:spPr>
-          <a:xfrm rot="18901224">
-            <a:off x="7440803" y="4770316"/>
-            <a:ext cx="190506" cy="506148"/>
-          </a:xfrm>
-          <a:prstGeom prst="rect">
-            <a:avLst/>
-          </a:prstGeom>
-          <a:solidFill>
-            <a:schemeClr val="tx1">
-              <a:lumMod val="85000"/>
-              <a:lumOff val="15000"/>
-            </a:schemeClr>
-          </a:solidFill>
-          <a:ln w="76200">
-            <a:noFill/>
-          </a:ln>
-        </p:spPr>
-        <p:style>
-          <a:lnRef idx="2">
-            <a:schemeClr val="accent1">
-              <a:shade val="15000"/>
-            </a:schemeClr>
-          </a:lnRef>
-          <a:fillRef idx="1">
-            <a:schemeClr val="accent1"/>
-          </a:fillRef>
-          <a:effectRef idx="0">
-            <a:schemeClr val="accent1"/>
-          </a:effectRef>
-          <a:fontRef idx="minor">
-            <a:schemeClr val="lt1"/>
-          </a:fontRef>
-        </p:style>
-        <p:txBody>
-          <a:bodyPr rtlCol="0" anchor="ctr"/>
-          <a:lstStyle/>
-          <a:p>
-            <a:pPr algn="ctr"/>
-            <a:endParaRPr kumimoji="1" lang="ja-JP" altLang="en-US"/>
-          </a:p>
-        </p:txBody>
-      </p:sp>
-      <p:sp>
-        <p:nvSpPr>
-          <p:cNvPr id="9" name="正方形/長方形 8">
-            <a:extLst>
-              <a:ext uri="{FF2B5EF4-FFF2-40B4-BE49-F238E27FC236}">
-                <a16:creationId xmlns:a16="http://schemas.microsoft.com/office/drawing/2014/main" id="{EFA38052-B8BD-A3DA-573E-BF402BA9DCF3}"/>
-              </a:ext>
-            </a:extLst>
-          </p:cNvPr>
-          <p:cNvSpPr/>
-          <p:nvPr/>
-        </p:nvSpPr>
-        <p:spPr>
-          <a:xfrm>
-            <a:off x="5467783" y="5797440"/>
-            <a:ext cx="1355999" cy="301422"/>
-          </a:xfrm>
-          <a:prstGeom prst="rect">
-            <a:avLst/>
-          </a:prstGeom>
-          <a:solidFill>
-            <a:schemeClr val="tx1">
-              <a:lumMod val="85000"/>
-              <a:lumOff val="15000"/>
-            </a:schemeClr>
-          </a:solidFill>
-          <a:ln w="76200">
-            <a:noFill/>
-          </a:ln>
-        </p:spPr>
-        <p:style>
-          <a:lnRef idx="2">
-            <a:schemeClr val="accent1">
-              <a:shade val="15000"/>
-            </a:schemeClr>
-          </a:lnRef>
-          <a:fillRef idx="1">
-            <a:schemeClr val="accent1"/>
-          </a:fillRef>
-          <a:effectRef idx="0">
-            <a:schemeClr val="accent1"/>
-          </a:effectRef>
-          <a:fontRef idx="minor">
-            <a:schemeClr val="lt1"/>
-          </a:fontRef>
-        </p:style>
-        <p:txBody>
-          <a:bodyPr rtlCol="0" anchor="ctr"/>
-          <a:lstStyle/>
-          <a:p>
-            <a:pPr algn="ctr"/>
-            <a:endParaRPr kumimoji="1" lang="ja-JP" altLang="en-US"/>
-          </a:p>
-        </p:txBody>
-      </p:sp>
-      <p:sp>
-        <p:nvSpPr>
-          <p:cNvPr id="10" name="正方形/長方形 9">
-            <a:extLst>
-              <a:ext uri="{FF2B5EF4-FFF2-40B4-BE49-F238E27FC236}">
-                <a16:creationId xmlns:a16="http://schemas.microsoft.com/office/drawing/2014/main" id="{AA34B177-C93D-3831-704B-6ECCEED00338}"/>
-              </a:ext>
-            </a:extLst>
-          </p:cNvPr>
-          <p:cNvSpPr/>
-          <p:nvPr/>
-        </p:nvSpPr>
-        <p:spPr>
-          <a:xfrm>
-            <a:off x="5467783" y="4776441"/>
-            <a:ext cx="1965599" cy="301422"/>
-          </a:xfrm>
-          <a:prstGeom prst="rect">
-            <a:avLst/>
-          </a:prstGeom>
-          <a:solidFill>
-            <a:schemeClr val="tx1">
-              <a:lumMod val="85000"/>
-              <a:lumOff val="15000"/>
-            </a:schemeClr>
-          </a:solidFill>
-          <a:ln w="76200">
-            <a:noFill/>
-          </a:ln>
-        </p:spPr>
-        <p:style>
-          <a:lnRef idx="2">
-            <a:schemeClr val="accent1">
-              <a:shade val="15000"/>
-            </a:schemeClr>
-          </a:lnRef>
-          <a:fillRef idx="1">
-            <a:schemeClr val="accent1"/>
-          </a:fillRef>
-          <a:effectRef idx="0">
-            <a:schemeClr val="accent1"/>
-          </a:effectRef>
-          <a:fontRef idx="minor">
-            <a:schemeClr val="lt1"/>
-          </a:fontRef>
-        </p:style>
-        <p:txBody>
-          <a:bodyPr rtlCol="0" anchor="ctr"/>
-          <a:lstStyle/>
-          <a:p>
-            <a:pPr algn="ctr"/>
-            <a:endParaRPr kumimoji="1" lang="ja-JP" altLang="en-US"/>
-          </a:p>
-        </p:txBody>
-      </p:sp>
-      <p:sp>
-        <p:nvSpPr>
-          <p:cNvPr id="11" name="正方形/長方形 10">
-            <a:extLst>
-              <a:ext uri="{FF2B5EF4-FFF2-40B4-BE49-F238E27FC236}">
-                <a16:creationId xmlns:a16="http://schemas.microsoft.com/office/drawing/2014/main" id="{EF3CE034-3104-5AA0-D7BF-94A334FC8B2E}"/>
-              </a:ext>
-            </a:extLst>
-          </p:cNvPr>
-          <p:cNvSpPr/>
-          <p:nvPr/>
-        </p:nvSpPr>
-        <p:spPr>
-          <a:xfrm>
-            <a:off x="5469936" y="4969048"/>
-            <a:ext cx="1256433" cy="931771"/>
-          </a:xfrm>
-          <a:prstGeom prst="rect">
-            <a:avLst/>
-          </a:prstGeom>
-          <a:solidFill>
-            <a:srgbClr val="FFFBEF"/>
-          </a:solidFill>
-          <a:ln w="76200">
-            <a:noFill/>
-          </a:ln>
-        </p:spPr>
-        <p:style>
-          <a:lnRef idx="2">
-            <a:schemeClr val="accent1">
-              <a:shade val="15000"/>
-            </a:schemeClr>
-          </a:lnRef>
-          <a:fillRef idx="1">
-            <a:schemeClr val="accent1"/>
-          </a:fillRef>
-          <a:effectRef idx="0">
-            <a:schemeClr val="accent1"/>
-          </a:effectRef>
-          <a:fontRef idx="minor">
-            <a:schemeClr val="lt1"/>
-          </a:fontRef>
-        </p:style>
-        <p:txBody>
-          <a:bodyPr rtlCol="0" anchor="ctr"/>
-          <a:lstStyle/>
-          <a:p>
-            <a:pPr algn="ctr"/>
-            <a:endParaRPr kumimoji="1" lang="ja-JP" altLang="en-US"/>
-          </a:p>
-        </p:txBody>
-      </p:sp>
-      <p:sp>
-        <p:nvSpPr>
-          <p:cNvPr id="12" name="正方形/長方形 11">
-            <a:extLst>
-              <a:ext uri="{FF2B5EF4-FFF2-40B4-BE49-F238E27FC236}">
-                <a16:creationId xmlns:a16="http://schemas.microsoft.com/office/drawing/2014/main" id="{AFDCFE2B-66FF-24A8-C6DD-3688F4D7FD7E}"/>
-              </a:ext>
-            </a:extLst>
-          </p:cNvPr>
-          <p:cNvSpPr/>
-          <p:nvPr/>
-        </p:nvSpPr>
-        <p:spPr>
-          <a:xfrm rot="2417305">
-            <a:off x="6540026" y="4878131"/>
-            <a:ext cx="644202" cy="889001"/>
-          </a:xfrm>
-          <a:prstGeom prst="rect">
-            <a:avLst/>
-          </a:prstGeom>
-          <a:solidFill>
-            <a:schemeClr val="tx1">
-              <a:lumMod val="85000"/>
-              <a:lumOff val="15000"/>
-            </a:schemeClr>
-          </a:solidFill>
-          <a:ln w="76200">
-            <a:noFill/>
-          </a:ln>
-        </p:spPr>
-        <p:style>
-          <a:lnRef idx="2">
-            <a:schemeClr val="accent1">
-              <a:shade val="15000"/>
-            </a:schemeClr>
-          </a:lnRef>
-          <a:fillRef idx="1">
-            <a:schemeClr val="accent1"/>
-          </a:fillRef>
-          <a:effectRef idx="0">
-            <a:schemeClr val="accent1"/>
-          </a:effectRef>
-          <a:fontRef idx="minor">
-            <a:schemeClr val="lt1"/>
-          </a:fontRef>
-        </p:style>
-        <p:txBody>
-          <a:bodyPr rtlCol="0" anchor="ctr"/>
-          <a:lstStyle/>
-          <a:p>
-            <a:pPr algn="ctr"/>
-            <a:endParaRPr kumimoji="1" lang="ja-JP" altLang="en-US"/>
-          </a:p>
-        </p:txBody>
-      </p:sp>
-      <p:sp>
-        <p:nvSpPr>
-          <p:cNvPr id="14" name="正方形/長方形 13">
-            <a:extLst>
-              <a:ext uri="{FF2B5EF4-FFF2-40B4-BE49-F238E27FC236}">
-                <a16:creationId xmlns:a16="http://schemas.microsoft.com/office/drawing/2014/main" id="{B317EE52-4CB3-BD3A-7391-25CEC39F1908}"/>
-              </a:ext>
-            </a:extLst>
-          </p:cNvPr>
-          <p:cNvSpPr/>
-          <p:nvPr/>
-        </p:nvSpPr>
-        <p:spPr>
-          <a:xfrm rot="18901224">
-            <a:off x="6499556" y="5289240"/>
-            <a:ext cx="1179316" cy="284618"/>
-          </a:xfrm>
-          <a:prstGeom prst="rect">
-            <a:avLst/>
-          </a:prstGeom>
-          <a:solidFill>
-            <a:srgbClr val="FFFBEF"/>
-          </a:solidFill>
-          <a:ln w="76200">
-            <a:noFill/>
-          </a:ln>
-        </p:spPr>
-        <p:style>
-          <a:lnRef idx="2">
-            <a:schemeClr val="accent1">
-              <a:shade val="15000"/>
-            </a:schemeClr>
-          </a:lnRef>
-          <a:fillRef idx="1">
-            <a:schemeClr val="accent1"/>
-          </a:fillRef>
-          <a:effectRef idx="0">
-            <a:schemeClr val="accent1"/>
-          </a:effectRef>
-          <a:fontRef idx="minor">
-            <a:schemeClr val="lt1"/>
-          </a:fontRef>
-        </p:style>
-        <p:txBody>
-          <a:bodyPr rtlCol="0" anchor="ctr"/>
-          <a:lstStyle/>
-          <a:p>
-            <a:pPr algn="ctr"/>
-            <a:endParaRPr kumimoji="1" lang="ja-JP" altLang="en-US"/>
-          </a:p>
-        </p:txBody>
-      </p:sp>
-      <p:sp>
-        <p:nvSpPr>
-          <p:cNvPr id="15" name="正方形/長方形 14">
-            <a:extLst>
-              <a:ext uri="{FF2B5EF4-FFF2-40B4-BE49-F238E27FC236}">
-                <a16:creationId xmlns:a16="http://schemas.microsoft.com/office/drawing/2014/main" id="{4B187AE4-C7F9-EE19-9C2D-5C47C75FFC69}"/>
-              </a:ext>
-            </a:extLst>
-          </p:cNvPr>
-          <p:cNvSpPr/>
-          <p:nvPr/>
-        </p:nvSpPr>
-        <p:spPr>
-          <a:xfrm>
-            <a:off x="5467783" y="4909802"/>
-            <a:ext cx="1936522" cy="284618"/>
-          </a:xfrm>
-          <a:prstGeom prst="rect">
-            <a:avLst/>
-          </a:prstGeom>
-          <a:solidFill>
-            <a:srgbClr val="FFFBEF"/>
-          </a:solidFill>
-          <a:ln w="76200">
-            <a:noFill/>
-          </a:ln>
-        </p:spPr>
-        <p:style>
-          <a:lnRef idx="2">
-            <a:schemeClr val="accent1">
-              <a:shade val="15000"/>
-            </a:schemeClr>
-          </a:lnRef>
-          <a:fillRef idx="1">
-            <a:schemeClr val="accent1"/>
-          </a:fillRef>
-          <a:effectRef idx="0">
-            <a:schemeClr val="accent1"/>
-          </a:effectRef>
-          <a:fontRef idx="minor">
-            <a:schemeClr val="lt1"/>
-          </a:fontRef>
-        </p:style>
-        <p:txBody>
-          <a:bodyPr rtlCol="0" anchor="ctr"/>
-          <a:lstStyle/>
-          <a:p>
-            <a:pPr algn="ctr"/>
-            <a:endParaRPr kumimoji="1" lang="ja-JP" altLang="en-US"/>
-          </a:p>
-        </p:txBody>
-      </p:sp>
-      <p:sp>
-        <p:nvSpPr>
-          <p:cNvPr id="16" name="正方形/長方形 15">
-            <a:extLst>
-              <a:ext uri="{FF2B5EF4-FFF2-40B4-BE49-F238E27FC236}">
-                <a16:creationId xmlns:a16="http://schemas.microsoft.com/office/drawing/2014/main" id="{B94C1B5F-B883-31DB-BE26-72FAC7BBA6A4}"/>
-              </a:ext>
-            </a:extLst>
-          </p:cNvPr>
-          <p:cNvSpPr/>
-          <p:nvPr/>
-        </p:nvSpPr>
-        <p:spPr>
-          <a:xfrm>
-            <a:off x="5468030" y="5660714"/>
-            <a:ext cx="1308764" cy="284618"/>
-          </a:xfrm>
-          <a:prstGeom prst="rect">
-            <a:avLst/>
-          </a:prstGeom>
-          <a:solidFill>
-            <a:srgbClr val="FFFBEF"/>
-          </a:solidFill>
-          <a:ln w="76200">
-            <a:noFill/>
-          </a:ln>
-        </p:spPr>
-        <p:style>
-          <a:lnRef idx="2">
-            <a:schemeClr val="accent1">
-              <a:shade val="15000"/>
-            </a:schemeClr>
-          </a:lnRef>
-          <a:fillRef idx="1">
-            <a:schemeClr val="accent1"/>
-          </a:fillRef>
-          <a:effectRef idx="0">
-            <a:schemeClr val="accent1"/>
-          </a:effectRef>
-          <a:fontRef idx="minor">
-            <a:schemeClr val="lt1"/>
-          </a:fontRef>
-        </p:style>
-        <p:txBody>
-          <a:bodyPr rtlCol="0" anchor="ctr"/>
-          <a:lstStyle/>
-          <a:p>
-            <a:pPr algn="ctr"/>
-            <a:endParaRPr lang="ja-JP" altLang="en-US"/>
-          </a:p>
-        </p:txBody>
-      </p:sp>
-      <p:sp>
-        <p:nvSpPr>
-          <p:cNvPr id="17" name="正方形/長方形 16">
-            <a:extLst>
-              <a:ext uri="{FF2B5EF4-FFF2-40B4-BE49-F238E27FC236}">
-                <a16:creationId xmlns:a16="http://schemas.microsoft.com/office/drawing/2014/main" id="{0E41A10E-C2C8-775B-4781-D305DDBC68EE}"/>
-              </a:ext>
-            </a:extLst>
-          </p:cNvPr>
-          <p:cNvSpPr/>
-          <p:nvPr/>
-        </p:nvSpPr>
-        <p:spPr>
-          <a:xfrm>
-            <a:off x="7906808" y="839957"/>
-            <a:ext cx="1965599" cy="301422"/>
-          </a:xfrm>
-          <a:prstGeom prst="rect">
-            <a:avLst/>
-          </a:prstGeom>
-          <a:solidFill>
-            <a:schemeClr val="tx1">
-              <a:lumMod val="85000"/>
-              <a:lumOff val="15000"/>
-            </a:schemeClr>
-          </a:solidFill>
-          <a:ln w="76200">
-            <a:noFill/>
-          </a:ln>
-        </p:spPr>
-        <p:style>
-          <a:lnRef idx="2">
-            <a:schemeClr val="accent1">
-              <a:shade val="15000"/>
-            </a:schemeClr>
-          </a:lnRef>
-          <a:fillRef idx="1">
-            <a:schemeClr val="accent1"/>
-          </a:fillRef>
-          <a:effectRef idx="0">
-            <a:schemeClr val="accent1"/>
-          </a:effectRef>
-          <a:fontRef idx="minor">
-            <a:schemeClr val="lt1"/>
-          </a:fontRef>
-        </p:style>
-        <p:txBody>
-          <a:bodyPr rtlCol="0" anchor="ctr"/>
-          <a:lstStyle/>
-          <a:p>
-            <a:pPr algn="ctr"/>
-            <a:endParaRPr kumimoji="1" lang="ja-JP" altLang="en-US"/>
-          </a:p>
-        </p:txBody>
-      </p:sp>
-      <p:sp>
-        <p:nvSpPr>
-          <p:cNvPr id="18" name="正方形/長方形 17">
-            <a:extLst>
-              <a:ext uri="{FF2B5EF4-FFF2-40B4-BE49-F238E27FC236}">
-                <a16:creationId xmlns:a16="http://schemas.microsoft.com/office/drawing/2014/main" id="{2BEEA661-A0B2-183F-BA92-D21DED38F86E}"/>
-              </a:ext>
-            </a:extLst>
-          </p:cNvPr>
-          <p:cNvSpPr/>
-          <p:nvPr/>
-        </p:nvSpPr>
-        <p:spPr>
-          <a:xfrm>
-            <a:off x="5468031" y="4954315"/>
-            <a:ext cx="1346864" cy="736451"/>
-          </a:xfrm>
-          <a:prstGeom prst="rect">
-            <a:avLst/>
-          </a:prstGeom>
-          <a:solidFill>
-            <a:srgbClr val="FFFBEF"/>
-          </a:solidFill>
-          <a:ln w="76200">
-            <a:noFill/>
-          </a:ln>
-        </p:spPr>
-        <p:style>
-          <a:lnRef idx="2">
-            <a:schemeClr val="accent1">
-              <a:shade val="15000"/>
-            </a:schemeClr>
-          </a:lnRef>
-          <a:fillRef idx="1">
-            <a:schemeClr val="accent1"/>
-          </a:fillRef>
-          <a:effectRef idx="0">
-            <a:schemeClr val="accent1"/>
-          </a:effectRef>
-          <a:fontRef idx="minor">
-            <a:schemeClr val="lt1"/>
-          </a:fontRef>
-        </p:style>
-        <p:txBody>
-          <a:bodyPr rtlCol="0" anchor="ctr"/>
-          <a:lstStyle/>
-          <a:p>
-            <a:pPr algn="ctr"/>
-            <a:endParaRPr kumimoji="1" lang="ja-JP" altLang="en-US"/>
-          </a:p>
-        </p:txBody>
-      </p:sp>
-      <p:sp>
-        <p:nvSpPr>
-          <p:cNvPr id="19" name="正方形/長方形 18">
-            <a:extLst>
-              <a:ext uri="{FF2B5EF4-FFF2-40B4-BE49-F238E27FC236}">
-                <a16:creationId xmlns:a16="http://schemas.microsoft.com/office/drawing/2014/main" id="{2D3373E7-8A6A-4775-263B-2779D9526608}"/>
-              </a:ext>
-            </a:extLst>
-          </p:cNvPr>
-          <p:cNvSpPr/>
-          <p:nvPr/>
-        </p:nvSpPr>
-        <p:spPr>
-          <a:xfrm>
-            <a:off x="6779749" y="5012242"/>
-            <a:ext cx="370802" cy="505806"/>
-          </a:xfrm>
-          <a:prstGeom prst="rect">
-            <a:avLst/>
-          </a:prstGeom>
-          <a:solidFill>
-            <a:srgbClr val="FFFBEF"/>
-          </a:solidFill>
-          <a:ln w="76200">
-            <a:noFill/>
-          </a:ln>
-        </p:spPr>
-        <p:style>
-          <a:lnRef idx="2">
-            <a:schemeClr val="accent1">
-              <a:shade val="15000"/>
-            </a:schemeClr>
-          </a:lnRef>
-          <a:fillRef idx="1">
-            <a:schemeClr val="accent1"/>
-          </a:fillRef>
-          <a:effectRef idx="0">
-            <a:schemeClr val="accent1"/>
-          </a:effectRef>
-          <a:fontRef idx="minor">
-            <a:schemeClr val="lt1"/>
-          </a:fontRef>
-        </p:style>
-        <p:txBody>
-          <a:bodyPr rtlCol="0" anchor="ctr"/>
-          <a:lstStyle/>
-          <a:p>
-            <a:pPr algn="ctr"/>
-            <a:endParaRPr kumimoji="1" lang="ja-JP" altLang="en-US"/>
-          </a:p>
-        </p:txBody>
-      </p:sp>
-      <p:pic>
-        <p:nvPicPr>
-          <p:cNvPr id="20" name="Picture 2">
-            <a:extLst>
-              <a:ext uri="{FF2B5EF4-FFF2-40B4-BE49-F238E27FC236}">
-                <a16:creationId xmlns:a16="http://schemas.microsoft.com/office/drawing/2014/main" id="{72F0C190-C8C4-3EA4-85CC-3152C9A256A3}"/>
-              </a:ext>
-            </a:extLst>
-          </p:cNvPr>
-          <p:cNvPicPr>
-            <a:picLocks noChangeAspect="1" noChangeArrowheads="1"/>
-          </p:cNvPicPr>
-          <p:nvPr/>
-        </p:nvPicPr>
-        <p:blipFill rotWithShape="1">
-          <a:blip r:embed="rId3">
-            <a:extLst>
-              <a:ext uri="{28A0092B-C50C-407E-A947-70E740481C1C}">
-                <a14:useLocalDpi xmlns:a14="http://schemas.microsoft.com/office/drawing/2010/main" val="0"/>
-              </a:ext>
-            </a:extLst>
-          </a:blip>
-          <a:srcRect r="93200" b="82705"/>
-          <a:stretch/>
-        </p:blipFill>
-        <p:spPr bwMode="auto">
-          <a:xfrm>
-            <a:off x="685800" y="337741"/>
-            <a:ext cx="2481278" cy="3399814"/>
-          </a:xfrm>
-          <a:prstGeom prst="rect">
-            <a:avLst/>
-          </a:prstGeom>
-          <a:noFill/>
-          <a:extLst>
-            <a:ext uri="{909E8E84-426E-40DD-AFC4-6F175D3DCCD1}">
-              <a14:hiddenFill xmlns:a14="http://schemas.microsoft.com/office/drawing/2010/main">
-                <a:solidFill>
-                  <a:srgbClr val="FFFFFF"/>
-                </a:solidFill>
-              </a14:hiddenFill>
-            </a:ext>
-          </a:extLst>
-        </p:spPr>
-      </p:pic>
-      <p:sp>
-        <p:nvSpPr>
-          <p:cNvPr id="22" name="正方形/長方形 21">
-            <a:extLst>
-              <a:ext uri="{FF2B5EF4-FFF2-40B4-BE49-F238E27FC236}">
-                <a16:creationId xmlns:a16="http://schemas.microsoft.com/office/drawing/2014/main" id="{AE23C3AF-1C7D-C4F4-E100-368F8946AD1F}"/>
-              </a:ext>
-            </a:extLst>
-          </p:cNvPr>
-          <p:cNvSpPr/>
-          <p:nvPr/>
-        </p:nvSpPr>
-        <p:spPr>
-          <a:xfrm rot="18901224">
-            <a:off x="6529303" y="5316037"/>
-            <a:ext cx="1076801" cy="222977"/>
-          </a:xfrm>
-          <a:prstGeom prst="rect">
-            <a:avLst/>
-          </a:prstGeom>
-          <a:solidFill>
-            <a:srgbClr val="A2A2A2"/>
-          </a:solidFill>
-          <a:ln w="76200">
-            <a:noFill/>
-          </a:ln>
-        </p:spPr>
-        <p:style>
-          <a:lnRef idx="2">
-            <a:schemeClr val="accent1">
-              <a:shade val="15000"/>
-            </a:schemeClr>
-          </a:lnRef>
-          <a:fillRef idx="1">
-            <a:schemeClr val="accent1"/>
-          </a:fillRef>
-          <a:effectRef idx="0">
-            <a:schemeClr val="accent1"/>
-          </a:effectRef>
-          <a:fontRef idx="minor">
-            <a:schemeClr val="lt1"/>
-          </a:fontRef>
-        </p:style>
-        <p:txBody>
-          <a:bodyPr rtlCol="0" anchor="ctr"/>
-          <a:lstStyle/>
-          <a:p>
-            <a:pPr algn="ctr"/>
-            <a:endParaRPr kumimoji="1" lang="ja-JP" altLang="en-US"/>
-          </a:p>
-        </p:txBody>
-      </p:sp>
-      <p:sp>
-        <p:nvSpPr>
-          <p:cNvPr id="23" name="正方形/長方形 22">
-            <a:extLst>
-              <a:ext uri="{FF2B5EF4-FFF2-40B4-BE49-F238E27FC236}">
-                <a16:creationId xmlns:a16="http://schemas.microsoft.com/office/drawing/2014/main" id="{350BD0FD-5F33-F90A-4BF7-1D3AADDEE306}"/>
-              </a:ext>
-            </a:extLst>
-          </p:cNvPr>
-          <p:cNvSpPr/>
-          <p:nvPr/>
-        </p:nvSpPr>
-        <p:spPr>
-          <a:xfrm>
-            <a:off x="5606737" y="1726824"/>
-            <a:ext cx="1835170" cy="284618"/>
-          </a:xfrm>
-          <a:prstGeom prst="rect">
-            <a:avLst/>
-          </a:prstGeom>
-          <a:solidFill>
-            <a:srgbClr val="A2A2A2"/>
-          </a:solidFill>
-          <a:ln w="76200">
-            <a:noFill/>
-          </a:ln>
-        </p:spPr>
-        <p:style>
-          <a:lnRef idx="2">
-            <a:schemeClr val="accent1">
-              <a:shade val="15000"/>
-            </a:schemeClr>
-          </a:lnRef>
-          <a:fillRef idx="1">
-            <a:schemeClr val="accent1"/>
-          </a:fillRef>
-          <a:effectRef idx="0">
-            <a:schemeClr val="accent1"/>
-          </a:effectRef>
-          <a:fontRef idx="minor">
-            <a:schemeClr val="lt1"/>
-          </a:fontRef>
-        </p:style>
-        <p:txBody>
-          <a:bodyPr rtlCol="0" anchor="ctr"/>
-          <a:lstStyle/>
-          <a:p>
-            <a:pPr algn="ctr"/>
-            <a:endParaRPr kumimoji="1" lang="ja-JP" altLang="en-US"/>
-          </a:p>
-        </p:txBody>
-      </p:sp>
-      <p:sp>
-        <p:nvSpPr>
-          <p:cNvPr id="24" name="正方形/長方形 23">
-            <a:extLst>
-              <a:ext uri="{FF2B5EF4-FFF2-40B4-BE49-F238E27FC236}">
-                <a16:creationId xmlns:a16="http://schemas.microsoft.com/office/drawing/2014/main" id="{584E8D6D-C28D-2D9E-F033-6C1B967710EC}"/>
-              </a:ext>
-            </a:extLst>
-          </p:cNvPr>
-          <p:cNvSpPr/>
-          <p:nvPr/>
-        </p:nvSpPr>
-        <p:spPr>
-          <a:xfrm>
-            <a:off x="5606737" y="2484879"/>
-            <a:ext cx="1234054" cy="284618"/>
-          </a:xfrm>
-          <a:prstGeom prst="rect">
-            <a:avLst/>
-          </a:prstGeom>
-          <a:solidFill>
-            <a:srgbClr val="A2A2A2"/>
-          </a:solidFill>
-          <a:ln w="76200">
-            <a:noFill/>
-          </a:ln>
-        </p:spPr>
-        <p:style>
-          <a:lnRef idx="2">
-            <a:schemeClr val="accent1">
-              <a:shade val="15000"/>
-            </a:schemeClr>
-          </a:lnRef>
-          <a:fillRef idx="1">
-            <a:schemeClr val="accent1"/>
-          </a:fillRef>
-          <a:effectRef idx="0">
-            <a:schemeClr val="accent1"/>
-          </a:effectRef>
-          <a:fontRef idx="minor">
-            <a:schemeClr val="lt1"/>
-          </a:fontRef>
-        </p:style>
-        <p:txBody>
-          <a:bodyPr rtlCol="0" anchor="ctr"/>
-          <a:lstStyle/>
-          <a:p>
-            <a:pPr algn="ctr"/>
-            <a:endParaRPr kumimoji="1" lang="ja-JP" altLang="en-US"/>
-          </a:p>
-        </p:txBody>
-      </p:sp>
-      <p:sp>
-        <p:nvSpPr>
-          <p:cNvPr id="25" name="正方形/長方形 24">
-            <a:extLst>
-              <a:ext uri="{FF2B5EF4-FFF2-40B4-BE49-F238E27FC236}">
-                <a16:creationId xmlns:a16="http://schemas.microsoft.com/office/drawing/2014/main" id="{824BC1AA-E4D8-152B-34CB-16E128EB4280}"/>
-              </a:ext>
-            </a:extLst>
-          </p:cNvPr>
-          <p:cNvSpPr/>
-          <p:nvPr/>
-        </p:nvSpPr>
-        <p:spPr>
-          <a:xfrm>
-            <a:off x="5606737" y="1727981"/>
-            <a:ext cx="1234054" cy="823982"/>
-          </a:xfrm>
-          <a:prstGeom prst="rect">
-            <a:avLst/>
-          </a:prstGeom>
-          <a:solidFill>
-            <a:srgbClr val="A2A2A2"/>
-          </a:solidFill>
-          <a:ln w="76200">
-            <a:noFill/>
-          </a:ln>
-        </p:spPr>
-        <p:style>
-          <a:lnRef idx="2">
-            <a:schemeClr val="accent1">
-              <a:shade val="15000"/>
-            </a:schemeClr>
-          </a:lnRef>
-          <a:fillRef idx="1">
-            <a:schemeClr val="accent1"/>
-          </a:fillRef>
-          <a:effectRef idx="0">
-            <a:schemeClr val="accent1"/>
-          </a:effectRef>
-          <a:fontRef idx="minor">
-            <a:schemeClr val="lt1"/>
-          </a:fontRef>
-        </p:style>
-        <p:txBody>
-          <a:bodyPr rtlCol="0" anchor="ctr"/>
-          <a:lstStyle/>
-          <a:p>
-            <a:pPr algn="ctr"/>
-            <a:endParaRPr kumimoji="1" lang="ja-JP" altLang="en-US"/>
-          </a:p>
-        </p:txBody>
-      </p:sp>
-      <p:sp>
-        <p:nvSpPr>
-          <p:cNvPr id="26" name="正方形/長方形 25">
-            <a:extLst>
-              <a:ext uri="{FF2B5EF4-FFF2-40B4-BE49-F238E27FC236}">
-                <a16:creationId xmlns:a16="http://schemas.microsoft.com/office/drawing/2014/main" id="{34961579-AD02-6176-1886-B93A3D1CF565}"/>
-              </a:ext>
-            </a:extLst>
-          </p:cNvPr>
-          <p:cNvSpPr/>
-          <p:nvPr/>
-        </p:nvSpPr>
-        <p:spPr>
-          <a:xfrm>
-            <a:off x="6672755" y="1949982"/>
-            <a:ext cx="586194" cy="347631"/>
-          </a:xfrm>
-          <a:prstGeom prst="rect">
-            <a:avLst/>
-          </a:prstGeom>
-          <a:solidFill>
-            <a:srgbClr val="A2A2A2"/>
-          </a:solidFill>
-          <a:ln w="76200">
-            <a:noFill/>
-          </a:ln>
-        </p:spPr>
-        <p:style>
-          <a:lnRef idx="2">
-            <a:schemeClr val="accent1">
-              <a:shade val="15000"/>
-            </a:schemeClr>
-          </a:lnRef>
-          <a:fillRef idx="1">
-            <a:schemeClr val="accent1"/>
-          </a:fillRef>
-          <a:effectRef idx="0">
-            <a:schemeClr val="accent1"/>
-          </a:effectRef>
-          <a:fontRef idx="minor">
-            <a:schemeClr val="lt1"/>
-          </a:fontRef>
-        </p:style>
-        <p:txBody>
-          <a:bodyPr rtlCol="0" anchor="ctr"/>
-          <a:lstStyle/>
-          <a:p>
-            <a:pPr algn="ctr"/>
-            <a:endParaRPr kumimoji="1" lang="ja-JP" altLang="en-US"/>
-          </a:p>
-        </p:txBody>
-      </p:sp>
-      <p:sp>
-        <p:nvSpPr>
-          <p:cNvPr id="27" name="正方形/長方形 26">
-            <a:extLst>
-              <a:ext uri="{FF2B5EF4-FFF2-40B4-BE49-F238E27FC236}">
-                <a16:creationId xmlns:a16="http://schemas.microsoft.com/office/drawing/2014/main" id="{D4D0F42F-0E72-CCCC-339A-1436D0E92A32}"/>
-              </a:ext>
-            </a:extLst>
-          </p:cNvPr>
-          <p:cNvSpPr/>
-          <p:nvPr/>
-        </p:nvSpPr>
-        <p:spPr>
-          <a:xfrm>
-            <a:off x="5465877" y="4964406"/>
-            <a:ext cx="1901619" cy="220132"/>
-          </a:xfrm>
-          <a:prstGeom prst="rect">
-            <a:avLst/>
-          </a:prstGeom>
-          <a:solidFill>
-            <a:srgbClr val="A2A2A2"/>
-          </a:solidFill>
-          <a:ln w="76200">
-            <a:noFill/>
-          </a:ln>
-        </p:spPr>
-        <p:style>
-          <a:lnRef idx="2">
-            <a:schemeClr val="accent1">
-              <a:shade val="15000"/>
-            </a:schemeClr>
-          </a:lnRef>
-          <a:fillRef idx="1">
-            <a:schemeClr val="accent1"/>
-          </a:fillRef>
-          <a:effectRef idx="0">
-            <a:schemeClr val="accent1"/>
-          </a:effectRef>
-          <a:fontRef idx="minor">
-            <a:schemeClr val="lt1"/>
-          </a:fontRef>
-        </p:style>
-        <p:txBody>
-          <a:bodyPr rtlCol="0" anchor="ctr"/>
-          <a:lstStyle/>
-          <a:p>
-            <a:pPr algn="ctr"/>
-            <a:endParaRPr kumimoji="1" lang="ja-JP" altLang="en-US"/>
-          </a:p>
-        </p:txBody>
-      </p:sp>
-      <p:sp>
-        <p:nvSpPr>
-          <p:cNvPr id="28" name="正方形/長方形 27">
-            <a:extLst>
-              <a:ext uri="{FF2B5EF4-FFF2-40B4-BE49-F238E27FC236}">
-                <a16:creationId xmlns:a16="http://schemas.microsoft.com/office/drawing/2014/main" id="{1BD52180-BF7D-EE47-5F0E-2C190ED11FCC}"/>
-              </a:ext>
-            </a:extLst>
-          </p:cNvPr>
-          <p:cNvSpPr/>
-          <p:nvPr/>
-        </p:nvSpPr>
-        <p:spPr>
-          <a:xfrm>
-            <a:off x="5465877" y="5085802"/>
-            <a:ext cx="1296528" cy="801259"/>
-          </a:xfrm>
-          <a:prstGeom prst="rect">
-            <a:avLst/>
-          </a:prstGeom>
-          <a:solidFill>
-            <a:srgbClr val="A2A2A2"/>
-          </a:solidFill>
-          <a:ln w="76200">
-            <a:noFill/>
-          </a:ln>
-        </p:spPr>
-        <p:style>
-          <a:lnRef idx="2">
-            <a:schemeClr val="accent1">
-              <a:shade val="15000"/>
-            </a:schemeClr>
-          </a:lnRef>
-          <a:fillRef idx="1">
-            <a:schemeClr val="accent1"/>
-          </a:fillRef>
-          <a:effectRef idx="0">
-            <a:schemeClr val="accent1"/>
-          </a:effectRef>
-          <a:fontRef idx="minor">
-            <a:schemeClr val="lt1"/>
-          </a:fontRef>
-        </p:style>
-        <p:txBody>
-          <a:bodyPr rtlCol="0" anchor="ctr"/>
-          <a:lstStyle/>
-          <a:p>
-            <a:pPr algn="ctr"/>
-            <a:endParaRPr kumimoji="1" lang="ja-JP" altLang="en-US"/>
-          </a:p>
-        </p:txBody>
-      </p:sp>
-      <p:sp>
-        <p:nvSpPr>
-          <p:cNvPr id="29" name="正方形/長方形 28">
-            <a:extLst>
-              <a:ext uri="{FF2B5EF4-FFF2-40B4-BE49-F238E27FC236}">
-                <a16:creationId xmlns:a16="http://schemas.microsoft.com/office/drawing/2014/main" id="{B13A2544-D68D-71FE-47DC-886FBF706CC2}"/>
-              </a:ext>
-            </a:extLst>
-          </p:cNvPr>
-          <p:cNvSpPr/>
-          <p:nvPr/>
-        </p:nvSpPr>
-        <p:spPr>
-          <a:xfrm rot="2886923">
-            <a:off x="6611665" y="5028760"/>
-            <a:ext cx="433282" cy="775254"/>
-          </a:xfrm>
-          <a:prstGeom prst="rect">
-            <a:avLst/>
-          </a:prstGeom>
-          <a:solidFill>
-            <a:srgbClr val="A2A2A2"/>
-          </a:solidFill>
-          <a:ln w="76200">
-            <a:noFill/>
-          </a:ln>
-        </p:spPr>
-        <p:style>
-          <a:lnRef idx="2">
-            <a:schemeClr val="accent1">
-              <a:shade val="15000"/>
-            </a:schemeClr>
-          </a:lnRef>
-          <a:fillRef idx="1">
-            <a:schemeClr val="accent1"/>
-          </a:fillRef>
-          <a:effectRef idx="0">
-            <a:schemeClr val="accent1"/>
-          </a:effectRef>
-          <a:fontRef idx="minor">
-            <a:schemeClr val="lt1"/>
-          </a:fontRef>
-        </p:style>
-        <p:txBody>
-          <a:bodyPr rtlCol="0" anchor="ctr"/>
-          <a:lstStyle/>
-          <a:p>
-            <a:pPr algn="ctr"/>
-            <a:endParaRPr kumimoji="1" lang="ja-JP" altLang="en-US"/>
-          </a:p>
-        </p:txBody>
-      </p:sp>
-      <p:sp>
-        <p:nvSpPr>
-          <p:cNvPr id="30" name="正方形/長方形 29">
-            <a:extLst>
-              <a:ext uri="{FF2B5EF4-FFF2-40B4-BE49-F238E27FC236}">
-                <a16:creationId xmlns:a16="http://schemas.microsoft.com/office/drawing/2014/main" id="{E8E46891-E7F6-2700-0553-C4E6A90F13F9}"/>
-              </a:ext>
-            </a:extLst>
-          </p:cNvPr>
-          <p:cNvSpPr/>
-          <p:nvPr/>
-        </p:nvSpPr>
-        <p:spPr>
-          <a:xfrm rot="18901224">
-            <a:off x="8167460" y="4688203"/>
-            <a:ext cx="966223" cy="520561"/>
-          </a:xfrm>
-          <a:prstGeom prst="rect">
-            <a:avLst/>
-          </a:prstGeom>
-          <a:solidFill>
-            <a:schemeClr val="tx1">
-              <a:lumMod val="85000"/>
-              <a:lumOff val="15000"/>
-            </a:schemeClr>
-          </a:solidFill>
-          <a:ln w="76200">
-            <a:noFill/>
-          </a:ln>
-        </p:spPr>
-        <p:style>
-          <a:lnRef idx="2">
-            <a:schemeClr val="accent1">
-              <a:shade val="15000"/>
-            </a:schemeClr>
-          </a:lnRef>
-          <a:fillRef idx="1">
-            <a:schemeClr val="accent1"/>
-          </a:fillRef>
-          <a:effectRef idx="0">
-            <a:schemeClr val="accent1"/>
-          </a:effectRef>
-          <a:fontRef idx="minor">
-            <a:schemeClr val="lt1"/>
-          </a:fontRef>
-        </p:style>
-        <p:txBody>
-          <a:bodyPr rtlCol="0" anchor="ctr"/>
-          <a:lstStyle/>
-          <a:p>
-            <a:pPr algn="ctr"/>
-            <a:endParaRPr kumimoji="1" lang="ja-JP" altLang="en-US"/>
-          </a:p>
-        </p:txBody>
-      </p:sp>
-      <p:sp>
-        <p:nvSpPr>
-          <p:cNvPr id="32" name="正方形/長方形 31">
-            <a:extLst>
-              <a:ext uri="{FF2B5EF4-FFF2-40B4-BE49-F238E27FC236}">
-                <a16:creationId xmlns:a16="http://schemas.microsoft.com/office/drawing/2014/main" id="{02F6CC34-D6EE-8D38-5E2A-085A171676DA}"/>
-              </a:ext>
-            </a:extLst>
-          </p:cNvPr>
-          <p:cNvSpPr/>
-          <p:nvPr/>
-        </p:nvSpPr>
-        <p:spPr>
-          <a:xfrm>
-            <a:off x="8490821" y="5048474"/>
-            <a:ext cx="947598" cy="434838"/>
-          </a:xfrm>
-          <a:prstGeom prst="rect">
-            <a:avLst/>
-          </a:prstGeom>
-          <a:solidFill>
-            <a:schemeClr val="tx1">
-              <a:lumMod val="85000"/>
-              <a:lumOff val="15000"/>
-            </a:schemeClr>
-          </a:solidFill>
-          <a:ln w="76200">
-            <a:noFill/>
-          </a:ln>
-        </p:spPr>
-        <p:style>
-          <a:lnRef idx="2">
-            <a:schemeClr val="accent1">
-              <a:shade val="15000"/>
-            </a:schemeClr>
-          </a:lnRef>
-          <a:fillRef idx="1">
-            <a:schemeClr val="accent1"/>
-          </a:fillRef>
-          <a:effectRef idx="0">
-            <a:schemeClr val="accent1"/>
-          </a:effectRef>
-          <a:fontRef idx="minor">
-            <a:schemeClr val="lt1"/>
-          </a:fontRef>
-        </p:style>
-        <p:txBody>
-          <a:bodyPr rtlCol="0" anchor="ctr"/>
-          <a:lstStyle/>
-          <a:p>
-            <a:pPr algn="ctr"/>
-            <a:endParaRPr kumimoji="1" lang="ja-JP" altLang="en-US"/>
-          </a:p>
-        </p:txBody>
-      </p:sp>
-      <p:sp>
-        <p:nvSpPr>
-          <p:cNvPr id="33" name="正方形/長方形 32">
-            <a:extLst>
-              <a:ext uri="{FF2B5EF4-FFF2-40B4-BE49-F238E27FC236}">
-                <a16:creationId xmlns:a16="http://schemas.microsoft.com/office/drawing/2014/main" id="{3039E549-2DC5-5F56-21E9-4EA7A0DFCCAB}"/>
-              </a:ext>
-            </a:extLst>
-          </p:cNvPr>
-          <p:cNvSpPr/>
-          <p:nvPr/>
-        </p:nvSpPr>
-        <p:spPr>
-          <a:xfrm>
-            <a:off x="8799491" y="4422882"/>
-            <a:ext cx="1320708" cy="1063867"/>
-          </a:xfrm>
-          <a:prstGeom prst="rect">
-            <a:avLst/>
-          </a:prstGeom>
-          <a:solidFill>
-            <a:schemeClr val="tx1">
-              <a:lumMod val="85000"/>
-              <a:lumOff val="15000"/>
-            </a:schemeClr>
-          </a:solidFill>
-          <a:ln w="76200">
-            <a:noFill/>
-          </a:ln>
-        </p:spPr>
-        <p:style>
-          <a:lnRef idx="2">
-            <a:schemeClr val="accent1">
-              <a:shade val="15000"/>
-            </a:schemeClr>
-          </a:lnRef>
-          <a:fillRef idx="1">
-            <a:schemeClr val="accent1"/>
-          </a:fillRef>
-          <a:effectRef idx="0">
-            <a:schemeClr val="accent1"/>
-          </a:effectRef>
-          <a:fontRef idx="minor">
-            <a:schemeClr val="lt1"/>
-          </a:fontRef>
-        </p:style>
-        <p:txBody>
-          <a:bodyPr rtlCol="0" anchor="ctr"/>
-          <a:lstStyle/>
-          <a:p>
-            <a:pPr algn="ctr"/>
-            <a:endParaRPr kumimoji="1" lang="ja-JP" altLang="en-US"/>
-          </a:p>
-        </p:txBody>
-      </p:sp>
-      <p:sp>
-        <p:nvSpPr>
-          <p:cNvPr id="35" name="正方形/長方形 34">
-            <a:extLst>
-              <a:ext uri="{FF2B5EF4-FFF2-40B4-BE49-F238E27FC236}">
-                <a16:creationId xmlns:a16="http://schemas.microsoft.com/office/drawing/2014/main" id="{7D9E07FB-B4A7-F86B-748A-D296691932BC}"/>
-              </a:ext>
-            </a:extLst>
-          </p:cNvPr>
-          <p:cNvSpPr/>
-          <p:nvPr/>
-        </p:nvSpPr>
-        <p:spPr>
-          <a:xfrm rot="18901224">
-            <a:off x="8299504" y="4752921"/>
-            <a:ext cx="799948" cy="422374"/>
-          </a:xfrm>
-          <a:prstGeom prst="rect">
-            <a:avLst/>
-          </a:prstGeom>
-          <a:solidFill>
-            <a:srgbClr val="FFFBEF"/>
-          </a:solidFill>
-          <a:ln w="76200">
-            <a:noFill/>
-          </a:ln>
-        </p:spPr>
-        <p:style>
-          <a:lnRef idx="2">
-            <a:schemeClr val="accent1">
-              <a:shade val="15000"/>
-            </a:schemeClr>
-          </a:lnRef>
-          <a:fillRef idx="1">
-            <a:schemeClr val="accent1"/>
-          </a:fillRef>
-          <a:effectRef idx="0">
-            <a:schemeClr val="accent1"/>
-          </a:effectRef>
-          <a:fontRef idx="minor">
-            <a:schemeClr val="lt1"/>
-          </a:fontRef>
-        </p:style>
-        <p:txBody>
-          <a:bodyPr rtlCol="0" anchor="ctr"/>
-          <a:lstStyle/>
-          <a:p>
-            <a:pPr algn="ctr"/>
-            <a:endParaRPr kumimoji="1" lang="ja-JP" altLang="en-US"/>
-          </a:p>
-        </p:txBody>
-      </p:sp>
-      <p:sp>
-        <p:nvSpPr>
-          <p:cNvPr id="36" name="正方形/長方形 35">
-            <a:extLst>
-              <a:ext uri="{FF2B5EF4-FFF2-40B4-BE49-F238E27FC236}">
-                <a16:creationId xmlns:a16="http://schemas.microsoft.com/office/drawing/2014/main" id="{7C28EADD-4F00-E2F6-B76A-BC3FCC9AE57F}"/>
-              </a:ext>
-            </a:extLst>
-          </p:cNvPr>
-          <p:cNvSpPr/>
-          <p:nvPr/>
-        </p:nvSpPr>
-        <p:spPr>
-          <a:xfrm>
-            <a:off x="8567680" y="4973633"/>
-            <a:ext cx="799948" cy="422374"/>
-          </a:xfrm>
-          <a:prstGeom prst="rect">
-            <a:avLst/>
-          </a:prstGeom>
-          <a:solidFill>
-            <a:srgbClr val="FFFBEF"/>
-          </a:solidFill>
-          <a:ln w="76200">
-            <a:noFill/>
-          </a:ln>
-        </p:spPr>
-        <p:style>
-          <a:lnRef idx="2">
-            <a:schemeClr val="accent1">
-              <a:shade val="15000"/>
-            </a:schemeClr>
-          </a:lnRef>
-          <a:fillRef idx="1">
-            <a:schemeClr val="accent1"/>
-          </a:fillRef>
-          <a:effectRef idx="0">
-            <a:schemeClr val="accent1"/>
-          </a:effectRef>
-          <a:fontRef idx="minor">
-            <a:schemeClr val="lt1"/>
-          </a:fontRef>
-        </p:style>
-        <p:txBody>
-          <a:bodyPr rtlCol="0" anchor="ctr"/>
-          <a:lstStyle/>
-          <a:p>
-            <a:pPr algn="ctr"/>
-            <a:endParaRPr kumimoji="1" lang="ja-JP" altLang="en-US"/>
-          </a:p>
-        </p:txBody>
-      </p:sp>
-      <p:sp>
-        <p:nvSpPr>
-          <p:cNvPr id="37" name="正方形/長方形 36">
-            <a:extLst>
-              <a:ext uri="{FF2B5EF4-FFF2-40B4-BE49-F238E27FC236}">
-                <a16:creationId xmlns:a16="http://schemas.microsoft.com/office/drawing/2014/main" id="{61223690-0F2C-3B98-BA94-81D5611C9A1A}"/>
-              </a:ext>
-            </a:extLst>
-          </p:cNvPr>
-          <p:cNvSpPr/>
-          <p:nvPr/>
-        </p:nvSpPr>
-        <p:spPr>
-          <a:xfrm>
-            <a:off x="8830276" y="4534009"/>
-            <a:ext cx="1284843" cy="861998"/>
-          </a:xfrm>
-          <a:prstGeom prst="rect">
-            <a:avLst/>
-          </a:prstGeom>
-          <a:solidFill>
-            <a:srgbClr val="FFFBEF"/>
-          </a:solidFill>
-          <a:ln w="76200">
-            <a:noFill/>
-          </a:ln>
-        </p:spPr>
-        <p:style>
-          <a:lnRef idx="2">
-            <a:schemeClr val="accent1">
-              <a:shade val="15000"/>
-            </a:schemeClr>
-          </a:lnRef>
-          <a:fillRef idx="1">
-            <a:schemeClr val="accent1"/>
-          </a:fillRef>
-          <a:effectRef idx="0">
-            <a:schemeClr val="accent1"/>
-          </a:effectRef>
-          <a:fontRef idx="minor">
-            <a:schemeClr val="lt1"/>
-          </a:fontRef>
-        </p:style>
-        <p:txBody>
-          <a:bodyPr rtlCol="0" anchor="ctr"/>
-          <a:lstStyle/>
-          <a:p>
-            <a:pPr algn="ctr"/>
-            <a:endParaRPr kumimoji="1" lang="ja-JP" altLang="en-US"/>
-          </a:p>
-        </p:txBody>
-      </p:sp>
-      <p:sp>
-        <p:nvSpPr>
-          <p:cNvPr id="38" name="正方形/長方形 37">
-            <a:extLst>
-              <a:ext uri="{FF2B5EF4-FFF2-40B4-BE49-F238E27FC236}">
-                <a16:creationId xmlns:a16="http://schemas.microsoft.com/office/drawing/2014/main" id="{5E2A70D6-9E96-38B1-CF4E-8F777B5351DA}"/>
-              </a:ext>
-            </a:extLst>
-          </p:cNvPr>
-          <p:cNvSpPr/>
-          <p:nvPr/>
-        </p:nvSpPr>
-        <p:spPr>
-          <a:xfrm rot="18901224">
-            <a:off x="8348830" y="4798877"/>
-            <a:ext cx="718963" cy="330798"/>
-          </a:xfrm>
-          <a:prstGeom prst="rect">
-            <a:avLst/>
-          </a:prstGeom>
-          <a:solidFill>
-            <a:srgbClr val="A2A2A2"/>
-          </a:solidFill>
-          <a:ln w="76200">
-            <a:noFill/>
-          </a:ln>
-        </p:spPr>
-        <p:style>
-          <a:lnRef idx="2">
-            <a:schemeClr val="accent1">
-              <a:shade val="15000"/>
-            </a:schemeClr>
-          </a:lnRef>
-          <a:fillRef idx="1">
-            <a:schemeClr val="accent1"/>
-          </a:fillRef>
-          <a:effectRef idx="0">
-            <a:schemeClr val="accent1"/>
-          </a:effectRef>
-          <a:fontRef idx="minor">
-            <a:schemeClr val="lt1"/>
-          </a:fontRef>
-        </p:style>
-        <p:txBody>
-          <a:bodyPr rtlCol="0" anchor="ctr"/>
-          <a:lstStyle/>
-          <a:p>
-            <a:pPr algn="ctr"/>
-            <a:endParaRPr kumimoji="1" lang="ja-JP" altLang="en-US"/>
-          </a:p>
-        </p:txBody>
-      </p:sp>
-      <p:sp>
-        <p:nvSpPr>
-          <p:cNvPr id="39" name="正方形/長方形 38">
-            <a:extLst>
-              <a:ext uri="{FF2B5EF4-FFF2-40B4-BE49-F238E27FC236}">
-                <a16:creationId xmlns:a16="http://schemas.microsoft.com/office/drawing/2014/main" id="{A70A4889-E778-B419-89A4-9F6164118375}"/>
-              </a:ext>
-            </a:extLst>
-          </p:cNvPr>
-          <p:cNvSpPr/>
-          <p:nvPr/>
-        </p:nvSpPr>
-        <p:spPr>
-          <a:xfrm>
-            <a:off x="8574286" y="5005276"/>
-            <a:ext cx="288261" cy="330798"/>
-          </a:xfrm>
-          <a:prstGeom prst="rect">
-            <a:avLst/>
-          </a:prstGeom>
-          <a:solidFill>
-            <a:srgbClr val="A2A2A2"/>
-          </a:solidFill>
-          <a:ln w="76200">
-            <a:noFill/>
-          </a:ln>
-        </p:spPr>
-        <p:style>
-          <a:lnRef idx="2">
-            <a:schemeClr val="accent1">
-              <a:shade val="15000"/>
-            </a:schemeClr>
-          </a:lnRef>
-          <a:fillRef idx="1">
-            <a:schemeClr val="accent1"/>
-          </a:fillRef>
-          <a:effectRef idx="0">
-            <a:schemeClr val="accent1"/>
-          </a:effectRef>
-          <a:fontRef idx="minor">
-            <a:schemeClr val="lt1"/>
-          </a:fontRef>
-        </p:style>
-        <p:txBody>
-          <a:bodyPr rtlCol="0" anchor="ctr"/>
-          <a:lstStyle/>
-          <a:p>
-            <a:pPr algn="ctr"/>
-            <a:endParaRPr kumimoji="1" lang="ja-JP" altLang="en-US"/>
-          </a:p>
-        </p:txBody>
-      </p:sp>
-      <p:sp>
-        <p:nvSpPr>
-          <p:cNvPr id="40" name="正方形/長方形 39">
-            <a:extLst>
-              <a:ext uri="{FF2B5EF4-FFF2-40B4-BE49-F238E27FC236}">
-                <a16:creationId xmlns:a16="http://schemas.microsoft.com/office/drawing/2014/main" id="{39AD00BD-32F9-C490-C6D8-29AB0CEFB836}"/>
-              </a:ext>
-            </a:extLst>
-          </p:cNvPr>
-          <p:cNvSpPr/>
-          <p:nvPr/>
-        </p:nvSpPr>
-        <p:spPr>
-          <a:xfrm>
-            <a:off x="8847578" y="4593437"/>
-            <a:ext cx="1271061" cy="741937"/>
-          </a:xfrm>
-          <a:prstGeom prst="rect">
-            <a:avLst/>
-          </a:prstGeom>
-          <a:solidFill>
-            <a:srgbClr val="A2A2A2"/>
-          </a:solidFill>
-          <a:ln w="76200">
-            <a:noFill/>
-          </a:ln>
-        </p:spPr>
-        <p:style>
-          <a:lnRef idx="2">
-            <a:schemeClr val="accent1">
-              <a:shade val="15000"/>
-            </a:schemeClr>
-          </a:lnRef>
-          <a:fillRef idx="1">
-            <a:schemeClr val="accent1"/>
-          </a:fillRef>
-          <a:effectRef idx="0">
-            <a:schemeClr val="accent1"/>
-          </a:effectRef>
-          <a:fontRef idx="minor">
-            <a:schemeClr val="lt1"/>
-          </a:fontRef>
-        </p:style>
-        <p:txBody>
-          <a:bodyPr rtlCol="0" anchor="ctr"/>
-          <a:lstStyle/>
-          <a:p>
-            <a:pPr algn="ctr"/>
-            <a:endParaRPr kumimoji="1" lang="ja-JP" altLang="en-US"/>
-          </a:p>
-        </p:txBody>
-      </p:sp>
-    </p:spTree>
-    <p:extLst>
-      <p:ext uri="{BB962C8B-B14F-4D97-AF65-F5344CB8AC3E}">
-        <p14:creationId xmlns:p14="http://schemas.microsoft.com/office/powerpoint/2010/main" val="1979770857"/>
+        <p14:creationId xmlns:p14="http://schemas.microsoft.com/office/powerpoint/2010/main" val="4253894079"/>
       </p:ext>
     </p:extLst>
   </p:cSld>
@@ -8871,6 +7581,2800 @@
           <a:chExt cx="0" cy="0"/>
         </a:xfrm>
       </p:grpSpPr>
+      <p:pic>
+        <p:nvPicPr>
+          <p:cNvPr id="1026" name="Picture 2">
+            <a:extLst>
+              <a:ext uri="{FF2B5EF4-FFF2-40B4-BE49-F238E27FC236}">
+                <a16:creationId xmlns:a16="http://schemas.microsoft.com/office/drawing/2014/main" id="{EC06FEAD-DBE2-0DA3-B00B-0EC0D18EB1AE}"/>
+              </a:ext>
+            </a:extLst>
+          </p:cNvPr>
+          <p:cNvPicPr>
+            <a:picLocks noChangeAspect="1" noChangeArrowheads="1"/>
+          </p:cNvPicPr>
+          <p:nvPr/>
+        </p:nvPicPr>
+        <p:blipFill rotWithShape="1">
+          <a:blip r:embed="rId2">
+            <a:extLst>
+              <a:ext uri="{28A0092B-C50C-407E-A947-70E740481C1C}">
+                <a14:useLocalDpi xmlns:a14="http://schemas.microsoft.com/office/drawing/2010/main" val="0"/>
+              </a:ext>
+            </a:extLst>
+          </a:blip>
+          <a:srcRect r="93200" b="82705"/>
+          <a:stretch/>
+        </p:blipFill>
+        <p:spPr bwMode="auto">
+          <a:xfrm>
+            <a:off x="685800" y="337740"/>
+            <a:ext cx="5283156" cy="3023347"/>
+          </a:xfrm>
+          <a:prstGeom prst="rect">
+            <a:avLst/>
+          </a:prstGeom>
+          <a:noFill/>
+          <a:extLst>
+            <a:ext uri="{909E8E84-426E-40DD-AFC4-6F175D3DCCD1}">
+              <a14:hiddenFill xmlns:a14="http://schemas.microsoft.com/office/drawing/2010/main">
+                <a:solidFill>
+                  <a:srgbClr val="FFFFFF"/>
+                </a:solidFill>
+              </a14:hiddenFill>
+            </a:ext>
+          </a:extLst>
+        </p:spPr>
+      </p:pic>
+      <p:sp>
+        <p:nvSpPr>
+          <p:cNvPr id="8" name="正方形/長方形 7">
+            <a:extLst>
+              <a:ext uri="{FF2B5EF4-FFF2-40B4-BE49-F238E27FC236}">
+                <a16:creationId xmlns:a16="http://schemas.microsoft.com/office/drawing/2014/main" id="{7C0FBB3A-872F-5FB9-C2DE-5DE93E840B09}"/>
+              </a:ext>
+            </a:extLst>
+          </p:cNvPr>
+          <p:cNvSpPr/>
+          <p:nvPr/>
+        </p:nvSpPr>
+        <p:spPr>
+          <a:xfrm>
+            <a:off x="1788252" y="4201160"/>
+            <a:ext cx="711015" cy="1493520"/>
+          </a:xfrm>
+          <a:prstGeom prst="rect">
+            <a:avLst/>
+          </a:prstGeom>
+          <a:solidFill>
+            <a:schemeClr val="tx1">
+              <a:lumMod val="85000"/>
+              <a:lumOff val="15000"/>
+            </a:schemeClr>
+          </a:solidFill>
+          <a:ln w="76200">
+            <a:noFill/>
+          </a:ln>
+        </p:spPr>
+        <p:style>
+          <a:lnRef idx="2">
+            <a:schemeClr val="accent1">
+              <a:shade val="15000"/>
+            </a:schemeClr>
+          </a:lnRef>
+          <a:fillRef idx="1">
+            <a:schemeClr val="accent1"/>
+          </a:fillRef>
+          <a:effectRef idx="0">
+            <a:schemeClr val="accent1"/>
+          </a:effectRef>
+          <a:fontRef idx="minor">
+            <a:schemeClr val="lt1"/>
+          </a:fontRef>
+        </p:style>
+        <p:txBody>
+          <a:bodyPr rtlCol="0" anchor="ctr"/>
+          <a:lstStyle/>
+          <a:p>
+            <a:pPr algn="ctr"/>
+            <a:endParaRPr kumimoji="1" lang="ja-JP" altLang="en-US"/>
+          </a:p>
+        </p:txBody>
+      </p:sp>
+      <p:sp>
+        <p:nvSpPr>
+          <p:cNvPr id="9" name="正方形/長方形 8">
+            <a:extLst>
+              <a:ext uri="{FF2B5EF4-FFF2-40B4-BE49-F238E27FC236}">
+                <a16:creationId xmlns:a16="http://schemas.microsoft.com/office/drawing/2014/main" id="{E1222F43-AEE1-59F3-72B8-5E4E453FC9BE}"/>
+              </a:ext>
+            </a:extLst>
+          </p:cNvPr>
+          <p:cNvSpPr/>
+          <p:nvPr/>
+        </p:nvSpPr>
+        <p:spPr>
+          <a:xfrm rot="19009696">
+            <a:off x="2484692" y="4209577"/>
+            <a:ext cx="563798" cy="1362832"/>
+          </a:xfrm>
+          <a:prstGeom prst="rect">
+            <a:avLst/>
+          </a:prstGeom>
+          <a:solidFill>
+            <a:schemeClr val="tx1">
+              <a:lumMod val="85000"/>
+              <a:lumOff val="15000"/>
+            </a:schemeClr>
+          </a:solidFill>
+          <a:ln w="76200">
+            <a:noFill/>
+          </a:ln>
+        </p:spPr>
+        <p:style>
+          <a:lnRef idx="2">
+            <a:schemeClr val="accent1">
+              <a:shade val="15000"/>
+            </a:schemeClr>
+          </a:lnRef>
+          <a:fillRef idx="1">
+            <a:schemeClr val="accent1"/>
+          </a:fillRef>
+          <a:effectRef idx="0">
+            <a:schemeClr val="accent1"/>
+          </a:effectRef>
+          <a:fontRef idx="minor">
+            <a:schemeClr val="lt1"/>
+          </a:fontRef>
+        </p:style>
+        <p:txBody>
+          <a:bodyPr rtlCol="0" anchor="ctr"/>
+          <a:lstStyle/>
+          <a:p>
+            <a:pPr algn="ctr"/>
+            <a:endParaRPr kumimoji="1" lang="ja-JP" altLang="en-US"/>
+          </a:p>
+        </p:txBody>
+      </p:sp>
+      <p:sp>
+        <p:nvSpPr>
+          <p:cNvPr id="10" name="正方形/長方形 9">
+            <a:extLst>
+              <a:ext uri="{FF2B5EF4-FFF2-40B4-BE49-F238E27FC236}">
+                <a16:creationId xmlns:a16="http://schemas.microsoft.com/office/drawing/2014/main" id="{85E48061-AEBF-35F0-80C2-75997441D1F0}"/>
+              </a:ext>
+            </a:extLst>
+          </p:cNvPr>
+          <p:cNvSpPr/>
+          <p:nvPr/>
+        </p:nvSpPr>
+        <p:spPr>
+          <a:xfrm rot="18963577">
+            <a:off x="2789931" y="5315221"/>
+            <a:ext cx="702373" cy="156555"/>
+          </a:xfrm>
+          <a:prstGeom prst="rect">
+            <a:avLst/>
+          </a:prstGeom>
+          <a:solidFill>
+            <a:schemeClr val="tx1">
+              <a:lumMod val="85000"/>
+              <a:lumOff val="15000"/>
+            </a:schemeClr>
+          </a:solidFill>
+          <a:ln w="76200">
+            <a:noFill/>
+          </a:ln>
+        </p:spPr>
+        <p:style>
+          <a:lnRef idx="2">
+            <a:schemeClr val="accent1">
+              <a:shade val="15000"/>
+            </a:schemeClr>
+          </a:lnRef>
+          <a:fillRef idx="1">
+            <a:schemeClr val="accent1"/>
+          </a:fillRef>
+          <a:effectRef idx="0">
+            <a:schemeClr val="accent1"/>
+          </a:effectRef>
+          <a:fontRef idx="minor">
+            <a:schemeClr val="lt1"/>
+          </a:fontRef>
+        </p:style>
+        <p:txBody>
+          <a:bodyPr rtlCol="0" anchor="ctr"/>
+          <a:lstStyle/>
+          <a:p>
+            <a:pPr algn="ctr"/>
+            <a:endParaRPr kumimoji="1" lang="ja-JP" altLang="en-US"/>
+          </a:p>
+        </p:txBody>
+      </p:sp>
+      <p:sp>
+        <p:nvSpPr>
+          <p:cNvPr id="11" name="正方形/長方形 10">
+            <a:extLst>
+              <a:ext uri="{FF2B5EF4-FFF2-40B4-BE49-F238E27FC236}">
+                <a16:creationId xmlns:a16="http://schemas.microsoft.com/office/drawing/2014/main" id="{FB066628-7339-1E89-BF12-98B32DB91DB6}"/>
+              </a:ext>
+            </a:extLst>
+          </p:cNvPr>
+          <p:cNvSpPr/>
+          <p:nvPr/>
+        </p:nvSpPr>
+        <p:spPr>
+          <a:xfrm rot="18963577">
+            <a:off x="4835211" y="5068607"/>
+            <a:ext cx="563798" cy="137102"/>
+          </a:xfrm>
+          <a:prstGeom prst="rect">
+            <a:avLst/>
+          </a:prstGeom>
+          <a:solidFill>
+            <a:schemeClr val="tx1">
+              <a:lumMod val="85000"/>
+              <a:lumOff val="15000"/>
+            </a:schemeClr>
+          </a:solidFill>
+          <a:ln w="76200">
+            <a:noFill/>
+          </a:ln>
+        </p:spPr>
+        <p:style>
+          <a:lnRef idx="2">
+            <a:schemeClr val="accent1">
+              <a:shade val="15000"/>
+            </a:schemeClr>
+          </a:lnRef>
+          <a:fillRef idx="1">
+            <a:schemeClr val="accent1"/>
+          </a:fillRef>
+          <a:effectRef idx="0">
+            <a:schemeClr val="accent1"/>
+          </a:effectRef>
+          <a:fontRef idx="minor">
+            <a:schemeClr val="lt1"/>
+          </a:fontRef>
+        </p:style>
+        <p:txBody>
+          <a:bodyPr rtlCol="0" anchor="ctr"/>
+          <a:lstStyle/>
+          <a:p>
+            <a:pPr algn="ctr"/>
+            <a:endParaRPr kumimoji="1" lang="ja-JP" altLang="en-US"/>
+          </a:p>
+        </p:txBody>
+      </p:sp>
+      <p:sp>
+        <p:nvSpPr>
+          <p:cNvPr id="12" name="正方形/長方形 11">
+            <a:extLst>
+              <a:ext uri="{FF2B5EF4-FFF2-40B4-BE49-F238E27FC236}">
+                <a16:creationId xmlns:a16="http://schemas.microsoft.com/office/drawing/2014/main" id="{4CDC590F-A564-9573-68AA-CEEB2696A67D}"/>
+              </a:ext>
+            </a:extLst>
+          </p:cNvPr>
+          <p:cNvSpPr/>
+          <p:nvPr/>
+        </p:nvSpPr>
+        <p:spPr>
+          <a:xfrm rot="19009696">
+            <a:off x="5133123" y="4962478"/>
+            <a:ext cx="563798" cy="1018267"/>
+          </a:xfrm>
+          <a:prstGeom prst="rect">
+            <a:avLst/>
+          </a:prstGeom>
+          <a:solidFill>
+            <a:schemeClr val="tx1">
+              <a:lumMod val="85000"/>
+              <a:lumOff val="15000"/>
+            </a:schemeClr>
+          </a:solidFill>
+          <a:ln w="76200">
+            <a:noFill/>
+          </a:ln>
+        </p:spPr>
+        <p:style>
+          <a:lnRef idx="2">
+            <a:schemeClr val="accent1">
+              <a:shade val="15000"/>
+            </a:schemeClr>
+          </a:lnRef>
+          <a:fillRef idx="1">
+            <a:schemeClr val="accent1"/>
+          </a:fillRef>
+          <a:effectRef idx="0">
+            <a:schemeClr val="accent1"/>
+          </a:effectRef>
+          <a:fontRef idx="minor">
+            <a:schemeClr val="lt1"/>
+          </a:fontRef>
+        </p:style>
+        <p:txBody>
+          <a:bodyPr rtlCol="0" anchor="ctr"/>
+          <a:lstStyle/>
+          <a:p>
+            <a:pPr algn="ctr"/>
+            <a:endParaRPr kumimoji="1" lang="ja-JP" altLang="en-US"/>
+          </a:p>
+        </p:txBody>
+      </p:sp>
+      <p:sp>
+        <p:nvSpPr>
+          <p:cNvPr id="13" name="正方形/長方形 12">
+            <a:extLst>
+              <a:ext uri="{FF2B5EF4-FFF2-40B4-BE49-F238E27FC236}">
+                <a16:creationId xmlns:a16="http://schemas.microsoft.com/office/drawing/2014/main" id="{2477B32E-8088-8865-1B60-BE3C450D1F88}"/>
+              </a:ext>
+            </a:extLst>
+          </p:cNvPr>
+          <p:cNvSpPr/>
+          <p:nvPr/>
+        </p:nvSpPr>
+        <p:spPr>
+          <a:xfrm>
+            <a:off x="2198484" y="4935220"/>
+            <a:ext cx="739140" cy="758335"/>
+          </a:xfrm>
+          <a:prstGeom prst="rect">
+            <a:avLst/>
+          </a:prstGeom>
+          <a:solidFill>
+            <a:schemeClr val="tx1">
+              <a:lumMod val="85000"/>
+              <a:lumOff val="15000"/>
+            </a:schemeClr>
+          </a:solidFill>
+          <a:ln w="76200">
+            <a:noFill/>
+          </a:ln>
+        </p:spPr>
+        <p:style>
+          <a:lnRef idx="2">
+            <a:schemeClr val="accent1">
+              <a:shade val="15000"/>
+            </a:schemeClr>
+          </a:lnRef>
+          <a:fillRef idx="1">
+            <a:schemeClr val="accent1"/>
+          </a:fillRef>
+          <a:effectRef idx="0">
+            <a:schemeClr val="accent1"/>
+          </a:effectRef>
+          <a:fontRef idx="minor">
+            <a:schemeClr val="lt1"/>
+          </a:fontRef>
+        </p:style>
+        <p:txBody>
+          <a:bodyPr rtlCol="0" anchor="ctr"/>
+          <a:lstStyle/>
+          <a:p>
+            <a:pPr algn="ctr"/>
+            <a:endParaRPr kumimoji="1" lang="ja-JP" altLang="en-US"/>
+          </a:p>
+        </p:txBody>
+      </p:sp>
+      <p:sp>
+        <p:nvSpPr>
+          <p:cNvPr id="14" name="正方形/長方形 13">
+            <a:extLst>
+              <a:ext uri="{FF2B5EF4-FFF2-40B4-BE49-F238E27FC236}">
+                <a16:creationId xmlns:a16="http://schemas.microsoft.com/office/drawing/2014/main" id="{C7FD822B-A26B-5AB5-D283-649E04506633}"/>
+              </a:ext>
+            </a:extLst>
+          </p:cNvPr>
+          <p:cNvSpPr/>
+          <p:nvPr/>
+        </p:nvSpPr>
+        <p:spPr>
+          <a:xfrm>
+            <a:off x="5553322" y="4892184"/>
+            <a:ext cx="1220858" cy="1141710"/>
+          </a:xfrm>
+          <a:prstGeom prst="rect">
+            <a:avLst/>
+          </a:prstGeom>
+          <a:solidFill>
+            <a:schemeClr val="tx1">
+              <a:lumMod val="85000"/>
+              <a:lumOff val="15000"/>
+            </a:schemeClr>
+          </a:solidFill>
+          <a:ln w="76200">
+            <a:noFill/>
+          </a:ln>
+        </p:spPr>
+        <p:style>
+          <a:lnRef idx="2">
+            <a:schemeClr val="accent1">
+              <a:shade val="15000"/>
+            </a:schemeClr>
+          </a:lnRef>
+          <a:fillRef idx="1">
+            <a:schemeClr val="accent1"/>
+          </a:fillRef>
+          <a:effectRef idx="0">
+            <a:schemeClr val="accent1"/>
+          </a:effectRef>
+          <a:fontRef idx="minor">
+            <a:schemeClr val="lt1"/>
+          </a:fontRef>
+        </p:style>
+        <p:txBody>
+          <a:bodyPr rtlCol="0" anchor="ctr"/>
+          <a:lstStyle/>
+          <a:p>
+            <a:pPr algn="ctr"/>
+            <a:endParaRPr kumimoji="1" lang="ja-JP" altLang="en-US"/>
+          </a:p>
+        </p:txBody>
+      </p:sp>
+      <p:sp>
+        <p:nvSpPr>
+          <p:cNvPr id="15" name="正方形/長方形 14">
+            <a:extLst>
+              <a:ext uri="{FF2B5EF4-FFF2-40B4-BE49-F238E27FC236}">
+                <a16:creationId xmlns:a16="http://schemas.microsoft.com/office/drawing/2014/main" id="{2477DA41-27BF-A757-9169-CF5B215CC353}"/>
+              </a:ext>
+            </a:extLst>
+          </p:cNvPr>
+          <p:cNvSpPr/>
+          <p:nvPr/>
+        </p:nvSpPr>
+        <p:spPr>
+          <a:xfrm>
+            <a:off x="5263700" y="4893417"/>
+            <a:ext cx="1107868" cy="400050"/>
+          </a:xfrm>
+          <a:prstGeom prst="rect">
+            <a:avLst/>
+          </a:prstGeom>
+          <a:solidFill>
+            <a:schemeClr val="tx1">
+              <a:lumMod val="85000"/>
+              <a:lumOff val="15000"/>
+            </a:schemeClr>
+          </a:solidFill>
+          <a:ln w="76200">
+            <a:noFill/>
+          </a:ln>
+        </p:spPr>
+        <p:style>
+          <a:lnRef idx="2">
+            <a:schemeClr val="accent1">
+              <a:shade val="15000"/>
+            </a:schemeClr>
+          </a:lnRef>
+          <a:fillRef idx="1">
+            <a:schemeClr val="accent1"/>
+          </a:fillRef>
+          <a:effectRef idx="0">
+            <a:schemeClr val="accent1"/>
+          </a:effectRef>
+          <a:fontRef idx="minor">
+            <a:schemeClr val="lt1"/>
+          </a:fontRef>
+        </p:style>
+        <p:txBody>
+          <a:bodyPr rtlCol="0" anchor="ctr"/>
+          <a:lstStyle/>
+          <a:p>
+            <a:pPr algn="ctr"/>
+            <a:endParaRPr kumimoji="1" lang="ja-JP" altLang="en-US"/>
+          </a:p>
+        </p:txBody>
+      </p:sp>
+      <p:sp>
+        <p:nvSpPr>
+          <p:cNvPr id="5" name="正方形/長方形 4">
+            <a:extLst>
+              <a:ext uri="{FF2B5EF4-FFF2-40B4-BE49-F238E27FC236}">
+                <a16:creationId xmlns:a16="http://schemas.microsoft.com/office/drawing/2014/main" id="{394DCDCC-7F17-F942-800A-DA8ED36DF939}"/>
+              </a:ext>
+            </a:extLst>
+          </p:cNvPr>
+          <p:cNvSpPr/>
+          <p:nvPr/>
+        </p:nvSpPr>
+        <p:spPr>
+          <a:xfrm>
+            <a:off x="1784591" y="4315911"/>
+            <a:ext cx="704762" cy="1264915"/>
+          </a:xfrm>
+          <a:prstGeom prst="rect">
+            <a:avLst/>
+          </a:prstGeom>
+          <a:solidFill>
+            <a:srgbClr val="FFFBEF"/>
+          </a:solidFill>
+          <a:ln w="76200">
+            <a:noFill/>
+          </a:ln>
+        </p:spPr>
+        <p:style>
+          <a:lnRef idx="2">
+            <a:schemeClr val="accent1">
+              <a:shade val="15000"/>
+            </a:schemeClr>
+          </a:lnRef>
+          <a:fillRef idx="1">
+            <a:schemeClr val="accent1"/>
+          </a:fillRef>
+          <a:effectRef idx="0">
+            <a:schemeClr val="accent1"/>
+          </a:effectRef>
+          <a:fontRef idx="minor">
+            <a:schemeClr val="lt1"/>
+          </a:fontRef>
+        </p:style>
+        <p:txBody>
+          <a:bodyPr rtlCol="0" anchor="ctr"/>
+          <a:lstStyle/>
+          <a:p>
+            <a:pPr algn="ctr"/>
+            <a:endParaRPr kumimoji="1" lang="ja-JP" altLang="en-US"/>
+          </a:p>
+        </p:txBody>
+      </p:sp>
+      <p:sp>
+        <p:nvSpPr>
+          <p:cNvPr id="16" name="正方形/長方形 15">
+            <a:extLst>
+              <a:ext uri="{FF2B5EF4-FFF2-40B4-BE49-F238E27FC236}">
+                <a16:creationId xmlns:a16="http://schemas.microsoft.com/office/drawing/2014/main" id="{7D625363-D17E-8D3C-70EF-E0E4BF841A81}"/>
+              </a:ext>
+            </a:extLst>
+          </p:cNvPr>
+          <p:cNvSpPr/>
+          <p:nvPr/>
+        </p:nvSpPr>
+        <p:spPr>
+          <a:xfrm rot="19040282">
+            <a:off x="2595154" y="4265759"/>
+            <a:ext cx="342872" cy="1218658"/>
+          </a:xfrm>
+          <a:prstGeom prst="rect">
+            <a:avLst/>
+          </a:prstGeom>
+          <a:solidFill>
+            <a:srgbClr val="FFFBEF"/>
+          </a:solidFill>
+          <a:ln w="76200">
+            <a:noFill/>
+          </a:ln>
+        </p:spPr>
+        <p:style>
+          <a:lnRef idx="2">
+            <a:schemeClr val="accent1">
+              <a:shade val="15000"/>
+            </a:schemeClr>
+          </a:lnRef>
+          <a:fillRef idx="1">
+            <a:schemeClr val="accent1"/>
+          </a:fillRef>
+          <a:effectRef idx="0">
+            <a:schemeClr val="accent1"/>
+          </a:effectRef>
+          <a:fontRef idx="minor">
+            <a:schemeClr val="lt1"/>
+          </a:fontRef>
+        </p:style>
+        <p:txBody>
+          <a:bodyPr rtlCol="0" anchor="ctr"/>
+          <a:lstStyle/>
+          <a:p>
+            <a:pPr algn="ctr"/>
+            <a:endParaRPr kumimoji="1" lang="ja-JP" altLang="en-US"/>
+          </a:p>
+        </p:txBody>
+      </p:sp>
+      <p:sp>
+        <p:nvSpPr>
+          <p:cNvPr id="17" name="正方形/長方形 16">
+            <a:extLst>
+              <a:ext uri="{FF2B5EF4-FFF2-40B4-BE49-F238E27FC236}">
+                <a16:creationId xmlns:a16="http://schemas.microsoft.com/office/drawing/2014/main" id="{E1F3FC0F-29FC-20C0-1395-6950FADCB691}"/>
+              </a:ext>
+            </a:extLst>
+          </p:cNvPr>
+          <p:cNvSpPr/>
+          <p:nvPr/>
+        </p:nvSpPr>
+        <p:spPr>
+          <a:xfrm rot="2672381">
+            <a:off x="2819611" y="5027349"/>
+            <a:ext cx="342872" cy="503317"/>
+          </a:xfrm>
+          <a:prstGeom prst="rect">
+            <a:avLst/>
+          </a:prstGeom>
+          <a:solidFill>
+            <a:srgbClr val="FFFBEF"/>
+          </a:solidFill>
+          <a:ln w="76200">
+            <a:noFill/>
+          </a:ln>
+        </p:spPr>
+        <p:style>
+          <a:lnRef idx="2">
+            <a:schemeClr val="accent1">
+              <a:shade val="15000"/>
+            </a:schemeClr>
+          </a:lnRef>
+          <a:fillRef idx="1">
+            <a:schemeClr val="accent1"/>
+          </a:fillRef>
+          <a:effectRef idx="0">
+            <a:schemeClr val="accent1"/>
+          </a:effectRef>
+          <a:fontRef idx="minor">
+            <a:schemeClr val="lt1"/>
+          </a:fontRef>
+        </p:style>
+        <p:txBody>
+          <a:bodyPr rtlCol="0" anchor="ctr"/>
+          <a:lstStyle/>
+          <a:p>
+            <a:pPr algn="ctr"/>
+            <a:endParaRPr kumimoji="1" lang="ja-JP" altLang="en-US"/>
+          </a:p>
+        </p:txBody>
+      </p:sp>
+      <p:sp>
+        <p:nvSpPr>
+          <p:cNvPr id="18" name="正方形/長方形 17">
+            <a:extLst>
+              <a:ext uri="{FF2B5EF4-FFF2-40B4-BE49-F238E27FC236}">
+                <a16:creationId xmlns:a16="http://schemas.microsoft.com/office/drawing/2014/main" id="{2FA911A8-DD6A-5FA7-A9F6-0518D8C9F1F6}"/>
+              </a:ext>
+            </a:extLst>
+          </p:cNvPr>
+          <p:cNvSpPr/>
+          <p:nvPr/>
+        </p:nvSpPr>
+        <p:spPr>
+          <a:xfrm>
+            <a:off x="2217683" y="5092317"/>
+            <a:ext cx="716280" cy="489072"/>
+          </a:xfrm>
+          <a:prstGeom prst="rect">
+            <a:avLst/>
+          </a:prstGeom>
+          <a:solidFill>
+            <a:srgbClr val="FFFBEF"/>
+          </a:solidFill>
+          <a:ln w="76200">
+            <a:noFill/>
+          </a:ln>
+        </p:spPr>
+        <p:style>
+          <a:lnRef idx="2">
+            <a:schemeClr val="accent1">
+              <a:shade val="15000"/>
+            </a:schemeClr>
+          </a:lnRef>
+          <a:fillRef idx="1">
+            <a:schemeClr val="accent1"/>
+          </a:fillRef>
+          <a:effectRef idx="0">
+            <a:schemeClr val="accent1"/>
+          </a:effectRef>
+          <a:fontRef idx="minor">
+            <a:schemeClr val="lt1"/>
+          </a:fontRef>
+        </p:style>
+        <p:txBody>
+          <a:bodyPr rtlCol="0" anchor="ctr"/>
+          <a:lstStyle/>
+          <a:p>
+            <a:pPr algn="ctr"/>
+            <a:endParaRPr lang="ja-JP" altLang="en-US"/>
+          </a:p>
+        </p:txBody>
+      </p:sp>
+      <p:sp>
+        <p:nvSpPr>
+          <p:cNvPr id="19" name="正方形/長方形 18">
+            <a:extLst>
+              <a:ext uri="{FF2B5EF4-FFF2-40B4-BE49-F238E27FC236}">
+                <a16:creationId xmlns:a16="http://schemas.microsoft.com/office/drawing/2014/main" id="{EB79EA34-ED8A-B15E-A8B8-B809E483F9CF}"/>
+              </a:ext>
+            </a:extLst>
+          </p:cNvPr>
+          <p:cNvSpPr/>
+          <p:nvPr/>
+        </p:nvSpPr>
+        <p:spPr>
+          <a:xfrm>
+            <a:off x="2390118" y="4807241"/>
+            <a:ext cx="360702" cy="328037"/>
+          </a:xfrm>
+          <a:prstGeom prst="rect">
+            <a:avLst/>
+          </a:prstGeom>
+          <a:solidFill>
+            <a:srgbClr val="FFFBEF"/>
+          </a:solidFill>
+          <a:ln w="76200">
+            <a:noFill/>
+          </a:ln>
+        </p:spPr>
+        <p:style>
+          <a:lnRef idx="2">
+            <a:schemeClr val="accent1">
+              <a:shade val="15000"/>
+            </a:schemeClr>
+          </a:lnRef>
+          <a:fillRef idx="1">
+            <a:schemeClr val="accent1"/>
+          </a:fillRef>
+          <a:effectRef idx="0">
+            <a:schemeClr val="accent1"/>
+          </a:effectRef>
+          <a:fontRef idx="minor">
+            <a:schemeClr val="lt1"/>
+          </a:fontRef>
+        </p:style>
+        <p:txBody>
+          <a:bodyPr rtlCol="0" anchor="ctr"/>
+          <a:lstStyle/>
+          <a:p>
+            <a:pPr algn="ctr"/>
+            <a:endParaRPr lang="ja-JP" altLang="en-US"/>
+          </a:p>
+        </p:txBody>
+      </p:sp>
+      <p:sp>
+        <p:nvSpPr>
+          <p:cNvPr id="21" name="正方形/長方形 20">
+            <a:extLst>
+              <a:ext uri="{FF2B5EF4-FFF2-40B4-BE49-F238E27FC236}">
+                <a16:creationId xmlns:a16="http://schemas.microsoft.com/office/drawing/2014/main" id="{84397B20-4D4A-D1A3-2294-4BA38D25FAB6}"/>
+              </a:ext>
+            </a:extLst>
+          </p:cNvPr>
+          <p:cNvSpPr/>
+          <p:nvPr/>
+        </p:nvSpPr>
+        <p:spPr>
+          <a:xfrm>
+            <a:off x="1774662" y="4388365"/>
+            <a:ext cx="703447" cy="1128514"/>
+          </a:xfrm>
+          <a:prstGeom prst="rect">
+            <a:avLst/>
+          </a:prstGeom>
+          <a:solidFill>
+            <a:srgbClr val="A2A2A2"/>
+          </a:solidFill>
+          <a:ln w="76200">
+            <a:noFill/>
+          </a:ln>
+        </p:spPr>
+        <p:style>
+          <a:lnRef idx="2">
+            <a:schemeClr val="accent1">
+              <a:shade val="15000"/>
+            </a:schemeClr>
+          </a:lnRef>
+          <a:fillRef idx="1">
+            <a:schemeClr val="accent1"/>
+          </a:fillRef>
+          <a:effectRef idx="0">
+            <a:schemeClr val="accent1"/>
+          </a:effectRef>
+          <a:fontRef idx="minor">
+            <a:schemeClr val="lt1"/>
+          </a:fontRef>
+        </p:style>
+        <p:txBody>
+          <a:bodyPr rtlCol="0" anchor="ctr"/>
+          <a:lstStyle/>
+          <a:p>
+            <a:pPr algn="ctr"/>
+            <a:endParaRPr kumimoji="1" lang="ja-JP" altLang="en-US"/>
+          </a:p>
+        </p:txBody>
+      </p:sp>
+      <p:sp>
+        <p:nvSpPr>
+          <p:cNvPr id="23" name="正方形/長方形 22">
+            <a:extLst>
+              <a:ext uri="{FF2B5EF4-FFF2-40B4-BE49-F238E27FC236}">
+                <a16:creationId xmlns:a16="http://schemas.microsoft.com/office/drawing/2014/main" id="{B0ADD0BF-E0B4-B1A3-D3C1-E6DD11B9EBE3}"/>
+              </a:ext>
+            </a:extLst>
+          </p:cNvPr>
+          <p:cNvSpPr/>
+          <p:nvPr/>
+        </p:nvSpPr>
+        <p:spPr>
+          <a:xfrm rot="19087804">
+            <a:off x="2650470" y="4321235"/>
+            <a:ext cx="205679" cy="1058323"/>
+          </a:xfrm>
+          <a:prstGeom prst="rect">
+            <a:avLst/>
+          </a:prstGeom>
+          <a:solidFill>
+            <a:srgbClr val="A2A2A2"/>
+          </a:solidFill>
+          <a:ln w="76200">
+            <a:noFill/>
+          </a:ln>
+        </p:spPr>
+        <p:style>
+          <a:lnRef idx="2">
+            <a:schemeClr val="accent1">
+              <a:shade val="15000"/>
+            </a:schemeClr>
+          </a:lnRef>
+          <a:fillRef idx="1">
+            <a:schemeClr val="accent1"/>
+          </a:fillRef>
+          <a:effectRef idx="0">
+            <a:schemeClr val="accent1"/>
+          </a:effectRef>
+          <a:fontRef idx="minor">
+            <a:schemeClr val="lt1"/>
+          </a:fontRef>
+        </p:style>
+        <p:txBody>
+          <a:bodyPr rtlCol="0" anchor="ctr"/>
+          <a:lstStyle/>
+          <a:p>
+            <a:pPr algn="ctr"/>
+            <a:endParaRPr kumimoji="1" lang="ja-JP" altLang="en-US"/>
+          </a:p>
+        </p:txBody>
+      </p:sp>
+      <p:sp>
+        <p:nvSpPr>
+          <p:cNvPr id="25" name="正方形/長方形 24">
+            <a:extLst>
+              <a:ext uri="{FF2B5EF4-FFF2-40B4-BE49-F238E27FC236}">
+                <a16:creationId xmlns:a16="http://schemas.microsoft.com/office/drawing/2014/main" id="{E8966569-4AEA-4932-92A4-2E6FB6CD7145}"/>
+              </a:ext>
+            </a:extLst>
+          </p:cNvPr>
+          <p:cNvSpPr/>
+          <p:nvPr/>
+        </p:nvSpPr>
+        <p:spPr>
+          <a:xfrm>
+            <a:off x="2248730" y="5042536"/>
+            <a:ext cx="584559" cy="471940"/>
+          </a:xfrm>
+          <a:prstGeom prst="rect">
+            <a:avLst/>
+          </a:prstGeom>
+          <a:solidFill>
+            <a:srgbClr val="A2A2A2"/>
+          </a:solidFill>
+          <a:ln w="76200">
+            <a:noFill/>
+          </a:ln>
+        </p:spPr>
+        <p:style>
+          <a:lnRef idx="2">
+            <a:schemeClr val="accent1">
+              <a:shade val="15000"/>
+            </a:schemeClr>
+          </a:lnRef>
+          <a:fillRef idx="1">
+            <a:schemeClr val="accent1"/>
+          </a:fillRef>
+          <a:effectRef idx="0">
+            <a:schemeClr val="accent1"/>
+          </a:effectRef>
+          <a:fontRef idx="minor">
+            <a:schemeClr val="lt1"/>
+          </a:fontRef>
+        </p:style>
+        <p:txBody>
+          <a:bodyPr rtlCol="0" anchor="ctr"/>
+          <a:lstStyle/>
+          <a:p>
+            <a:pPr algn="ctr"/>
+            <a:endParaRPr kumimoji="1" lang="ja-JP" altLang="en-US"/>
+          </a:p>
+        </p:txBody>
+      </p:sp>
+      <p:sp>
+        <p:nvSpPr>
+          <p:cNvPr id="26" name="正方形/長方形 25">
+            <a:extLst>
+              <a:ext uri="{FF2B5EF4-FFF2-40B4-BE49-F238E27FC236}">
+                <a16:creationId xmlns:a16="http://schemas.microsoft.com/office/drawing/2014/main" id="{8EE2648F-B79C-E883-9CB5-BC17CE62F660}"/>
+              </a:ext>
+            </a:extLst>
+          </p:cNvPr>
+          <p:cNvSpPr/>
+          <p:nvPr/>
+        </p:nvSpPr>
+        <p:spPr>
+          <a:xfrm rot="19709502">
+            <a:off x="2397061" y="4631119"/>
+            <a:ext cx="329843" cy="549460"/>
+          </a:xfrm>
+          <a:prstGeom prst="rect">
+            <a:avLst/>
+          </a:prstGeom>
+          <a:solidFill>
+            <a:srgbClr val="A2A2A2"/>
+          </a:solidFill>
+          <a:ln w="76200">
+            <a:noFill/>
+          </a:ln>
+        </p:spPr>
+        <p:style>
+          <a:lnRef idx="2">
+            <a:schemeClr val="accent1">
+              <a:shade val="15000"/>
+            </a:schemeClr>
+          </a:lnRef>
+          <a:fillRef idx="1">
+            <a:schemeClr val="accent1"/>
+          </a:fillRef>
+          <a:effectRef idx="0">
+            <a:schemeClr val="accent1"/>
+          </a:effectRef>
+          <a:fontRef idx="minor">
+            <a:schemeClr val="lt1"/>
+          </a:fontRef>
+        </p:style>
+        <p:txBody>
+          <a:bodyPr rtlCol="0" anchor="ctr"/>
+          <a:lstStyle/>
+          <a:p>
+            <a:pPr algn="ctr"/>
+            <a:endParaRPr kumimoji="1" lang="ja-JP" altLang="en-US"/>
+          </a:p>
+        </p:txBody>
+      </p:sp>
+      <p:sp>
+        <p:nvSpPr>
+          <p:cNvPr id="27" name="正方形/長方形 26">
+            <a:extLst>
+              <a:ext uri="{FF2B5EF4-FFF2-40B4-BE49-F238E27FC236}">
+                <a16:creationId xmlns:a16="http://schemas.microsoft.com/office/drawing/2014/main" id="{3350FAAF-757A-49D8-2FB9-1B7E6E14CAF7}"/>
+              </a:ext>
+            </a:extLst>
+          </p:cNvPr>
+          <p:cNvSpPr/>
+          <p:nvPr/>
+        </p:nvSpPr>
+        <p:spPr>
+          <a:xfrm rot="18963577">
+            <a:off x="2705818" y="5211212"/>
+            <a:ext cx="491034" cy="156555"/>
+          </a:xfrm>
+          <a:prstGeom prst="rect">
+            <a:avLst/>
+          </a:prstGeom>
+          <a:solidFill>
+            <a:srgbClr val="A2A2A2"/>
+          </a:solidFill>
+          <a:ln w="76200">
+            <a:noFill/>
+          </a:ln>
+        </p:spPr>
+        <p:style>
+          <a:lnRef idx="2">
+            <a:schemeClr val="accent1">
+              <a:shade val="15000"/>
+            </a:schemeClr>
+          </a:lnRef>
+          <a:fillRef idx="1">
+            <a:schemeClr val="accent1"/>
+          </a:fillRef>
+          <a:effectRef idx="0">
+            <a:schemeClr val="accent1"/>
+          </a:effectRef>
+          <a:fontRef idx="minor">
+            <a:schemeClr val="lt1"/>
+          </a:fontRef>
+        </p:style>
+        <p:txBody>
+          <a:bodyPr rtlCol="0" anchor="ctr"/>
+          <a:lstStyle/>
+          <a:p>
+            <a:pPr algn="ctr"/>
+            <a:endParaRPr kumimoji="1" lang="ja-JP" altLang="en-US"/>
+          </a:p>
+        </p:txBody>
+      </p:sp>
+      <p:sp>
+        <p:nvSpPr>
+          <p:cNvPr id="28" name="正方形/長方形 27">
+            <a:extLst>
+              <a:ext uri="{FF2B5EF4-FFF2-40B4-BE49-F238E27FC236}">
+                <a16:creationId xmlns:a16="http://schemas.microsoft.com/office/drawing/2014/main" id="{C8328951-CF45-654D-A297-5DFC5E22ACAF}"/>
+              </a:ext>
+            </a:extLst>
+          </p:cNvPr>
+          <p:cNvSpPr/>
+          <p:nvPr/>
+        </p:nvSpPr>
+        <p:spPr>
+          <a:xfrm rot="18963577">
+            <a:off x="2736140" y="5077777"/>
+            <a:ext cx="245579" cy="208318"/>
+          </a:xfrm>
+          <a:prstGeom prst="rect">
+            <a:avLst/>
+          </a:prstGeom>
+          <a:solidFill>
+            <a:srgbClr val="A2A2A2"/>
+          </a:solidFill>
+          <a:ln w="76200">
+            <a:noFill/>
+          </a:ln>
+        </p:spPr>
+        <p:style>
+          <a:lnRef idx="2">
+            <a:schemeClr val="accent1">
+              <a:shade val="15000"/>
+            </a:schemeClr>
+          </a:lnRef>
+          <a:fillRef idx="1">
+            <a:schemeClr val="accent1"/>
+          </a:fillRef>
+          <a:effectRef idx="0">
+            <a:schemeClr val="accent1"/>
+          </a:effectRef>
+          <a:fontRef idx="minor">
+            <a:schemeClr val="lt1"/>
+          </a:fontRef>
+        </p:style>
+        <p:txBody>
+          <a:bodyPr rtlCol="0" anchor="ctr"/>
+          <a:lstStyle/>
+          <a:p>
+            <a:pPr algn="ctr"/>
+            <a:endParaRPr kumimoji="1" lang="ja-JP" altLang="en-US"/>
+          </a:p>
+        </p:txBody>
+      </p:sp>
+    </p:spTree>
+    <p:extLst>
+      <p:ext uri="{BB962C8B-B14F-4D97-AF65-F5344CB8AC3E}">
+        <p14:creationId xmlns:p14="http://schemas.microsoft.com/office/powerpoint/2010/main" val="407844166"/>
+      </p:ext>
+    </p:extLst>
+  </p:cSld>
+  <p:clrMapOvr>
+    <a:masterClrMapping/>
+  </p:clrMapOvr>
+</p:sld>
+</file>
+
+<file path=ppt/slides/slide15.xml><?xml version="1.0" encoding="utf-8"?>
+<p:sld xmlns:a="http://schemas.openxmlformats.org/drawingml/2006/main" xmlns:r="http://schemas.openxmlformats.org/officeDocument/2006/relationships" xmlns:p="http://schemas.openxmlformats.org/presentationml/2006/main">
+  <p:cSld>
+    <p:spTree>
+      <p:nvGrpSpPr>
+        <p:cNvPr id="1" name=""/>
+        <p:cNvGrpSpPr/>
+        <p:nvPr/>
+      </p:nvGrpSpPr>
+      <p:grpSpPr>
+        <a:xfrm>
+          <a:off x="0" y="0"/>
+          <a:ext cx="0" cy="0"/>
+          <a:chOff x="0" y="0"/>
+          <a:chExt cx="0" cy="0"/>
+        </a:xfrm>
+      </p:grpSpPr>
+      <p:pic>
+        <p:nvPicPr>
+          <p:cNvPr id="4" name="Picture 4" descr="東京メトロ03系｜RailFile.jp｜鉄道車両サイドビューの図鑑">
+            <a:extLst>
+              <a:ext uri="{FF2B5EF4-FFF2-40B4-BE49-F238E27FC236}">
+                <a16:creationId xmlns:a16="http://schemas.microsoft.com/office/drawing/2014/main" id="{F3D047AC-E479-3B7A-E2B9-4D4C7CA00C27}"/>
+              </a:ext>
+            </a:extLst>
+          </p:cNvPr>
+          <p:cNvPicPr>
+            <a:picLocks noChangeAspect="1" noChangeArrowheads="1"/>
+          </p:cNvPicPr>
+          <p:nvPr/>
+        </p:nvPicPr>
+        <p:blipFill rotWithShape="1">
+          <a:blip r:embed="rId2">
+            <a:extLst>
+              <a:ext uri="{28A0092B-C50C-407E-A947-70E740481C1C}">
+                <a14:useLocalDpi xmlns:a14="http://schemas.microsoft.com/office/drawing/2010/main" val="0"/>
+              </a:ext>
+            </a:extLst>
+          </a:blip>
+          <a:srcRect l="8021" t="60246" r="48216" b="26643"/>
+          <a:stretch/>
+        </p:blipFill>
+        <p:spPr bwMode="auto">
+          <a:xfrm>
+            <a:off x="780559" y="607767"/>
+            <a:ext cx="10446980" cy="3129788"/>
+          </a:xfrm>
+          <a:prstGeom prst="rect">
+            <a:avLst/>
+          </a:prstGeom>
+          <a:noFill/>
+          <a:extLst>
+            <a:ext uri="{909E8E84-426E-40DD-AFC4-6F175D3DCCD1}">
+              <a14:hiddenFill xmlns:a14="http://schemas.microsoft.com/office/drawing/2010/main">
+                <a:solidFill>
+                  <a:srgbClr val="FFFFFF"/>
+                </a:solidFill>
+              </a14:hiddenFill>
+            </a:ext>
+          </a:extLst>
+        </p:spPr>
+      </p:pic>
+      <p:sp>
+        <p:nvSpPr>
+          <p:cNvPr id="5" name="正方形/長方形 4">
+            <a:extLst>
+              <a:ext uri="{FF2B5EF4-FFF2-40B4-BE49-F238E27FC236}">
+                <a16:creationId xmlns:a16="http://schemas.microsoft.com/office/drawing/2014/main" id="{77AC9295-1B25-045D-2D77-E80FAD7F3764}"/>
+              </a:ext>
+            </a:extLst>
+          </p:cNvPr>
+          <p:cNvSpPr/>
+          <p:nvPr/>
+        </p:nvSpPr>
+        <p:spPr>
+          <a:xfrm rot="19087804">
+            <a:off x="2094456" y="4548702"/>
+            <a:ext cx="1450363" cy="1058323"/>
+          </a:xfrm>
+          <a:prstGeom prst="rect">
+            <a:avLst/>
+          </a:prstGeom>
+          <a:solidFill>
+            <a:srgbClr val="A2A2A2"/>
+          </a:solidFill>
+          <a:ln w="76200">
+            <a:noFill/>
+          </a:ln>
+        </p:spPr>
+        <p:style>
+          <a:lnRef idx="2">
+            <a:schemeClr val="accent1">
+              <a:shade val="15000"/>
+            </a:schemeClr>
+          </a:lnRef>
+          <a:fillRef idx="1">
+            <a:schemeClr val="accent1"/>
+          </a:fillRef>
+          <a:effectRef idx="0">
+            <a:schemeClr val="accent1"/>
+          </a:effectRef>
+          <a:fontRef idx="minor">
+            <a:schemeClr val="lt1"/>
+          </a:fontRef>
+        </p:style>
+        <p:txBody>
+          <a:bodyPr rtlCol="0" anchor="ctr"/>
+          <a:lstStyle/>
+          <a:p>
+            <a:pPr algn="ctr"/>
+            <a:endParaRPr kumimoji="1" lang="ja-JP" altLang="en-US" dirty="0"/>
+          </a:p>
+        </p:txBody>
+      </p:sp>
+      <p:sp>
+        <p:nvSpPr>
+          <p:cNvPr id="7" name="正方形/長方形 6">
+            <a:extLst>
+              <a:ext uri="{FF2B5EF4-FFF2-40B4-BE49-F238E27FC236}">
+                <a16:creationId xmlns:a16="http://schemas.microsoft.com/office/drawing/2014/main" id="{E48C7AA8-028E-7EA9-74FD-BB680ACA7F7F}"/>
+              </a:ext>
+            </a:extLst>
+          </p:cNvPr>
+          <p:cNvSpPr/>
+          <p:nvPr/>
+        </p:nvSpPr>
+        <p:spPr>
+          <a:xfrm rot="18901224">
+            <a:off x="6516295" y="5362296"/>
+            <a:ext cx="1355999" cy="301422"/>
+          </a:xfrm>
+          <a:prstGeom prst="rect">
+            <a:avLst/>
+          </a:prstGeom>
+          <a:solidFill>
+            <a:schemeClr val="tx1">
+              <a:lumMod val="85000"/>
+              <a:lumOff val="15000"/>
+            </a:schemeClr>
+          </a:solidFill>
+          <a:ln w="76200">
+            <a:noFill/>
+          </a:ln>
+        </p:spPr>
+        <p:style>
+          <a:lnRef idx="2">
+            <a:schemeClr val="accent1">
+              <a:shade val="15000"/>
+            </a:schemeClr>
+          </a:lnRef>
+          <a:fillRef idx="1">
+            <a:schemeClr val="accent1"/>
+          </a:fillRef>
+          <a:effectRef idx="0">
+            <a:schemeClr val="accent1"/>
+          </a:effectRef>
+          <a:fontRef idx="minor">
+            <a:schemeClr val="lt1"/>
+          </a:fontRef>
+        </p:style>
+        <p:txBody>
+          <a:bodyPr rtlCol="0" anchor="ctr"/>
+          <a:lstStyle/>
+          <a:p>
+            <a:pPr algn="ctr"/>
+            <a:endParaRPr kumimoji="1" lang="ja-JP" altLang="en-US"/>
+          </a:p>
+        </p:txBody>
+      </p:sp>
+      <p:sp>
+        <p:nvSpPr>
+          <p:cNvPr id="8" name="正方形/長方形 7">
+            <a:extLst>
+              <a:ext uri="{FF2B5EF4-FFF2-40B4-BE49-F238E27FC236}">
+                <a16:creationId xmlns:a16="http://schemas.microsoft.com/office/drawing/2014/main" id="{C6614C84-C9AF-4BCE-C4ED-E7B5F5773A5C}"/>
+              </a:ext>
+            </a:extLst>
+          </p:cNvPr>
+          <p:cNvSpPr/>
+          <p:nvPr/>
+        </p:nvSpPr>
+        <p:spPr>
+          <a:xfrm rot="18901224">
+            <a:off x="7440803" y="4770316"/>
+            <a:ext cx="190506" cy="506148"/>
+          </a:xfrm>
+          <a:prstGeom prst="rect">
+            <a:avLst/>
+          </a:prstGeom>
+          <a:solidFill>
+            <a:schemeClr val="tx1">
+              <a:lumMod val="85000"/>
+              <a:lumOff val="15000"/>
+            </a:schemeClr>
+          </a:solidFill>
+          <a:ln w="76200">
+            <a:noFill/>
+          </a:ln>
+        </p:spPr>
+        <p:style>
+          <a:lnRef idx="2">
+            <a:schemeClr val="accent1">
+              <a:shade val="15000"/>
+            </a:schemeClr>
+          </a:lnRef>
+          <a:fillRef idx="1">
+            <a:schemeClr val="accent1"/>
+          </a:fillRef>
+          <a:effectRef idx="0">
+            <a:schemeClr val="accent1"/>
+          </a:effectRef>
+          <a:fontRef idx="minor">
+            <a:schemeClr val="lt1"/>
+          </a:fontRef>
+        </p:style>
+        <p:txBody>
+          <a:bodyPr rtlCol="0" anchor="ctr"/>
+          <a:lstStyle/>
+          <a:p>
+            <a:pPr algn="ctr"/>
+            <a:endParaRPr kumimoji="1" lang="ja-JP" altLang="en-US"/>
+          </a:p>
+        </p:txBody>
+      </p:sp>
+      <p:sp>
+        <p:nvSpPr>
+          <p:cNvPr id="9" name="正方形/長方形 8">
+            <a:extLst>
+              <a:ext uri="{FF2B5EF4-FFF2-40B4-BE49-F238E27FC236}">
+                <a16:creationId xmlns:a16="http://schemas.microsoft.com/office/drawing/2014/main" id="{EFA38052-B8BD-A3DA-573E-BF402BA9DCF3}"/>
+              </a:ext>
+            </a:extLst>
+          </p:cNvPr>
+          <p:cNvSpPr/>
+          <p:nvPr/>
+        </p:nvSpPr>
+        <p:spPr>
+          <a:xfrm>
+            <a:off x="5467783" y="5797440"/>
+            <a:ext cx="1355999" cy="301422"/>
+          </a:xfrm>
+          <a:prstGeom prst="rect">
+            <a:avLst/>
+          </a:prstGeom>
+          <a:solidFill>
+            <a:schemeClr val="tx1">
+              <a:lumMod val="85000"/>
+              <a:lumOff val="15000"/>
+            </a:schemeClr>
+          </a:solidFill>
+          <a:ln w="76200">
+            <a:noFill/>
+          </a:ln>
+        </p:spPr>
+        <p:style>
+          <a:lnRef idx="2">
+            <a:schemeClr val="accent1">
+              <a:shade val="15000"/>
+            </a:schemeClr>
+          </a:lnRef>
+          <a:fillRef idx="1">
+            <a:schemeClr val="accent1"/>
+          </a:fillRef>
+          <a:effectRef idx="0">
+            <a:schemeClr val="accent1"/>
+          </a:effectRef>
+          <a:fontRef idx="minor">
+            <a:schemeClr val="lt1"/>
+          </a:fontRef>
+        </p:style>
+        <p:txBody>
+          <a:bodyPr rtlCol="0" anchor="ctr"/>
+          <a:lstStyle/>
+          <a:p>
+            <a:pPr algn="ctr"/>
+            <a:endParaRPr kumimoji="1" lang="ja-JP" altLang="en-US"/>
+          </a:p>
+        </p:txBody>
+      </p:sp>
+      <p:sp>
+        <p:nvSpPr>
+          <p:cNvPr id="10" name="正方形/長方形 9">
+            <a:extLst>
+              <a:ext uri="{FF2B5EF4-FFF2-40B4-BE49-F238E27FC236}">
+                <a16:creationId xmlns:a16="http://schemas.microsoft.com/office/drawing/2014/main" id="{AA34B177-C93D-3831-704B-6ECCEED00338}"/>
+              </a:ext>
+            </a:extLst>
+          </p:cNvPr>
+          <p:cNvSpPr/>
+          <p:nvPr/>
+        </p:nvSpPr>
+        <p:spPr>
+          <a:xfrm>
+            <a:off x="5467783" y="4776441"/>
+            <a:ext cx="1965599" cy="301422"/>
+          </a:xfrm>
+          <a:prstGeom prst="rect">
+            <a:avLst/>
+          </a:prstGeom>
+          <a:solidFill>
+            <a:schemeClr val="tx1">
+              <a:lumMod val="85000"/>
+              <a:lumOff val="15000"/>
+            </a:schemeClr>
+          </a:solidFill>
+          <a:ln w="76200">
+            <a:noFill/>
+          </a:ln>
+        </p:spPr>
+        <p:style>
+          <a:lnRef idx="2">
+            <a:schemeClr val="accent1">
+              <a:shade val="15000"/>
+            </a:schemeClr>
+          </a:lnRef>
+          <a:fillRef idx="1">
+            <a:schemeClr val="accent1"/>
+          </a:fillRef>
+          <a:effectRef idx="0">
+            <a:schemeClr val="accent1"/>
+          </a:effectRef>
+          <a:fontRef idx="minor">
+            <a:schemeClr val="lt1"/>
+          </a:fontRef>
+        </p:style>
+        <p:txBody>
+          <a:bodyPr rtlCol="0" anchor="ctr"/>
+          <a:lstStyle/>
+          <a:p>
+            <a:pPr algn="ctr"/>
+            <a:endParaRPr kumimoji="1" lang="ja-JP" altLang="en-US"/>
+          </a:p>
+        </p:txBody>
+      </p:sp>
+      <p:sp>
+        <p:nvSpPr>
+          <p:cNvPr id="11" name="正方形/長方形 10">
+            <a:extLst>
+              <a:ext uri="{FF2B5EF4-FFF2-40B4-BE49-F238E27FC236}">
+                <a16:creationId xmlns:a16="http://schemas.microsoft.com/office/drawing/2014/main" id="{EF3CE034-3104-5AA0-D7BF-94A334FC8B2E}"/>
+              </a:ext>
+            </a:extLst>
+          </p:cNvPr>
+          <p:cNvSpPr/>
+          <p:nvPr/>
+        </p:nvSpPr>
+        <p:spPr>
+          <a:xfrm>
+            <a:off x="5469936" y="4969048"/>
+            <a:ext cx="1256433" cy="931771"/>
+          </a:xfrm>
+          <a:prstGeom prst="rect">
+            <a:avLst/>
+          </a:prstGeom>
+          <a:solidFill>
+            <a:srgbClr val="FFFBEF"/>
+          </a:solidFill>
+          <a:ln w="76200">
+            <a:noFill/>
+          </a:ln>
+        </p:spPr>
+        <p:style>
+          <a:lnRef idx="2">
+            <a:schemeClr val="accent1">
+              <a:shade val="15000"/>
+            </a:schemeClr>
+          </a:lnRef>
+          <a:fillRef idx="1">
+            <a:schemeClr val="accent1"/>
+          </a:fillRef>
+          <a:effectRef idx="0">
+            <a:schemeClr val="accent1"/>
+          </a:effectRef>
+          <a:fontRef idx="minor">
+            <a:schemeClr val="lt1"/>
+          </a:fontRef>
+        </p:style>
+        <p:txBody>
+          <a:bodyPr rtlCol="0" anchor="ctr"/>
+          <a:lstStyle/>
+          <a:p>
+            <a:pPr algn="ctr"/>
+            <a:endParaRPr kumimoji="1" lang="ja-JP" altLang="en-US"/>
+          </a:p>
+        </p:txBody>
+      </p:sp>
+      <p:sp>
+        <p:nvSpPr>
+          <p:cNvPr id="12" name="正方形/長方形 11">
+            <a:extLst>
+              <a:ext uri="{FF2B5EF4-FFF2-40B4-BE49-F238E27FC236}">
+                <a16:creationId xmlns:a16="http://schemas.microsoft.com/office/drawing/2014/main" id="{AFDCFE2B-66FF-24A8-C6DD-3688F4D7FD7E}"/>
+              </a:ext>
+            </a:extLst>
+          </p:cNvPr>
+          <p:cNvSpPr/>
+          <p:nvPr/>
+        </p:nvSpPr>
+        <p:spPr>
+          <a:xfrm rot="2417305">
+            <a:off x="6540026" y="4878131"/>
+            <a:ext cx="644202" cy="889001"/>
+          </a:xfrm>
+          <a:prstGeom prst="rect">
+            <a:avLst/>
+          </a:prstGeom>
+          <a:solidFill>
+            <a:schemeClr val="tx1">
+              <a:lumMod val="85000"/>
+              <a:lumOff val="15000"/>
+            </a:schemeClr>
+          </a:solidFill>
+          <a:ln w="76200">
+            <a:noFill/>
+          </a:ln>
+        </p:spPr>
+        <p:style>
+          <a:lnRef idx="2">
+            <a:schemeClr val="accent1">
+              <a:shade val="15000"/>
+            </a:schemeClr>
+          </a:lnRef>
+          <a:fillRef idx="1">
+            <a:schemeClr val="accent1"/>
+          </a:fillRef>
+          <a:effectRef idx="0">
+            <a:schemeClr val="accent1"/>
+          </a:effectRef>
+          <a:fontRef idx="minor">
+            <a:schemeClr val="lt1"/>
+          </a:fontRef>
+        </p:style>
+        <p:txBody>
+          <a:bodyPr rtlCol="0" anchor="ctr"/>
+          <a:lstStyle/>
+          <a:p>
+            <a:pPr algn="ctr"/>
+            <a:endParaRPr kumimoji="1" lang="ja-JP" altLang="en-US"/>
+          </a:p>
+        </p:txBody>
+      </p:sp>
+      <p:sp>
+        <p:nvSpPr>
+          <p:cNvPr id="14" name="正方形/長方形 13">
+            <a:extLst>
+              <a:ext uri="{FF2B5EF4-FFF2-40B4-BE49-F238E27FC236}">
+                <a16:creationId xmlns:a16="http://schemas.microsoft.com/office/drawing/2014/main" id="{B317EE52-4CB3-BD3A-7391-25CEC39F1908}"/>
+              </a:ext>
+            </a:extLst>
+          </p:cNvPr>
+          <p:cNvSpPr/>
+          <p:nvPr/>
+        </p:nvSpPr>
+        <p:spPr>
+          <a:xfrm rot="18901224">
+            <a:off x="6499556" y="5289240"/>
+            <a:ext cx="1179316" cy="284618"/>
+          </a:xfrm>
+          <a:prstGeom prst="rect">
+            <a:avLst/>
+          </a:prstGeom>
+          <a:solidFill>
+            <a:srgbClr val="FFFBEF"/>
+          </a:solidFill>
+          <a:ln w="76200">
+            <a:noFill/>
+          </a:ln>
+        </p:spPr>
+        <p:style>
+          <a:lnRef idx="2">
+            <a:schemeClr val="accent1">
+              <a:shade val="15000"/>
+            </a:schemeClr>
+          </a:lnRef>
+          <a:fillRef idx="1">
+            <a:schemeClr val="accent1"/>
+          </a:fillRef>
+          <a:effectRef idx="0">
+            <a:schemeClr val="accent1"/>
+          </a:effectRef>
+          <a:fontRef idx="minor">
+            <a:schemeClr val="lt1"/>
+          </a:fontRef>
+        </p:style>
+        <p:txBody>
+          <a:bodyPr rtlCol="0" anchor="ctr"/>
+          <a:lstStyle/>
+          <a:p>
+            <a:pPr algn="ctr"/>
+            <a:endParaRPr kumimoji="1" lang="ja-JP" altLang="en-US"/>
+          </a:p>
+        </p:txBody>
+      </p:sp>
+      <p:sp>
+        <p:nvSpPr>
+          <p:cNvPr id="15" name="正方形/長方形 14">
+            <a:extLst>
+              <a:ext uri="{FF2B5EF4-FFF2-40B4-BE49-F238E27FC236}">
+                <a16:creationId xmlns:a16="http://schemas.microsoft.com/office/drawing/2014/main" id="{4B187AE4-C7F9-EE19-9C2D-5C47C75FFC69}"/>
+              </a:ext>
+            </a:extLst>
+          </p:cNvPr>
+          <p:cNvSpPr/>
+          <p:nvPr/>
+        </p:nvSpPr>
+        <p:spPr>
+          <a:xfrm>
+            <a:off x="5467783" y="4909802"/>
+            <a:ext cx="1936522" cy="284618"/>
+          </a:xfrm>
+          <a:prstGeom prst="rect">
+            <a:avLst/>
+          </a:prstGeom>
+          <a:solidFill>
+            <a:srgbClr val="FFFBEF"/>
+          </a:solidFill>
+          <a:ln w="76200">
+            <a:noFill/>
+          </a:ln>
+        </p:spPr>
+        <p:style>
+          <a:lnRef idx="2">
+            <a:schemeClr val="accent1">
+              <a:shade val="15000"/>
+            </a:schemeClr>
+          </a:lnRef>
+          <a:fillRef idx="1">
+            <a:schemeClr val="accent1"/>
+          </a:fillRef>
+          <a:effectRef idx="0">
+            <a:schemeClr val="accent1"/>
+          </a:effectRef>
+          <a:fontRef idx="minor">
+            <a:schemeClr val="lt1"/>
+          </a:fontRef>
+        </p:style>
+        <p:txBody>
+          <a:bodyPr rtlCol="0" anchor="ctr"/>
+          <a:lstStyle/>
+          <a:p>
+            <a:pPr algn="ctr"/>
+            <a:endParaRPr kumimoji="1" lang="ja-JP" altLang="en-US"/>
+          </a:p>
+        </p:txBody>
+      </p:sp>
+      <p:sp>
+        <p:nvSpPr>
+          <p:cNvPr id="16" name="正方形/長方形 15">
+            <a:extLst>
+              <a:ext uri="{FF2B5EF4-FFF2-40B4-BE49-F238E27FC236}">
+                <a16:creationId xmlns:a16="http://schemas.microsoft.com/office/drawing/2014/main" id="{B94C1B5F-B883-31DB-BE26-72FAC7BBA6A4}"/>
+              </a:ext>
+            </a:extLst>
+          </p:cNvPr>
+          <p:cNvSpPr/>
+          <p:nvPr/>
+        </p:nvSpPr>
+        <p:spPr>
+          <a:xfrm>
+            <a:off x="5468030" y="5660714"/>
+            <a:ext cx="1308764" cy="284618"/>
+          </a:xfrm>
+          <a:prstGeom prst="rect">
+            <a:avLst/>
+          </a:prstGeom>
+          <a:solidFill>
+            <a:srgbClr val="FFFBEF"/>
+          </a:solidFill>
+          <a:ln w="76200">
+            <a:noFill/>
+          </a:ln>
+        </p:spPr>
+        <p:style>
+          <a:lnRef idx="2">
+            <a:schemeClr val="accent1">
+              <a:shade val="15000"/>
+            </a:schemeClr>
+          </a:lnRef>
+          <a:fillRef idx="1">
+            <a:schemeClr val="accent1"/>
+          </a:fillRef>
+          <a:effectRef idx="0">
+            <a:schemeClr val="accent1"/>
+          </a:effectRef>
+          <a:fontRef idx="minor">
+            <a:schemeClr val="lt1"/>
+          </a:fontRef>
+        </p:style>
+        <p:txBody>
+          <a:bodyPr rtlCol="0" anchor="ctr"/>
+          <a:lstStyle/>
+          <a:p>
+            <a:pPr algn="ctr"/>
+            <a:endParaRPr lang="ja-JP" altLang="en-US"/>
+          </a:p>
+        </p:txBody>
+      </p:sp>
+      <p:sp>
+        <p:nvSpPr>
+          <p:cNvPr id="17" name="正方形/長方形 16">
+            <a:extLst>
+              <a:ext uri="{FF2B5EF4-FFF2-40B4-BE49-F238E27FC236}">
+                <a16:creationId xmlns:a16="http://schemas.microsoft.com/office/drawing/2014/main" id="{0E41A10E-C2C8-775B-4781-D305DDBC68EE}"/>
+              </a:ext>
+            </a:extLst>
+          </p:cNvPr>
+          <p:cNvSpPr/>
+          <p:nvPr/>
+        </p:nvSpPr>
+        <p:spPr>
+          <a:xfrm>
+            <a:off x="7906808" y="839957"/>
+            <a:ext cx="1965599" cy="301422"/>
+          </a:xfrm>
+          <a:prstGeom prst="rect">
+            <a:avLst/>
+          </a:prstGeom>
+          <a:solidFill>
+            <a:schemeClr val="tx1">
+              <a:lumMod val="85000"/>
+              <a:lumOff val="15000"/>
+            </a:schemeClr>
+          </a:solidFill>
+          <a:ln w="76200">
+            <a:noFill/>
+          </a:ln>
+        </p:spPr>
+        <p:style>
+          <a:lnRef idx="2">
+            <a:schemeClr val="accent1">
+              <a:shade val="15000"/>
+            </a:schemeClr>
+          </a:lnRef>
+          <a:fillRef idx="1">
+            <a:schemeClr val="accent1"/>
+          </a:fillRef>
+          <a:effectRef idx="0">
+            <a:schemeClr val="accent1"/>
+          </a:effectRef>
+          <a:fontRef idx="minor">
+            <a:schemeClr val="lt1"/>
+          </a:fontRef>
+        </p:style>
+        <p:txBody>
+          <a:bodyPr rtlCol="0" anchor="ctr"/>
+          <a:lstStyle/>
+          <a:p>
+            <a:pPr algn="ctr"/>
+            <a:endParaRPr kumimoji="1" lang="ja-JP" altLang="en-US"/>
+          </a:p>
+        </p:txBody>
+      </p:sp>
+      <p:sp>
+        <p:nvSpPr>
+          <p:cNvPr id="18" name="正方形/長方形 17">
+            <a:extLst>
+              <a:ext uri="{FF2B5EF4-FFF2-40B4-BE49-F238E27FC236}">
+                <a16:creationId xmlns:a16="http://schemas.microsoft.com/office/drawing/2014/main" id="{2BEEA661-A0B2-183F-BA92-D21DED38F86E}"/>
+              </a:ext>
+            </a:extLst>
+          </p:cNvPr>
+          <p:cNvSpPr/>
+          <p:nvPr/>
+        </p:nvSpPr>
+        <p:spPr>
+          <a:xfrm>
+            <a:off x="5468031" y="4954315"/>
+            <a:ext cx="1346864" cy="736451"/>
+          </a:xfrm>
+          <a:prstGeom prst="rect">
+            <a:avLst/>
+          </a:prstGeom>
+          <a:solidFill>
+            <a:srgbClr val="FFFBEF"/>
+          </a:solidFill>
+          <a:ln w="76200">
+            <a:noFill/>
+          </a:ln>
+        </p:spPr>
+        <p:style>
+          <a:lnRef idx="2">
+            <a:schemeClr val="accent1">
+              <a:shade val="15000"/>
+            </a:schemeClr>
+          </a:lnRef>
+          <a:fillRef idx="1">
+            <a:schemeClr val="accent1"/>
+          </a:fillRef>
+          <a:effectRef idx="0">
+            <a:schemeClr val="accent1"/>
+          </a:effectRef>
+          <a:fontRef idx="minor">
+            <a:schemeClr val="lt1"/>
+          </a:fontRef>
+        </p:style>
+        <p:txBody>
+          <a:bodyPr rtlCol="0" anchor="ctr"/>
+          <a:lstStyle/>
+          <a:p>
+            <a:pPr algn="ctr"/>
+            <a:endParaRPr kumimoji="1" lang="ja-JP" altLang="en-US"/>
+          </a:p>
+        </p:txBody>
+      </p:sp>
+      <p:sp>
+        <p:nvSpPr>
+          <p:cNvPr id="19" name="正方形/長方形 18">
+            <a:extLst>
+              <a:ext uri="{FF2B5EF4-FFF2-40B4-BE49-F238E27FC236}">
+                <a16:creationId xmlns:a16="http://schemas.microsoft.com/office/drawing/2014/main" id="{2D3373E7-8A6A-4775-263B-2779D9526608}"/>
+              </a:ext>
+            </a:extLst>
+          </p:cNvPr>
+          <p:cNvSpPr/>
+          <p:nvPr/>
+        </p:nvSpPr>
+        <p:spPr>
+          <a:xfrm>
+            <a:off x="6779749" y="5012242"/>
+            <a:ext cx="370802" cy="505806"/>
+          </a:xfrm>
+          <a:prstGeom prst="rect">
+            <a:avLst/>
+          </a:prstGeom>
+          <a:solidFill>
+            <a:srgbClr val="FFFBEF"/>
+          </a:solidFill>
+          <a:ln w="76200">
+            <a:noFill/>
+          </a:ln>
+        </p:spPr>
+        <p:style>
+          <a:lnRef idx="2">
+            <a:schemeClr val="accent1">
+              <a:shade val="15000"/>
+            </a:schemeClr>
+          </a:lnRef>
+          <a:fillRef idx="1">
+            <a:schemeClr val="accent1"/>
+          </a:fillRef>
+          <a:effectRef idx="0">
+            <a:schemeClr val="accent1"/>
+          </a:effectRef>
+          <a:fontRef idx="minor">
+            <a:schemeClr val="lt1"/>
+          </a:fontRef>
+        </p:style>
+        <p:txBody>
+          <a:bodyPr rtlCol="0" anchor="ctr"/>
+          <a:lstStyle/>
+          <a:p>
+            <a:pPr algn="ctr"/>
+            <a:endParaRPr kumimoji="1" lang="ja-JP" altLang="en-US"/>
+          </a:p>
+        </p:txBody>
+      </p:sp>
+      <p:pic>
+        <p:nvPicPr>
+          <p:cNvPr id="20" name="Picture 2">
+            <a:extLst>
+              <a:ext uri="{FF2B5EF4-FFF2-40B4-BE49-F238E27FC236}">
+                <a16:creationId xmlns:a16="http://schemas.microsoft.com/office/drawing/2014/main" id="{72F0C190-C8C4-3EA4-85CC-3152C9A256A3}"/>
+              </a:ext>
+            </a:extLst>
+          </p:cNvPr>
+          <p:cNvPicPr>
+            <a:picLocks noChangeAspect="1" noChangeArrowheads="1"/>
+          </p:cNvPicPr>
+          <p:nvPr/>
+        </p:nvPicPr>
+        <p:blipFill rotWithShape="1">
+          <a:blip r:embed="rId3">
+            <a:extLst>
+              <a:ext uri="{28A0092B-C50C-407E-A947-70E740481C1C}">
+                <a14:useLocalDpi xmlns:a14="http://schemas.microsoft.com/office/drawing/2010/main" val="0"/>
+              </a:ext>
+            </a:extLst>
+          </a:blip>
+          <a:srcRect r="93200" b="82705"/>
+          <a:stretch/>
+        </p:blipFill>
+        <p:spPr bwMode="auto">
+          <a:xfrm>
+            <a:off x="685800" y="337741"/>
+            <a:ext cx="2481278" cy="3399814"/>
+          </a:xfrm>
+          <a:prstGeom prst="rect">
+            <a:avLst/>
+          </a:prstGeom>
+          <a:noFill/>
+          <a:extLst>
+            <a:ext uri="{909E8E84-426E-40DD-AFC4-6F175D3DCCD1}">
+              <a14:hiddenFill xmlns:a14="http://schemas.microsoft.com/office/drawing/2010/main">
+                <a:solidFill>
+                  <a:srgbClr val="FFFFFF"/>
+                </a:solidFill>
+              </a14:hiddenFill>
+            </a:ext>
+          </a:extLst>
+        </p:spPr>
+      </p:pic>
+      <p:sp>
+        <p:nvSpPr>
+          <p:cNvPr id="22" name="正方形/長方形 21">
+            <a:extLst>
+              <a:ext uri="{FF2B5EF4-FFF2-40B4-BE49-F238E27FC236}">
+                <a16:creationId xmlns:a16="http://schemas.microsoft.com/office/drawing/2014/main" id="{AE23C3AF-1C7D-C4F4-E100-368F8946AD1F}"/>
+              </a:ext>
+            </a:extLst>
+          </p:cNvPr>
+          <p:cNvSpPr/>
+          <p:nvPr/>
+        </p:nvSpPr>
+        <p:spPr>
+          <a:xfrm rot="18901224">
+            <a:off x="6529303" y="5316037"/>
+            <a:ext cx="1076801" cy="222977"/>
+          </a:xfrm>
+          <a:prstGeom prst="rect">
+            <a:avLst/>
+          </a:prstGeom>
+          <a:solidFill>
+            <a:srgbClr val="A2A2A2"/>
+          </a:solidFill>
+          <a:ln w="76200">
+            <a:noFill/>
+          </a:ln>
+        </p:spPr>
+        <p:style>
+          <a:lnRef idx="2">
+            <a:schemeClr val="accent1">
+              <a:shade val="15000"/>
+            </a:schemeClr>
+          </a:lnRef>
+          <a:fillRef idx="1">
+            <a:schemeClr val="accent1"/>
+          </a:fillRef>
+          <a:effectRef idx="0">
+            <a:schemeClr val="accent1"/>
+          </a:effectRef>
+          <a:fontRef idx="minor">
+            <a:schemeClr val="lt1"/>
+          </a:fontRef>
+        </p:style>
+        <p:txBody>
+          <a:bodyPr rtlCol="0" anchor="ctr"/>
+          <a:lstStyle/>
+          <a:p>
+            <a:pPr algn="ctr"/>
+            <a:endParaRPr kumimoji="1" lang="ja-JP" altLang="en-US"/>
+          </a:p>
+        </p:txBody>
+      </p:sp>
+      <p:sp>
+        <p:nvSpPr>
+          <p:cNvPr id="23" name="正方形/長方形 22">
+            <a:extLst>
+              <a:ext uri="{FF2B5EF4-FFF2-40B4-BE49-F238E27FC236}">
+                <a16:creationId xmlns:a16="http://schemas.microsoft.com/office/drawing/2014/main" id="{350BD0FD-5F33-F90A-4BF7-1D3AADDEE306}"/>
+              </a:ext>
+            </a:extLst>
+          </p:cNvPr>
+          <p:cNvSpPr/>
+          <p:nvPr/>
+        </p:nvSpPr>
+        <p:spPr>
+          <a:xfrm>
+            <a:off x="5606737" y="1726824"/>
+            <a:ext cx="1835170" cy="284618"/>
+          </a:xfrm>
+          <a:prstGeom prst="rect">
+            <a:avLst/>
+          </a:prstGeom>
+          <a:solidFill>
+            <a:srgbClr val="A2A2A2"/>
+          </a:solidFill>
+          <a:ln w="76200">
+            <a:noFill/>
+          </a:ln>
+        </p:spPr>
+        <p:style>
+          <a:lnRef idx="2">
+            <a:schemeClr val="accent1">
+              <a:shade val="15000"/>
+            </a:schemeClr>
+          </a:lnRef>
+          <a:fillRef idx="1">
+            <a:schemeClr val="accent1"/>
+          </a:fillRef>
+          <a:effectRef idx="0">
+            <a:schemeClr val="accent1"/>
+          </a:effectRef>
+          <a:fontRef idx="minor">
+            <a:schemeClr val="lt1"/>
+          </a:fontRef>
+        </p:style>
+        <p:txBody>
+          <a:bodyPr rtlCol="0" anchor="ctr"/>
+          <a:lstStyle/>
+          <a:p>
+            <a:pPr algn="ctr"/>
+            <a:endParaRPr kumimoji="1" lang="ja-JP" altLang="en-US"/>
+          </a:p>
+        </p:txBody>
+      </p:sp>
+      <p:sp>
+        <p:nvSpPr>
+          <p:cNvPr id="24" name="正方形/長方形 23">
+            <a:extLst>
+              <a:ext uri="{FF2B5EF4-FFF2-40B4-BE49-F238E27FC236}">
+                <a16:creationId xmlns:a16="http://schemas.microsoft.com/office/drawing/2014/main" id="{584E8D6D-C28D-2D9E-F033-6C1B967710EC}"/>
+              </a:ext>
+            </a:extLst>
+          </p:cNvPr>
+          <p:cNvSpPr/>
+          <p:nvPr/>
+        </p:nvSpPr>
+        <p:spPr>
+          <a:xfrm>
+            <a:off x="5606737" y="2484879"/>
+            <a:ext cx="1234054" cy="284618"/>
+          </a:xfrm>
+          <a:prstGeom prst="rect">
+            <a:avLst/>
+          </a:prstGeom>
+          <a:solidFill>
+            <a:srgbClr val="A2A2A2"/>
+          </a:solidFill>
+          <a:ln w="76200">
+            <a:noFill/>
+          </a:ln>
+        </p:spPr>
+        <p:style>
+          <a:lnRef idx="2">
+            <a:schemeClr val="accent1">
+              <a:shade val="15000"/>
+            </a:schemeClr>
+          </a:lnRef>
+          <a:fillRef idx="1">
+            <a:schemeClr val="accent1"/>
+          </a:fillRef>
+          <a:effectRef idx="0">
+            <a:schemeClr val="accent1"/>
+          </a:effectRef>
+          <a:fontRef idx="minor">
+            <a:schemeClr val="lt1"/>
+          </a:fontRef>
+        </p:style>
+        <p:txBody>
+          <a:bodyPr rtlCol="0" anchor="ctr"/>
+          <a:lstStyle/>
+          <a:p>
+            <a:pPr algn="ctr"/>
+            <a:endParaRPr kumimoji="1" lang="ja-JP" altLang="en-US"/>
+          </a:p>
+        </p:txBody>
+      </p:sp>
+      <p:sp>
+        <p:nvSpPr>
+          <p:cNvPr id="25" name="正方形/長方形 24">
+            <a:extLst>
+              <a:ext uri="{FF2B5EF4-FFF2-40B4-BE49-F238E27FC236}">
+                <a16:creationId xmlns:a16="http://schemas.microsoft.com/office/drawing/2014/main" id="{824BC1AA-E4D8-152B-34CB-16E128EB4280}"/>
+              </a:ext>
+            </a:extLst>
+          </p:cNvPr>
+          <p:cNvSpPr/>
+          <p:nvPr/>
+        </p:nvSpPr>
+        <p:spPr>
+          <a:xfrm>
+            <a:off x="5606737" y="1727981"/>
+            <a:ext cx="1234054" cy="823982"/>
+          </a:xfrm>
+          <a:prstGeom prst="rect">
+            <a:avLst/>
+          </a:prstGeom>
+          <a:solidFill>
+            <a:srgbClr val="A2A2A2"/>
+          </a:solidFill>
+          <a:ln w="76200">
+            <a:noFill/>
+          </a:ln>
+        </p:spPr>
+        <p:style>
+          <a:lnRef idx="2">
+            <a:schemeClr val="accent1">
+              <a:shade val="15000"/>
+            </a:schemeClr>
+          </a:lnRef>
+          <a:fillRef idx="1">
+            <a:schemeClr val="accent1"/>
+          </a:fillRef>
+          <a:effectRef idx="0">
+            <a:schemeClr val="accent1"/>
+          </a:effectRef>
+          <a:fontRef idx="minor">
+            <a:schemeClr val="lt1"/>
+          </a:fontRef>
+        </p:style>
+        <p:txBody>
+          <a:bodyPr rtlCol="0" anchor="ctr"/>
+          <a:lstStyle/>
+          <a:p>
+            <a:pPr algn="ctr"/>
+            <a:endParaRPr kumimoji="1" lang="ja-JP" altLang="en-US"/>
+          </a:p>
+        </p:txBody>
+      </p:sp>
+      <p:sp>
+        <p:nvSpPr>
+          <p:cNvPr id="26" name="正方形/長方形 25">
+            <a:extLst>
+              <a:ext uri="{FF2B5EF4-FFF2-40B4-BE49-F238E27FC236}">
+                <a16:creationId xmlns:a16="http://schemas.microsoft.com/office/drawing/2014/main" id="{34961579-AD02-6176-1886-B93A3D1CF565}"/>
+              </a:ext>
+            </a:extLst>
+          </p:cNvPr>
+          <p:cNvSpPr/>
+          <p:nvPr/>
+        </p:nvSpPr>
+        <p:spPr>
+          <a:xfrm>
+            <a:off x="6672755" y="1949982"/>
+            <a:ext cx="586194" cy="347631"/>
+          </a:xfrm>
+          <a:prstGeom prst="rect">
+            <a:avLst/>
+          </a:prstGeom>
+          <a:solidFill>
+            <a:srgbClr val="A2A2A2"/>
+          </a:solidFill>
+          <a:ln w="76200">
+            <a:noFill/>
+          </a:ln>
+        </p:spPr>
+        <p:style>
+          <a:lnRef idx="2">
+            <a:schemeClr val="accent1">
+              <a:shade val="15000"/>
+            </a:schemeClr>
+          </a:lnRef>
+          <a:fillRef idx="1">
+            <a:schemeClr val="accent1"/>
+          </a:fillRef>
+          <a:effectRef idx="0">
+            <a:schemeClr val="accent1"/>
+          </a:effectRef>
+          <a:fontRef idx="minor">
+            <a:schemeClr val="lt1"/>
+          </a:fontRef>
+        </p:style>
+        <p:txBody>
+          <a:bodyPr rtlCol="0" anchor="ctr"/>
+          <a:lstStyle/>
+          <a:p>
+            <a:pPr algn="ctr"/>
+            <a:endParaRPr kumimoji="1" lang="ja-JP" altLang="en-US"/>
+          </a:p>
+        </p:txBody>
+      </p:sp>
+      <p:sp>
+        <p:nvSpPr>
+          <p:cNvPr id="27" name="正方形/長方形 26">
+            <a:extLst>
+              <a:ext uri="{FF2B5EF4-FFF2-40B4-BE49-F238E27FC236}">
+                <a16:creationId xmlns:a16="http://schemas.microsoft.com/office/drawing/2014/main" id="{D4D0F42F-0E72-CCCC-339A-1436D0E92A32}"/>
+              </a:ext>
+            </a:extLst>
+          </p:cNvPr>
+          <p:cNvSpPr/>
+          <p:nvPr/>
+        </p:nvSpPr>
+        <p:spPr>
+          <a:xfrm>
+            <a:off x="5465877" y="4964406"/>
+            <a:ext cx="1901619" cy="220132"/>
+          </a:xfrm>
+          <a:prstGeom prst="rect">
+            <a:avLst/>
+          </a:prstGeom>
+          <a:solidFill>
+            <a:srgbClr val="A2A2A2"/>
+          </a:solidFill>
+          <a:ln w="76200">
+            <a:noFill/>
+          </a:ln>
+        </p:spPr>
+        <p:style>
+          <a:lnRef idx="2">
+            <a:schemeClr val="accent1">
+              <a:shade val="15000"/>
+            </a:schemeClr>
+          </a:lnRef>
+          <a:fillRef idx="1">
+            <a:schemeClr val="accent1"/>
+          </a:fillRef>
+          <a:effectRef idx="0">
+            <a:schemeClr val="accent1"/>
+          </a:effectRef>
+          <a:fontRef idx="minor">
+            <a:schemeClr val="lt1"/>
+          </a:fontRef>
+        </p:style>
+        <p:txBody>
+          <a:bodyPr rtlCol="0" anchor="ctr"/>
+          <a:lstStyle/>
+          <a:p>
+            <a:pPr algn="ctr"/>
+            <a:endParaRPr kumimoji="1" lang="ja-JP" altLang="en-US"/>
+          </a:p>
+        </p:txBody>
+      </p:sp>
+      <p:sp>
+        <p:nvSpPr>
+          <p:cNvPr id="28" name="正方形/長方形 27">
+            <a:extLst>
+              <a:ext uri="{FF2B5EF4-FFF2-40B4-BE49-F238E27FC236}">
+                <a16:creationId xmlns:a16="http://schemas.microsoft.com/office/drawing/2014/main" id="{1BD52180-BF7D-EE47-5F0E-2C190ED11FCC}"/>
+              </a:ext>
+            </a:extLst>
+          </p:cNvPr>
+          <p:cNvSpPr/>
+          <p:nvPr/>
+        </p:nvSpPr>
+        <p:spPr>
+          <a:xfrm>
+            <a:off x="5465877" y="5085802"/>
+            <a:ext cx="1296528" cy="801259"/>
+          </a:xfrm>
+          <a:prstGeom prst="rect">
+            <a:avLst/>
+          </a:prstGeom>
+          <a:solidFill>
+            <a:srgbClr val="A2A2A2"/>
+          </a:solidFill>
+          <a:ln w="76200">
+            <a:noFill/>
+          </a:ln>
+        </p:spPr>
+        <p:style>
+          <a:lnRef idx="2">
+            <a:schemeClr val="accent1">
+              <a:shade val="15000"/>
+            </a:schemeClr>
+          </a:lnRef>
+          <a:fillRef idx="1">
+            <a:schemeClr val="accent1"/>
+          </a:fillRef>
+          <a:effectRef idx="0">
+            <a:schemeClr val="accent1"/>
+          </a:effectRef>
+          <a:fontRef idx="minor">
+            <a:schemeClr val="lt1"/>
+          </a:fontRef>
+        </p:style>
+        <p:txBody>
+          <a:bodyPr rtlCol="0" anchor="ctr"/>
+          <a:lstStyle/>
+          <a:p>
+            <a:pPr algn="ctr"/>
+            <a:endParaRPr kumimoji="1" lang="ja-JP" altLang="en-US"/>
+          </a:p>
+        </p:txBody>
+      </p:sp>
+      <p:sp>
+        <p:nvSpPr>
+          <p:cNvPr id="29" name="正方形/長方形 28">
+            <a:extLst>
+              <a:ext uri="{FF2B5EF4-FFF2-40B4-BE49-F238E27FC236}">
+                <a16:creationId xmlns:a16="http://schemas.microsoft.com/office/drawing/2014/main" id="{B13A2544-D68D-71FE-47DC-886FBF706CC2}"/>
+              </a:ext>
+            </a:extLst>
+          </p:cNvPr>
+          <p:cNvSpPr/>
+          <p:nvPr/>
+        </p:nvSpPr>
+        <p:spPr>
+          <a:xfrm rot="2886923">
+            <a:off x="6611665" y="5028760"/>
+            <a:ext cx="433282" cy="775254"/>
+          </a:xfrm>
+          <a:prstGeom prst="rect">
+            <a:avLst/>
+          </a:prstGeom>
+          <a:solidFill>
+            <a:srgbClr val="A2A2A2"/>
+          </a:solidFill>
+          <a:ln w="76200">
+            <a:noFill/>
+          </a:ln>
+        </p:spPr>
+        <p:style>
+          <a:lnRef idx="2">
+            <a:schemeClr val="accent1">
+              <a:shade val="15000"/>
+            </a:schemeClr>
+          </a:lnRef>
+          <a:fillRef idx="1">
+            <a:schemeClr val="accent1"/>
+          </a:fillRef>
+          <a:effectRef idx="0">
+            <a:schemeClr val="accent1"/>
+          </a:effectRef>
+          <a:fontRef idx="minor">
+            <a:schemeClr val="lt1"/>
+          </a:fontRef>
+        </p:style>
+        <p:txBody>
+          <a:bodyPr rtlCol="0" anchor="ctr"/>
+          <a:lstStyle/>
+          <a:p>
+            <a:pPr algn="ctr"/>
+            <a:endParaRPr kumimoji="1" lang="ja-JP" altLang="en-US"/>
+          </a:p>
+        </p:txBody>
+      </p:sp>
+      <p:sp>
+        <p:nvSpPr>
+          <p:cNvPr id="30" name="正方形/長方形 29">
+            <a:extLst>
+              <a:ext uri="{FF2B5EF4-FFF2-40B4-BE49-F238E27FC236}">
+                <a16:creationId xmlns:a16="http://schemas.microsoft.com/office/drawing/2014/main" id="{E8E46891-E7F6-2700-0553-C4E6A90F13F9}"/>
+              </a:ext>
+            </a:extLst>
+          </p:cNvPr>
+          <p:cNvSpPr/>
+          <p:nvPr/>
+        </p:nvSpPr>
+        <p:spPr>
+          <a:xfrm rot="18901224">
+            <a:off x="8167460" y="4688203"/>
+            <a:ext cx="966223" cy="520561"/>
+          </a:xfrm>
+          <a:prstGeom prst="rect">
+            <a:avLst/>
+          </a:prstGeom>
+          <a:solidFill>
+            <a:schemeClr val="tx1">
+              <a:lumMod val="85000"/>
+              <a:lumOff val="15000"/>
+            </a:schemeClr>
+          </a:solidFill>
+          <a:ln w="76200">
+            <a:noFill/>
+          </a:ln>
+        </p:spPr>
+        <p:style>
+          <a:lnRef idx="2">
+            <a:schemeClr val="accent1">
+              <a:shade val="15000"/>
+            </a:schemeClr>
+          </a:lnRef>
+          <a:fillRef idx="1">
+            <a:schemeClr val="accent1"/>
+          </a:fillRef>
+          <a:effectRef idx="0">
+            <a:schemeClr val="accent1"/>
+          </a:effectRef>
+          <a:fontRef idx="minor">
+            <a:schemeClr val="lt1"/>
+          </a:fontRef>
+        </p:style>
+        <p:txBody>
+          <a:bodyPr rtlCol="0" anchor="ctr"/>
+          <a:lstStyle/>
+          <a:p>
+            <a:pPr algn="ctr"/>
+            <a:endParaRPr kumimoji="1" lang="ja-JP" altLang="en-US"/>
+          </a:p>
+        </p:txBody>
+      </p:sp>
+      <p:sp>
+        <p:nvSpPr>
+          <p:cNvPr id="32" name="正方形/長方形 31">
+            <a:extLst>
+              <a:ext uri="{FF2B5EF4-FFF2-40B4-BE49-F238E27FC236}">
+                <a16:creationId xmlns:a16="http://schemas.microsoft.com/office/drawing/2014/main" id="{02F6CC34-D6EE-8D38-5E2A-085A171676DA}"/>
+              </a:ext>
+            </a:extLst>
+          </p:cNvPr>
+          <p:cNvSpPr/>
+          <p:nvPr/>
+        </p:nvSpPr>
+        <p:spPr>
+          <a:xfrm>
+            <a:off x="8490821" y="5048474"/>
+            <a:ext cx="947598" cy="434838"/>
+          </a:xfrm>
+          <a:prstGeom prst="rect">
+            <a:avLst/>
+          </a:prstGeom>
+          <a:solidFill>
+            <a:schemeClr val="tx1">
+              <a:lumMod val="85000"/>
+              <a:lumOff val="15000"/>
+            </a:schemeClr>
+          </a:solidFill>
+          <a:ln w="76200">
+            <a:noFill/>
+          </a:ln>
+        </p:spPr>
+        <p:style>
+          <a:lnRef idx="2">
+            <a:schemeClr val="accent1">
+              <a:shade val="15000"/>
+            </a:schemeClr>
+          </a:lnRef>
+          <a:fillRef idx="1">
+            <a:schemeClr val="accent1"/>
+          </a:fillRef>
+          <a:effectRef idx="0">
+            <a:schemeClr val="accent1"/>
+          </a:effectRef>
+          <a:fontRef idx="minor">
+            <a:schemeClr val="lt1"/>
+          </a:fontRef>
+        </p:style>
+        <p:txBody>
+          <a:bodyPr rtlCol="0" anchor="ctr"/>
+          <a:lstStyle/>
+          <a:p>
+            <a:pPr algn="ctr"/>
+            <a:endParaRPr kumimoji="1" lang="ja-JP" altLang="en-US"/>
+          </a:p>
+        </p:txBody>
+      </p:sp>
+      <p:sp>
+        <p:nvSpPr>
+          <p:cNvPr id="33" name="正方形/長方形 32">
+            <a:extLst>
+              <a:ext uri="{FF2B5EF4-FFF2-40B4-BE49-F238E27FC236}">
+                <a16:creationId xmlns:a16="http://schemas.microsoft.com/office/drawing/2014/main" id="{3039E549-2DC5-5F56-21E9-4EA7A0DFCCAB}"/>
+              </a:ext>
+            </a:extLst>
+          </p:cNvPr>
+          <p:cNvSpPr/>
+          <p:nvPr/>
+        </p:nvSpPr>
+        <p:spPr>
+          <a:xfrm>
+            <a:off x="8799491" y="4422882"/>
+            <a:ext cx="1320708" cy="1063867"/>
+          </a:xfrm>
+          <a:prstGeom prst="rect">
+            <a:avLst/>
+          </a:prstGeom>
+          <a:solidFill>
+            <a:schemeClr val="tx1">
+              <a:lumMod val="85000"/>
+              <a:lumOff val="15000"/>
+            </a:schemeClr>
+          </a:solidFill>
+          <a:ln w="76200">
+            <a:noFill/>
+          </a:ln>
+        </p:spPr>
+        <p:style>
+          <a:lnRef idx="2">
+            <a:schemeClr val="accent1">
+              <a:shade val="15000"/>
+            </a:schemeClr>
+          </a:lnRef>
+          <a:fillRef idx="1">
+            <a:schemeClr val="accent1"/>
+          </a:fillRef>
+          <a:effectRef idx="0">
+            <a:schemeClr val="accent1"/>
+          </a:effectRef>
+          <a:fontRef idx="minor">
+            <a:schemeClr val="lt1"/>
+          </a:fontRef>
+        </p:style>
+        <p:txBody>
+          <a:bodyPr rtlCol="0" anchor="ctr"/>
+          <a:lstStyle/>
+          <a:p>
+            <a:pPr algn="ctr"/>
+            <a:endParaRPr kumimoji="1" lang="ja-JP" altLang="en-US"/>
+          </a:p>
+        </p:txBody>
+      </p:sp>
+      <p:sp>
+        <p:nvSpPr>
+          <p:cNvPr id="35" name="正方形/長方形 34">
+            <a:extLst>
+              <a:ext uri="{FF2B5EF4-FFF2-40B4-BE49-F238E27FC236}">
+                <a16:creationId xmlns:a16="http://schemas.microsoft.com/office/drawing/2014/main" id="{7D9E07FB-B4A7-F86B-748A-D296691932BC}"/>
+              </a:ext>
+            </a:extLst>
+          </p:cNvPr>
+          <p:cNvSpPr/>
+          <p:nvPr/>
+        </p:nvSpPr>
+        <p:spPr>
+          <a:xfrm rot="18901224">
+            <a:off x="8299504" y="4752921"/>
+            <a:ext cx="799948" cy="422374"/>
+          </a:xfrm>
+          <a:prstGeom prst="rect">
+            <a:avLst/>
+          </a:prstGeom>
+          <a:solidFill>
+            <a:srgbClr val="FFFBEF"/>
+          </a:solidFill>
+          <a:ln w="76200">
+            <a:noFill/>
+          </a:ln>
+        </p:spPr>
+        <p:style>
+          <a:lnRef idx="2">
+            <a:schemeClr val="accent1">
+              <a:shade val="15000"/>
+            </a:schemeClr>
+          </a:lnRef>
+          <a:fillRef idx="1">
+            <a:schemeClr val="accent1"/>
+          </a:fillRef>
+          <a:effectRef idx="0">
+            <a:schemeClr val="accent1"/>
+          </a:effectRef>
+          <a:fontRef idx="minor">
+            <a:schemeClr val="lt1"/>
+          </a:fontRef>
+        </p:style>
+        <p:txBody>
+          <a:bodyPr rtlCol="0" anchor="ctr"/>
+          <a:lstStyle/>
+          <a:p>
+            <a:pPr algn="ctr"/>
+            <a:endParaRPr kumimoji="1" lang="ja-JP" altLang="en-US"/>
+          </a:p>
+        </p:txBody>
+      </p:sp>
+      <p:sp>
+        <p:nvSpPr>
+          <p:cNvPr id="36" name="正方形/長方形 35">
+            <a:extLst>
+              <a:ext uri="{FF2B5EF4-FFF2-40B4-BE49-F238E27FC236}">
+                <a16:creationId xmlns:a16="http://schemas.microsoft.com/office/drawing/2014/main" id="{7C28EADD-4F00-E2F6-B76A-BC3FCC9AE57F}"/>
+              </a:ext>
+            </a:extLst>
+          </p:cNvPr>
+          <p:cNvSpPr/>
+          <p:nvPr/>
+        </p:nvSpPr>
+        <p:spPr>
+          <a:xfrm>
+            <a:off x="8567680" y="4973633"/>
+            <a:ext cx="799948" cy="422374"/>
+          </a:xfrm>
+          <a:prstGeom prst="rect">
+            <a:avLst/>
+          </a:prstGeom>
+          <a:solidFill>
+            <a:srgbClr val="FFFBEF"/>
+          </a:solidFill>
+          <a:ln w="76200">
+            <a:noFill/>
+          </a:ln>
+        </p:spPr>
+        <p:style>
+          <a:lnRef idx="2">
+            <a:schemeClr val="accent1">
+              <a:shade val="15000"/>
+            </a:schemeClr>
+          </a:lnRef>
+          <a:fillRef idx="1">
+            <a:schemeClr val="accent1"/>
+          </a:fillRef>
+          <a:effectRef idx="0">
+            <a:schemeClr val="accent1"/>
+          </a:effectRef>
+          <a:fontRef idx="minor">
+            <a:schemeClr val="lt1"/>
+          </a:fontRef>
+        </p:style>
+        <p:txBody>
+          <a:bodyPr rtlCol="0" anchor="ctr"/>
+          <a:lstStyle/>
+          <a:p>
+            <a:pPr algn="ctr"/>
+            <a:endParaRPr kumimoji="1" lang="ja-JP" altLang="en-US"/>
+          </a:p>
+        </p:txBody>
+      </p:sp>
+      <p:sp>
+        <p:nvSpPr>
+          <p:cNvPr id="37" name="正方形/長方形 36">
+            <a:extLst>
+              <a:ext uri="{FF2B5EF4-FFF2-40B4-BE49-F238E27FC236}">
+                <a16:creationId xmlns:a16="http://schemas.microsoft.com/office/drawing/2014/main" id="{61223690-0F2C-3B98-BA94-81D5611C9A1A}"/>
+              </a:ext>
+            </a:extLst>
+          </p:cNvPr>
+          <p:cNvSpPr/>
+          <p:nvPr/>
+        </p:nvSpPr>
+        <p:spPr>
+          <a:xfrm>
+            <a:off x="8830276" y="4534009"/>
+            <a:ext cx="1284843" cy="861998"/>
+          </a:xfrm>
+          <a:prstGeom prst="rect">
+            <a:avLst/>
+          </a:prstGeom>
+          <a:solidFill>
+            <a:srgbClr val="FFFBEF"/>
+          </a:solidFill>
+          <a:ln w="76200">
+            <a:noFill/>
+          </a:ln>
+        </p:spPr>
+        <p:style>
+          <a:lnRef idx="2">
+            <a:schemeClr val="accent1">
+              <a:shade val="15000"/>
+            </a:schemeClr>
+          </a:lnRef>
+          <a:fillRef idx="1">
+            <a:schemeClr val="accent1"/>
+          </a:fillRef>
+          <a:effectRef idx="0">
+            <a:schemeClr val="accent1"/>
+          </a:effectRef>
+          <a:fontRef idx="minor">
+            <a:schemeClr val="lt1"/>
+          </a:fontRef>
+        </p:style>
+        <p:txBody>
+          <a:bodyPr rtlCol="0" anchor="ctr"/>
+          <a:lstStyle/>
+          <a:p>
+            <a:pPr algn="ctr"/>
+            <a:endParaRPr kumimoji="1" lang="ja-JP" altLang="en-US"/>
+          </a:p>
+        </p:txBody>
+      </p:sp>
+      <p:sp>
+        <p:nvSpPr>
+          <p:cNvPr id="38" name="正方形/長方形 37">
+            <a:extLst>
+              <a:ext uri="{FF2B5EF4-FFF2-40B4-BE49-F238E27FC236}">
+                <a16:creationId xmlns:a16="http://schemas.microsoft.com/office/drawing/2014/main" id="{5E2A70D6-9E96-38B1-CF4E-8F777B5351DA}"/>
+              </a:ext>
+            </a:extLst>
+          </p:cNvPr>
+          <p:cNvSpPr/>
+          <p:nvPr/>
+        </p:nvSpPr>
+        <p:spPr>
+          <a:xfrm rot="18901224">
+            <a:off x="8348830" y="4798877"/>
+            <a:ext cx="718963" cy="330798"/>
+          </a:xfrm>
+          <a:prstGeom prst="rect">
+            <a:avLst/>
+          </a:prstGeom>
+          <a:solidFill>
+            <a:srgbClr val="A2A2A2"/>
+          </a:solidFill>
+          <a:ln w="76200">
+            <a:noFill/>
+          </a:ln>
+        </p:spPr>
+        <p:style>
+          <a:lnRef idx="2">
+            <a:schemeClr val="accent1">
+              <a:shade val="15000"/>
+            </a:schemeClr>
+          </a:lnRef>
+          <a:fillRef idx="1">
+            <a:schemeClr val="accent1"/>
+          </a:fillRef>
+          <a:effectRef idx="0">
+            <a:schemeClr val="accent1"/>
+          </a:effectRef>
+          <a:fontRef idx="minor">
+            <a:schemeClr val="lt1"/>
+          </a:fontRef>
+        </p:style>
+        <p:txBody>
+          <a:bodyPr rtlCol="0" anchor="ctr"/>
+          <a:lstStyle/>
+          <a:p>
+            <a:pPr algn="ctr"/>
+            <a:endParaRPr kumimoji="1" lang="ja-JP" altLang="en-US"/>
+          </a:p>
+        </p:txBody>
+      </p:sp>
+      <p:sp>
+        <p:nvSpPr>
+          <p:cNvPr id="39" name="正方形/長方形 38">
+            <a:extLst>
+              <a:ext uri="{FF2B5EF4-FFF2-40B4-BE49-F238E27FC236}">
+                <a16:creationId xmlns:a16="http://schemas.microsoft.com/office/drawing/2014/main" id="{A70A4889-E778-B419-89A4-9F6164118375}"/>
+              </a:ext>
+            </a:extLst>
+          </p:cNvPr>
+          <p:cNvSpPr/>
+          <p:nvPr/>
+        </p:nvSpPr>
+        <p:spPr>
+          <a:xfrm>
+            <a:off x="8574286" y="5005276"/>
+            <a:ext cx="288261" cy="330798"/>
+          </a:xfrm>
+          <a:prstGeom prst="rect">
+            <a:avLst/>
+          </a:prstGeom>
+          <a:solidFill>
+            <a:srgbClr val="A2A2A2"/>
+          </a:solidFill>
+          <a:ln w="76200">
+            <a:noFill/>
+          </a:ln>
+        </p:spPr>
+        <p:style>
+          <a:lnRef idx="2">
+            <a:schemeClr val="accent1">
+              <a:shade val="15000"/>
+            </a:schemeClr>
+          </a:lnRef>
+          <a:fillRef idx="1">
+            <a:schemeClr val="accent1"/>
+          </a:fillRef>
+          <a:effectRef idx="0">
+            <a:schemeClr val="accent1"/>
+          </a:effectRef>
+          <a:fontRef idx="minor">
+            <a:schemeClr val="lt1"/>
+          </a:fontRef>
+        </p:style>
+        <p:txBody>
+          <a:bodyPr rtlCol="0" anchor="ctr"/>
+          <a:lstStyle/>
+          <a:p>
+            <a:pPr algn="ctr"/>
+            <a:endParaRPr kumimoji="1" lang="ja-JP" altLang="en-US"/>
+          </a:p>
+        </p:txBody>
+      </p:sp>
+      <p:sp>
+        <p:nvSpPr>
+          <p:cNvPr id="40" name="正方形/長方形 39">
+            <a:extLst>
+              <a:ext uri="{FF2B5EF4-FFF2-40B4-BE49-F238E27FC236}">
+                <a16:creationId xmlns:a16="http://schemas.microsoft.com/office/drawing/2014/main" id="{39AD00BD-32F9-C490-C6D8-29AB0CEFB836}"/>
+              </a:ext>
+            </a:extLst>
+          </p:cNvPr>
+          <p:cNvSpPr/>
+          <p:nvPr/>
+        </p:nvSpPr>
+        <p:spPr>
+          <a:xfrm>
+            <a:off x="8847578" y="4593437"/>
+            <a:ext cx="1271061" cy="741937"/>
+          </a:xfrm>
+          <a:prstGeom prst="rect">
+            <a:avLst/>
+          </a:prstGeom>
+          <a:solidFill>
+            <a:srgbClr val="A2A2A2"/>
+          </a:solidFill>
+          <a:ln w="76200">
+            <a:noFill/>
+          </a:ln>
+        </p:spPr>
+        <p:style>
+          <a:lnRef idx="2">
+            <a:schemeClr val="accent1">
+              <a:shade val="15000"/>
+            </a:schemeClr>
+          </a:lnRef>
+          <a:fillRef idx="1">
+            <a:schemeClr val="accent1"/>
+          </a:fillRef>
+          <a:effectRef idx="0">
+            <a:schemeClr val="accent1"/>
+          </a:effectRef>
+          <a:fontRef idx="minor">
+            <a:schemeClr val="lt1"/>
+          </a:fontRef>
+        </p:style>
+        <p:txBody>
+          <a:bodyPr rtlCol="0" anchor="ctr"/>
+          <a:lstStyle/>
+          <a:p>
+            <a:pPr algn="ctr"/>
+            <a:endParaRPr kumimoji="1" lang="ja-JP" altLang="en-US"/>
+          </a:p>
+        </p:txBody>
+      </p:sp>
+    </p:spTree>
+    <p:extLst>
+      <p:ext uri="{BB962C8B-B14F-4D97-AF65-F5344CB8AC3E}">
+        <p14:creationId xmlns:p14="http://schemas.microsoft.com/office/powerpoint/2010/main" val="1979770857"/>
+      </p:ext>
+    </p:extLst>
+  </p:cSld>
+  <p:clrMapOvr>
+    <a:masterClrMapping/>
+  </p:clrMapOvr>
+</p:sld>
+</file>
+
+<file path=ppt/slides/slide16.xml><?xml version="1.0" encoding="utf-8"?>
+<p:sld xmlns:a="http://schemas.openxmlformats.org/drawingml/2006/main" xmlns:r="http://schemas.openxmlformats.org/officeDocument/2006/relationships" xmlns:p="http://schemas.openxmlformats.org/presentationml/2006/main">
+  <p:cSld>
+    <p:spTree>
+      <p:nvGrpSpPr>
+        <p:cNvPr id="1" name=""/>
+        <p:cNvGrpSpPr/>
+        <p:nvPr/>
+      </p:nvGrpSpPr>
+      <p:grpSpPr>
+        <a:xfrm>
+          <a:off x="0" y="0"/>
+          <a:ext cx="0" cy="0"/>
+          <a:chOff x="0" y="0"/>
+          <a:chExt cx="0" cy="0"/>
+        </a:xfrm>
+      </p:grpSpPr>
       <p:sp>
         <p:nvSpPr>
           <p:cNvPr id="20" name="正方形/長方形 19">
@@ -10353,7 +11857,7 @@
 </p:sld>
 </file>
 
-<file path=ppt/slides/slide15.xml><?xml version="1.0" encoding="utf-8"?>
+<file path=ppt/slides/slide17.xml><?xml version="1.0" encoding="utf-8"?>
 <p:sld xmlns:a="http://schemas.openxmlformats.org/drawingml/2006/main" xmlns:r="http://schemas.openxmlformats.org/officeDocument/2006/relationships" xmlns:p="http://schemas.openxmlformats.org/presentationml/2006/main">
   <p:cSld>
     <p:spTree>
@@ -11498,7 +13002,7 @@
 </p:sld>
 </file>
 
-<file path=ppt/slides/slide16.xml><?xml version="1.0" encoding="utf-8"?>
+<file path=ppt/slides/slide18.xml><?xml version="1.0" encoding="utf-8"?>
 <p:sld xmlns:a="http://schemas.openxmlformats.org/drawingml/2006/main" xmlns:r="http://schemas.openxmlformats.org/officeDocument/2006/relationships" xmlns:p="http://schemas.openxmlformats.org/presentationml/2006/main">
   <p:cSld>
     <p:spTree>
